--- a/plugins/gradient-cio/assets/examples/gradient-odd-report-compare.pptx
+++ b/plugins/gradient-cio/assets/examples/gradient-odd-report-compare.pptx
@@ -21,6 +21,7 @@
     <ns0:sldId id="269" ns1:id="rId20"/>
     <ns0:sldId id="270" ns1:id="rId21"/>
     <ns0:sldId id="271" ns1:id="rId22"/>
+    <ns0:sldId id="272" ns1:id="rId23"/>
   </ns0:sldIdLst>
   <ns0:sldSz cx="12191695" cy="6858000" type="screen16x9"/>
   <ns0:notesSz cx="6858000" cy="9144000"/>
@@ -4265,7 +4266,7 @@
               <a:rPr>
                 <a:latin typeface="Inter"/>
               </a:rPr>
-              <a:t>IN DILIGENCE CATALOG</a:t>
+              <a:t>FORM ADV AS OF</a:t>
             </a:r>
           </a:p>
         </p:txBody>
@@ -4307,7 +4308,7 @@
               <a:rPr>
                 <a:latin typeface="Inter"/>
               </a:rPr>
-              <a:t>2 of 3</a:t>
+              <a:t>2026-10-01</a:t>
             </a:r>
           </a:p>
         </p:txBody>
@@ -4349,7 +4350,7 @@
               <a:rPr>
                 <a:latin typeface="Inter"/>
               </a:rPr>
-              <a:t>FORM ADV AS OF</a:t>
+              <a:t>REPORT DATE</a:t>
             </a:r>
           </a:p>
         </p:txBody>
@@ -4391,90 +4392,6 @@
               <a:rPr>
                 <a:latin typeface="Inter"/>
               </a:rPr>
-              <a:t>2026-10-01</a:t>
-            </a:r>
-          </a:p>
-        </p:txBody>
-      </p:sp>
-      <p:sp>
-        <p:nvSpPr>
-          <p:cNvPr id="15" name="TextBox 14"/>
-          <p:cNvSpPr txBox="1"/>
-          <p:nvPr/>
-        </p:nvSpPr>
-        <p:spPr>
-          <a:xfrm>
-            <a:off x="5852160" y="4937759"/>
-            <a:ext cx="4709160" cy="182880"/>
-          </a:xfrm>
-          <a:prstGeom prst="rect">
-            <a:avLst/>
-          </a:prstGeom>
-          <a:noFill/>
-        </p:spPr>
-        <p:txBody>
-          <a:bodyPr wrap="none" lIns="9144" rIns="9144" tIns="9144" bIns="9144" anchor="t">
-            <a:spAutoFit/>
-          </a:bodyPr>
-          <a:lstStyle/>
-          <a:p>
-            <a:pPr algn="l">
-              <a:spcAft>
-                <a:spcPts val="0"/>
-              </a:spcAft>
-              <a:defRPr sz="700" b="1">
-                <a:solidFill>
-                  <a:srgbClr val="8A94A1"/>
-                </a:solidFill>
-                <a:latin typeface="Inter"/>
-              </a:defRPr>
-            </a:pPr>
-            <a:r>
-              <a:rPr>
-                <a:latin typeface="Inter"/>
-              </a:rPr>
-              <a:t>REPORT DATE</a:t>
-            </a:r>
-          </a:p>
-        </p:txBody>
-      </p:sp>
-      <p:sp>
-        <p:nvSpPr>
-          <p:cNvPr id="16" name="TextBox 15"/>
-          <p:cNvSpPr txBox="1"/>
-          <p:nvPr/>
-        </p:nvSpPr>
-        <p:spPr>
-          <a:xfrm>
-            <a:off x="5852160" y="5129783"/>
-            <a:ext cx="4709160" cy="310896"/>
-          </a:xfrm>
-          <a:prstGeom prst="rect">
-            <a:avLst/>
-          </a:prstGeom>
-          <a:noFill/>
-        </p:spPr>
-        <p:txBody>
-          <a:bodyPr wrap="none" lIns="9144" rIns="9144" tIns="9144" bIns="9144" anchor="t">
-            <a:spAutoFit/>
-          </a:bodyPr>
-          <a:lstStyle/>
-          <a:p>
-            <a:pPr algn="l">
-              <a:spcAft>
-                <a:spcPts val="0"/>
-              </a:spcAft>
-              <a:defRPr sz="1000" b="1">
-                <a:solidFill>
-                  <a:srgbClr val="FFFFFF"/>
-                </a:solidFill>
-                <a:latin typeface="Inter"/>
-              </a:defRPr>
-            </a:pPr>
-            <a:r>
-              <a:rPr>
-                <a:latin typeface="Inter"/>
-              </a:rPr>
               <a:t>2026-10-04</a:t>
             </a:r>
           </a:p>
@@ -4482,224 +4399,7 @@
       </p:sp>
       <p:sp>
         <p:nvSpPr>
-          <p:cNvPr id="17" name="Rectangle 16"/>
-          <p:cNvSpPr/>
-          <p:nvPr/>
-        </p:nvSpPr>
-        <p:spPr>
-          <a:xfrm>
-            <a:off x="685800" y="5687568"/>
-            <a:ext cx="3337560" cy="530352"/>
-          </a:xfrm>
-          <a:prstGeom prst="rect">
-            <a:avLst/>
-          </a:prstGeom>
-          <a:solidFill>
-            <a:srgbClr val="F2A93B"/>
-          </a:solidFill>
-          <a:ln>
-            <a:solidFill>
-              <a:srgbClr val="F2A93B"/>
-            </a:solidFill>
-          </a:ln>
-        </p:spPr>
-        <p:style>
-          <a:lnRef idx="1">
-            <a:schemeClr val="accent1"/>
-          </a:lnRef>
-          <a:fillRef idx="3">
-            <a:schemeClr val="accent1"/>
-          </a:fillRef>
-          <a:effectRef idx="2">
-            <a:schemeClr val="accent1"/>
-          </a:effectRef>
-          <a:fontRef idx="minor">
-            <a:schemeClr val="lt1"/>
-          </a:fontRef>
-        </p:style>
-        <p:txBody>
-          <a:bodyPr rtlCol="0" anchor="ctr"/>
-          <a:lstStyle/>
-          <a:p>
-            <a:pPr algn="ctr">
-              <a:defRPr>
-                <a:latin typeface="Inter"/>
-              </a:defRPr>
-            </a:pPr>
-          </a:p>
-        </p:txBody>
-      </p:sp>
-      <p:sp>
-        <p:nvSpPr>
-          <p:cNvPr id="18" name="TextBox 17"/>
-          <p:cNvSpPr txBox="1"/>
-          <p:nvPr/>
-        </p:nvSpPr>
-        <p:spPr>
-          <a:xfrm>
-            <a:off x="822960" y="5760720"/>
-            <a:ext cx="3063240" cy="128016"/>
-          </a:xfrm>
-          <a:prstGeom prst="rect">
-            <a:avLst/>
-          </a:prstGeom>
-          <a:noFill/>
-        </p:spPr>
-        <p:txBody>
-          <a:bodyPr wrap="none" lIns="9144" rIns="9144" tIns="9144" bIns="9144" anchor="t">
-            <a:spAutoFit/>
-          </a:bodyPr>
-          <a:lstStyle/>
-          <a:p>
-            <a:pPr algn="l">
-              <a:spcAft>
-                <a:spcPts val="0"/>
-              </a:spcAft>
-              <a:defRPr sz="620" b="1">
-                <a:solidFill>
-                  <a:srgbClr val="0D1117"/>
-                </a:solidFill>
-                <a:latin typeface="Inter"/>
-              </a:defRPr>
-            </a:pPr>
-            <a:r>
-              <a:rPr>
-                <a:latin typeface="Inter"/>
-              </a:rPr>
-              <a:t>OVERALL VIEW</a:t>
-            </a:r>
-          </a:p>
-        </p:txBody>
-      </p:sp>
-      <p:sp>
-        <p:nvSpPr>
-          <p:cNvPr id="19" name="TextBox 18"/>
-          <p:cNvSpPr txBox="1"/>
-          <p:nvPr/>
-        </p:nvSpPr>
-        <p:spPr>
-          <a:xfrm>
-            <a:off x="822960" y="5916168"/>
-            <a:ext cx="3063240" cy="182880"/>
-          </a:xfrm>
-          <a:prstGeom prst="rect">
-            <a:avLst/>
-          </a:prstGeom>
-          <a:noFill/>
-        </p:spPr>
-        <p:txBody>
-          <a:bodyPr wrap="none" lIns="9144" rIns="9144" tIns="9144" bIns="9144" anchor="t">
-            <a:spAutoFit/>
-          </a:bodyPr>
-          <a:lstStyle/>
-          <a:p>
-            <a:pPr algn="l">
-              <a:spcAft>
-                <a:spcPts val="0"/>
-              </a:spcAft>
-              <a:defRPr sz="900" b="1">
-                <a:solidFill>
-                  <a:srgbClr val="0D1117"/>
-                </a:solidFill>
-                <a:latin typeface="Inter"/>
-              </a:defRPr>
-            </a:pPr>
-            <a:r>
-              <a:rPr>
-                <a:latin typeface="Inter"/>
-              </a:rPr>
-              <a:t>2 of 3 managers with flags</a:t>
-            </a:r>
-          </a:p>
-        </p:txBody>
-      </p:sp>
-      <p:sp>
-        <p:nvSpPr>
-          <p:cNvPr id="20" name="TextBox 19"/>
-          <p:cNvSpPr txBox="1"/>
-          <p:nvPr/>
-        </p:nvSpPr>
-        <p:spPr>
-          <a:xfrm>
-            <a:off x="4297680" y="5733288"/>
-            <a:ext cx="3108960" cy="164592"/>
-          </a:xfrm>
-          <a:prstGeom prst="rect">
-            <a:avLst/>
-          </a:prstGeom>
-          <a:noFill/>
-        </p:spPr>
-        <p:txBody>
-          <a:bodyPr wrap="none" lIns="9144" rIns="9144" tIns="9144" bIns="9144" anchor="t">
-            <a:spAutoFit/>
-          </a:bodyPr>
-          <a:lstStyle/>
-          <a:p>
-            <a:pPr algn="l">
-              <a:spcAft>
-                <a:spcPts val="0"/>
-              </a:spcAft>
-              <a:defRPr sz="650" b="1">
-                <a:solidFill>
-                  <a:srgbClr val="8A94A1"/>
-                </a:solidFill>
-                <a:latin typeface="Inter"/>
-              </a:defRPr>
-            </a:pPr>
-            <a:r>
-              <a:rPr>
-                <a:latin typeface="Inter"/>
-              </a:rPr>
-              <a:t>SCOPE REVIEWED</a:t>
-            </a:r>
-          </a:p>
-        </p:txBody>
-      </p:sp>
-      <p:sp>
-        <p:nvSpPr>
-          <p:cNvPr id="21" name="TextBox 20"/>
-          <p:cNvSpPr txBox="1"/>
-          <p:nvPr/>
-        </p:nvSpPr>
-        <p:spPr>
-          <a:xfrm>
-            <a:off x="4297680" y="5934456"/>
-            <a:ext cx="3108960" cy="201168"/>
-          </a:xfrm>
-          <a:prstGeom prst="rect">
-            <a:avLst/>
-          </a:prstGeom>
-          <a:noFill/>
-        </p:spPr>
-        <p:txBody>
-          <a:bodyPr wrap="none" lIns="9144" rIns="9144" tIns="9144" bIns="9144" anchor="t">
-            <a:spAutoFit/>
-          </a:bodyPr>
-          <a:lstStyle/>
-          <a:p>
-            <a:pPr algn="l">
-              <a:spcAft>
-                <a:spcPts val="0"/>
-              </a:spcAft>
-              <a:defRPr sz="800" b="1">
-                <a:solidFill>
-                  <a:srgbClr val="FFFFFF"/>
-                </a:solidFill>
-                <a:latin typeface="Inter"/>
-              </a:defRPr>
-            </a:pPr>
-            <a:r>
-              <a:rPr>
-                <a:latin typeface="Inter"/>
-              </a:rPr>
-              <a:t>11 of 13 · Partial</a:t>
-            </a:r>
-          </a:p>
-        </p:txBody>
-      </p:sp>
-      <p:sp>
-        <p:nvSpPr>
-          <p:cNvPr id="22" name="TextBox 21"/>
+          <p:cNvPr id="15" name="TextBox 14"/>
           <p:cNvSpPr txBox="1"/>
           <p:nvPr/>
         </p:nvSpPr>
@@ -4741,7 +4441,7 @@
       </p:sp>
       <p:sp>
         <p:nvSpPr>
-          <p:cNvPr id="23" name="TextBox 22"/>
+          <p:cNvPr id="16" name="TextBox 15"/>
           <p:cNvSpPr txBox="1"/>
           <p:nvPr/>
         </p:nvSpPr>
@@ -4783,7 +4483,7 @@
       </p:sp>
       <p:sp>
         <p:nvSpPr>
-          <p:cNvPr id="24" name="TextBox 23"/>
+          <p:cNvPr id="17" name="TextBox 16"/>
           <p:cNvSpPr txBox="1"/>
           <p:nvPr/>
         </p:nvSpPr>
@@ -4899,7 +4599,7 @@
         <p:spPr>
           <a:xfrm>
             <a:off x="640080" y="329184"/>
-            <a:ext cx="5303520" cy="182880"/>
+            <a:ext cx="9875520" cy="182880"/>
           </a:xfrm>
           <a:prstGeom prst="rect">
             <a:avLst/>
@@ -4940,48 +4640,6 @@
         </p:nvSpPr>
         <p:spPr>
           <a:xfrm>
-            <a:off x="5897880" y="310896"/>
-            <a:ext cx="4800600" cy="256032"/>
-          </a:xfrm>
-          <a:prstGeom prst="rect">
-            <a:avLst/>
-          </a:prstGeom>
-          <a:noFill/>
-        </p:spPr>
-        <p:txBody>
-          <a:bodyPr wrap="none" lIns="9144" rIns="9144" tIns="9144" bIns="9144" anchor="t">
-            <a:spAutoFit/>
-          </a:bodyPr>
-          <a:lstStyle/>
-          <a:p>
-            <a:pPr algn="r">
-              <a:spcAft>
-                <a:spcPts val="0"/>
-              </a:spcAft>
-              <a:defRPr sz="680" b="1">
-                <a:solidFill>
-                  <a:srgbClr val="4F6B00"/>
-                </a:solidFill>
-                <a:latin typeface="Inter"/>
-              </a:defRPr>
-            </a:pPr>
-            <a:r>
-              <a:rPr>
-                <a:latin typeface="Inter"/>
-              </a:rPr>
-              <a:t>Illustrative, Gradient Maintained — demo data, not the client's holdings or managers</a:t>
-            </a:r>
-          </a:p>
-        </p:txBody>
-      </p:sp>
-      <p:sp>
-        <p:nvSpPr>
-          <p:cNvPr id="5" name="TextBox 4"/>
-          <p:cNvSpPr txBox="1"/>
-          <p:nvPr/>
-        </p:nvSpPr>
-        <p:spPr>
-          <a:xfrm>
             <a:off x="640080" y="566928"/>
             <a:ext cx="10058400" cy="530352"/>
           </a:xfrm>
@@ -5018,7 +4676,7 @@
       </p:sp>
       <p:sp>
         <p:nvSpPr>
-          <p:cNvPr id="6" name="Rectangle 5"/>
+          <p:cNvPr id="5" name="Rectangle 4"/>
           <p:cNvSpPr/>
           <p:nvPr/>
         </p:nvSpPr>
@@ -5067,7 +4725,7 @@
       </p:sp>
       <p:sp>
         <p:nvSpPr>
-          <p:cNvPr id="7" name="Rectangle 6"/>
+          <p:cNvPr id="6" name="Rectangle 5"/>
           <p:cNvSpPr/>
           <p:nvPr/>
         </p:nvSpPr>
@@ -5116,7 +4774,7 @@
       </p:sp>
       <p:sp>
         <p:nvSpPr>
-          <p:cNvPr id="8" name="TextBox 7"/>
+          <p:cNvPr id="7" name="TextBox 6"/>
           <p:cNvSpPr txBox="1"/>
           <p:nvPr/>
         </p:nvSpPr>
@@ -5158,7 +4816,7 @@
       </p:sp>
       <p:sp>
         <p:nvSpPr>
-          <p:cNvPr id="9" name="TextBox 8"/>
+          <p:cNvPr id="8" name="TextBox 7"/>
           <p:cNvSpPr txBox="1"/>
           <p:nvPr/>
         </p:nvSpPr>
@@ -5200,7 +4858,7 @@
       </p:sp>
       <p:graphicFrame>
         <p:nvGraphicFramePr>
-          <p:cNvPr id="10" name="Table 9"/>
+          <p:cNvPr id="9" name="Table 8"/>
           <p:cNvGraphicFramePr>
             <a:graphicFrameLocks noGrp="1"/>
           </p:cNvGraphicFramePr>
@@ -5470,7 +5128,7 @@
       </p:graphicFrame>
       <p:sp>
         <p:nvSpPr>
-          <p:cNvPr id="11" name="Rectangle 10"/>
+          <p:cNvPr id="10" name="Rectangle 9"/>
           <p:cNvSpPr/>
           <p:nvPr/>
         </p:nvSpPr>
@@ -5519,7 +5177,7 @@
       </p:sp>
       <p:sp>
         <p:nvSpPr>
-          <p:cNvPr id="12" name="TextBox 11"/>
+          <p:cNvPr id="11" name="TextBox 10"/>
           <p:cNvSpPr txBox="1"/>
           <p:nvPr/>
         </p:nvSpPr>
@@ -5561,7 +5219,7 @@
       </p:sp>
       <p:sp>
         <p:nvSpPr>
-          <p:cNvPr id="13" name="TextBox 12"/>
+          <p:cNvPr id="12" name="TextBox 11"/>
           <p:cNvSpPr txBox="1"/>
           <p:nvPr/>
         </p:nvSpPr>
@@ -5603,7 +5261,7 @@
       </p:sp>
       <p:sp>
         <p:nvSpPr>
-          <p:cNvPr id="14" name="TextBox 13"/>
+          <p:cNvPr id="13" name="TextBox 12"/>
           <p:cNvSpPr txBox="1"/>
           <p:nvPr/>
         </p:nvSpPr>
@@ -5719,7 +5377,7 @@
         <p:spPr>
           <a:xfrm>
             <a:off x="640080" y="329184"/>
-            <a:ext cx="5303520" cy="182880"/>
+            <a:ext cx="9875520" cy="182880"/>
           </a:xfrm>
           <a:prstGeom prst="rect">
             <a:avLst/>
@@ -5760,48 +5418,6 @@
         </p:nvSpPr>
         <p:spPr>
           <a:xfrm>
-            <a:off x="5897880" y="310896"/>
-            <a:ext cx="4800600" cy="256032"/>
-          </a:xfrm>
-          <a:prstGeom prst="rect">
-            <a:avLst/>
-          </a:prstGeom>
-          <a:noFill/>
-        </p:spPr>
-        <p:txBody>
-          <a:bodyPr wrap="none" lIns="9144" rIns="9144" tIns="9144" bIns="9144" anchor="t">
-            <a:spAutoFit/>
-          </a:bodyPr>
-          <a:lstStyle/>
-          <a:p>
-            <a:pPr algn="r">
-              <a:spcAft>
-                <a:spcPts val="0"/>
-              </a:spcAft>
-              <a:defRPr sz="680" b="1">
-                <a:solidFill>
-                  <a:srgbClr val="4F6B00"/>
-                </a:solidFill>
-                <a:latin typeface="Inter"/>
-              </a:defRPr>
-            </a:pPr>
-            <a:r>
-              <a:rPr>
-                <a:latin typeface="Inter"/>
-              </a:rPr>
-              <a:t>Illustrative, Gradient Maintained — demo data, not the client's holdings or managers</a:t>
-            </a:r>
-          </a:p>
-        </p:txBody>
-      </p:sp>
-      <p:sp>
-        <p:nvSpPr>
-          <p:cNvPr id="5" name="TextBox 4"/>
-          <p:cNvSpPr txBox="1"/>
-          <p:nvPr/>
-        </p:nvSpPr>
-        <p:spPr>
-          <a:xfrm>
             <a:off x="640080" y="566928"/>
             <a:ext cx="10058400" cy="530352"/>
           </a:xfrm>
@@ -5838,7 +5454,7 @@
       </p:sp>
       <p:sp>
         <p:nvSpPr>
-          <p:cNvPr id="6" name="Rectangle 5"/>
+          <p:cNvPr id="5" name="Rectangle 4"/>
           <p:cNvSpPr/>
           <p:nvPr/>
         </p:nvSpPr>
@@ -5887,7 +5503,7 @@
       </p:sp>
       <p:sp>
         <p:nvSpPr>
-          <p:cNvPr id="7" name="Rectangle 6"/>
+          <p:cNvPr id="6" name="Rectangle 5"/>
           <p:cNvSpPr/>
           <p:nvPr/>
         </p:nvSpPr>
@@ -5936,7 +5552,7 @@
       </p:sp>
       <p:sp>
         <p:nvSpPr>
-          <p:cNvPr id="8" name="TextBox 7"/>
+          <p:cNvPr id="7" name="TextBox 6"/>
           <p:cNvSpPr txBox="1"/>
           <p:nvPr/>
         </p:nvSpPr>
@@ -5978,7 +5594,7 @@
       </p:sp>
       <p:sp>
         <p:nvSpPr>
-          <p:cNvPr id="9" name="TextBox 8"/>
+          <p:cNvPr id="8" name="TextBox 7"/>
           <p:cNvSpPr txBox="1"/>
           <p:nvPr/>
         </p:nvSpPr>
@@ -6020,7 +5636,7 @@
       </p:sp>
       <p:graphicFrame>
         <p:nvGraphicFramePr>
-          <p:cNvPr id="10" name="Table 9"/>
+          <p:cNvPr id="9" name="Table 8"/>
           <p:cNvGraphicFramePr>
             <a:graphicFrameLocks noGrp="1"/>
           </p:cNvGraphicFramePr>
@@ -6464,7 +6080,7 @@
       </p:graphicFrame>
       <p:sp>
         <p:nvSpPr>
-          <p:cNvPr id="11" name="TextBox 10"/>
+          <p:cNvPr id="10" name="TextBox 9"/>
           <p:cNvSpPr txBox="1"/>
           <p:nvPr/>
         </p:nvSpPr>
@@ -6506,7 +6122,7 @@
       </p:sp>
       <p:sp>
         <p:nvSpPr>
-          <p:cNvPr id="12" name="TextBox 11"/>
+          <p:cNvPr id="11" name="TextBox 10"/>
           <p:cNvSpPr txBox="1"/>
           <p:nvPr/>
         </p:nvSpPr>
@@ -6548,7 +6164,7 @@
       </p:sp>
       <p:graphicFrame>
         <p:nvGraphicFramePr>
-          <p:cNvPr id="13" name="Table 12"/>
+          <p:cNvPr id="12" name="Table 11"/>
           <p:cNvGraphicFramePr>
             <a:graphicFrameLocks noGrp="1"/>
           </p:cNvGraphicFramePr>
@@ -7016,7 +6632,7 @@
       </p:graphicFrame>
       <p:sp>
         <p:nvSpPr>
-          <p:cNvPr id="14" name="Rectangle 13"/>
+          <p:cNvPr id="13" name="Rectangle 12"/>
           <p:cNvSpPr/>
           <p:nvPr/>
         </p:nvSpPr>
@@ -7065,7 +6681,7 @@
       </p:sp>
       <p:sp>
         <p:nvSpPr>
-          <p:cNvPr id="15" name="Rectangle 14"/>
+          <p:cNvPr id="14" name="Rectangle 13"/>
           <p:cNvSpPr/>
           <p:nvPr/>
         </p:nvSpPr>
@@ -7114,7 +6730,7 @@
       </p:sp>
       <p:sp>
         <p:nvSpPr>
-          <p:cNvPr id="16" name="TextBox 15"/>
+          <p:cNvPr id="15" name="TextBox 14"/>
           <p:cNvSpPr txBox="1"/>
           <p:nvPr/>
         </p:nvSpPr>
@@ -7156,7 +6772,7 @@
       </p:sp>
       <p:sp>
         <p:nvSpPr>
-          <p:cNvPr id="17" name="TextBox 16"/>
+          <p:cNvPr id="16" name="TextBox 15"/>
           <p:cNvSpPr txBox="1"/>
           <p:nvPr/>
         </p:nvSpPr>
@@ -7198,7 +6814,7 @@
       </p:sp>
       <p:sp>
         <p:nvSpPr>
-          <p:cNvPr id="18" name="Rectangle 17"/>
+          <p:cNvPr id="17" name="Rectangle 16"/>
           <p:cNvSpPr/>
           <p:nvPr/>
         </p:nvSpPr>
@@ -7247,7 +6863,7 @@
       </p:sp>
       <p:sp>
         <p:nvSpPr>
-          <p:cNvPr id="19" name="Rectangle 18"/>
+          <p:cNvPr id="18" name="Rectangle 17"/>
           <p:cNvSpPr/>
           <p:nvPr/>
         </p:nvSpPr>
@@ -7296,7 +6912,7 @@
       </p:sp>
       <p:sp>
         <p:nvSpPr>
-          <p:cNvPr id="20" name="TextBox 19"/>
+          <p:cNvPr id="19" name="TextBox 18"/>
           <p:cNvSpPr txBox="1"/>
           <p:nvPr/>
         </p:nvSpPr>
@@ -7338,7 +6954,7 @@
       </p:sp>
       <p:sp>
         <p:nvSpPr>
-          <p:cNvPr id="21" name="TextBox 20"/>
+          <p:cNvPr id="20" name="TextBox 19"/>
           <p:cNvSpPr txBox="1"/>
           <p:nvPr/>
         </p:nvSpPr>
@@ -7380,7 +6996,7 @@
       </p:sp>
       <p:sp>
         <p:nvSpPr>
-          <p:cNvPr id="22" name="Rectangle 21"/>
+          <p:cNvPr id="21" name="Rectangle 20"/>
           <p:cNvSpPr/>
           <p:nvPr/>
         </p:nvSpPr>
@@ -7429,7 +7045,7 @@
       </p:sp>
       <p:sp>
         <p:nvSpPr>
-          <p:cNvPr id="23" name="TextBox 22"/>
+          <p:cNvPr id="22" name="TextBox 21"/>
           <p:cNvSpPr txBox="1"/>
           <p:nvPr/>
         </p:nvSpPr>
@@ -7471,7 +7087,7 @@
       </p:sp>
       <p:sp>
         <p:nvSpPr>
-          <p:cNvPr id="24" name="TextBox 23"/>
+          <p:cNvPr id="23" name="TextBox 22"/>
           <p:cNvSpPr txBox="1"/>
           <p:nvPr/>
         </p:nvSpPr>
@@ -7513,7 +7129,7 @@
       </p:sp>
       <p:sp>
         <p:nvSpPr>
-          <p:cNvPr id="25" name="TextBox 24"/>
+          <p:cNvPr id="24" name="TextBox 23"/>
           <p:cNvSpPr txBox="1"/>
           <p:nvPr/>
         </p:nvSpPr>
@@ -7629,7 +7245,7 @@
         <p:spPr>
           <a:xfrm>
             <a:off x="640080" y="329184"/>
-            <a:ext cx="5303520" cy="182880"/>
+            <a:ext cx="9875520" cy="182880"/>
           </a:xfrm>
           <a:prstGeom prst="rect">
             <a:avLst/>
@@ -7670,48 +7286,6 @@
         </p:nvSpPr>
         <p:spPr>
           <a:xfrm>
-            <a:off x="5897880" y="310896"/>
-            <a:ext cx="4800600" cy="256032"/>
-          </a:xfrm>
-          <a:prstGeom prst="rect">
-            <a:avLst/>
-          </a:prstGeom>
-          <a:noFill/>
-        </p:spPr>
-        <p:txBody>
-          <a:bodyPr wrap="none" lIns="9144" rIns="9144" tIns="9144" bIns="9144" anchor="t">
-            <a:spAutoFit/>
-          </a:bodyPr>
-          <a:lstStyle/>
-          <a:p>
-            <a:pPr algn="r">
-              <a:spcAft>
-                <a:spcPts val="0"/>
-              </a:spcAft>
-              <a:defRPr sz="680" b="1">
-                <a:solidFill>
-                  <a:srgbClr val="4F6B00"/>
-                </a:solidFill>
-                <a:latin typeface="Inter"/>
-              </a:defRPr>
-            </a:pPr>
-            <a:r>
-              <a:rPr>
-                <a:latin typeface="Inter"/>
-              </a:rPr>
-              <a:t>Illustrative, Gradient Maintained — demo data, not the client's holdings or managers</a:t>
-            </a:r>
-          </a:p>
-        </p:txBody>
-      </p:sp>
-      <p:sp>
-        <p:nvSpPr>
-          <p:cNvPr id="5" name="TextBox 4"/>
-          <p:cNvSpPr txBox="1"/>
-          <p:nvPr/>
-        </p:nvSpPr>
-        <p:spPr>
-          <a:xfrm>
             <a:off x="640080" y="566928"/>
             <a:ext cx="10058400" cy="530352"/>
           </a:xfrm>
@@ -7748,7 +7322,7 @@
       </p:sp>
       <p:sp>
         <p:nvSpPr>
-          <p:cNvPr id="6" name="Rectangle 5"/>
+          <p:cNvPr id="5" name="Rectangle 4"/>
           <p:cNvSpPr/>
           <p:nvPr/>
         </p:nvSpPr>
@@ -7797,7 +7371,7 @@
       </p:sp>
       <p:sp>
         <p:nvSpPr>
-          <p:cNvPr id="7" name="Rectangle 6"/>
+          <p:cNvPr id="6" name="Rectangle 5"/>
           <p:cNvSpPr/>
           <p:nvPr/>
         </p:nvSpPr>
@@ -7846,7 +7420,7 @@
       </p:sp>
       <p:sp>
         <p:nvSpPr>
-          <p:cNvPr id="8" name="TextBox 7"/>
+          <p:cNvPr id="7" name="TextBox 6"/>
           <p:cNvSpPr txBox="1"/>
           <p:nvPr/>
         </p:nvSpPr>
@@ -7888,7 +7462,7 @@
       </p:sp>
       <p:sp>
         <p:nvSpPr>
-          <p:cNvPr id="9" name="Rectangle 8"/>
+          <p:cNvPr id="8" name="Rectangle 7"/>
           <p:cNvSpPr/>
           <p:nvPr/>
         </p:nvSpPr>
@@ -7937,7 +7511,7 @@
       </p:sp>
       <p:sp>
         <p:nvSpPr>
-          <p:cNvPr id="10" name="Rectangle 9"/>
+          <p:cNvPr id="9" name="Rectangle 8"/>
           <p:cNvSpPr/>
           <p:nvPr/>
         </p:nvSpPr>
@@ -7986,7 +7560,7 @@
       </p:sp>
       <p:sp>
         <p:nvSpPr>
-          <p:cNvPr id="11" name="TextBox 10"/>
+          <p:cNvPr id="10" name="TextBox 9"/>
           <p:cNvSpPr txBox="1"/>
           <p:nvPr/>
         </p:nvSpPr>
@@ -8028,7 +7602,7 @@
       </p:sp>
       <p:sp>
         <p:nvSpPr>
-          <p:cNvPr id="12" name="TextBox 11"/>
+          <p:cNvPr id="11" name="TextBox 10"/>
           <p:cNvSpPr txBox="1"/>
           <p:nvPr/>
         </p:nvSpPr>
@@ -8070,7 +7644,7 @@
       </p:sp>
       <p:graphicFrame>
         <p:nvGraphicFramePr>
-          <p:cNvPr id="13" name="Table 12"/>
+          <p:cNvPr id="12" name="Table 11"/>
           <p:cNvGraphicFramePr>
             <a:graphicFrameLocks noGrp="1"/>
           </p:cNvGraphicFramePr>
@@ -8865,7 +8439,7 @@
       </p:graphicFrame>
       <p:sp>
         <p:nvSpPr>
-          <p:cNvPr id="14" name="Rectangle 13"/>
+          <p:cNvPr id="13" name="Rectangle 12"/>
           <p:cNvSpPr/>
           <p:nvPr/>
         </p:nvSpPr>
@@ -8914,7 +8488,7 @@
       </p:sp>
       <p:sp>
         <p:nvSpPr>
-          <p:cNvPr id="15" name="Rectangle 14"/>
+          <p:cNvPr id="14" name="Rectangle 13"/>
           <p:cNvSpPr/>
           <p:nvPr/>
         </p:nvSpPr>
@@ -8963,7 +8537,7 @@
       </p:sp>
       <p:sp>
         <p:nvSpPr>
-          <p:cNvPr id="16" name="TextBox 15"/>
+          <p:cNvPr id="15" name="TextBox 14"/>
           <p:cNvSpPr txBox="1"/>
           <p:nvPr/>
         </p:nvSpPr>
@@ -9005,7 +8579,7 @@
       </p:sp>
       <p:sp>
         <p:nvSpPr>
-          <p:cNvPr id="17" name="TextBox 16"/>
+          <p:cNvPr id="16" name="TextBox 15"/>
           <p:cNvSpPr txBox="1"/>
           <p:nvPr/>
         </p:nvSpPr>
@@ -9047,7 +8621,7 @@
       </p:sp>
       <p:sp>
         <p:nvSpPr>
-          <p:cNvPr id="18" name="Rectangle 17"/>
+          <p:cNvPr id="17" name="Rectangle 16"/>
           <p:cNvSpPr/>
           <p:nvPr/>
         </p:nvSpPr>
@@ -9096,7 +8670,7 @@
       </p:sp>
       <p:sp>
         <p:nvSpPr>
-          <p:cNvPr id="19" name="TextBox 18"/>
+          <p:cNvPr id="18" name="TextBox 17"/>
           <p:cNvSpPr txBox="1"/>
           <p:nvPr/>
         </p:nvSpPr>
@@ -9138,7 +8712,7 @@
       </p:sp>
       <p:sp>
         <p:nvSpPr>
-          <p:cNvPr id="20" name="TextBox 19"/>
+          <p:cNvPr id="19" name="TextBox 18"/>
           <p:cNvSpPr txBox="1"/>
           <p:nvPr/>
         </p:nvSpPr>
@@ -9180,7 +8754,7 @@
       </p:sp>
       <p:sp>
         <p:nvSpPr>
-          <p:cNvPr id="21" name="TextBox 20"/>
+          <p:cNvPr id="20" name="TextBox 19"/>
           <p:cNvSpPr txBox="1"/>
           <p:nvPr/>
         </p:nvSpPr>
@@ -9296,7 +8870,7 @@
         <p:spPr>
           <a:xfrm>
             <a:off x="640080" y="329184"/>
-            <a:ext cx="5303520" cy="182880"/>
+            <a:ext cx="9875520" cy="182880"/>
           </a:xfrm>
           <a:prstGeom prst="rect">
             <a:avLst/>
@@ -9337,48 +8911,6 @@
         </p:nvSpPr>
         <p:spPr>
           <a:xfrm>
-            <a:off x="5897880" y="310896"/>
-            <a:ext cx="4800600" cy="256032"/>
-          </a:xfrm>
-          <a:prstGeom prst="rect">
-            <a:avLst/>
-          </a:prstGeom>
-          <a:noFill/>
-        </p:spPr>
-        <p:txBody>
-          <a:bodyPr wrap="none" lIns="9144" rIns="9144" tIns="9144" bIns="9144" anchor="t">
-            <a:spAutoFit/>
-          </a:bodyPr>
-          <a:lstStyle/>
-          <a:p>
-            <a:pPr algn="r">
-              <a:spcAft>
-                <a:spcPts val="0"/>
-              </a:spcAft>
-              <a:defRPr sz="680" b="1">
-                <a:solidFill>
-                  <a:srgbClr val="4F6B00"/>
-                </a:solidFill>
-                <a:latin typeface="Inter"/>
-              </a:defRPr>
-            </a:pPr>
-            <a:r>
-              <a:rPr>
-                <a:latin typeface="Inter"/>
-              </a:rPr>
-              <a:t>Illustrative, Gradient Maintained — demo data, not the client's holdings or managers</a:t>
-            </a:r>
-          </a:p>
-        </p:txBody>
-      </p:sp>
-      <p:sp>
-        <p:nvSpPr>
-          <p:cNvPr id="5" name="TextBox 4"/>
-          <p:cNvSpPr txBox="1"/>
-          <p:nvPr/>
-        </p:nvSpPr>
-        <p:spPr>
-          <a:xfrm>
             <a:off x="640080" y="566928"/>
             <a:ext cx="10058400" cy="530352"/>
           </a:xfrm>
@@ -9415,7 +8947,7 @@
       </p:sp>
       <p:sp>
         <p:nvSpPr>
-          <p:cNvPr id="6" name="Rectangle 5"/>
+          <p:cNvPr id="5" name="Rectangle 4"/>
           <p:cNvSpPr/>
           <p:nvPr/>
         </p:nvSpPr>
@@ -9464,7 +8996,7 @@
       </p:sp>
       <p:sp>
         <p:nvSpPr>
-          <p:cNvPr id="7" name="Rectangle 6"/>
+          <p:cNvPr id="6" name="Rectangle 5"/>
           <p:cNvSpPr/>
           <p:nvPr/>
         </p:nvSpPr>
@@ -9513,7 +9045,7 @@
       </p:sp>
       <p:sp>
         <p:nvSpPr>
-          <p:cNvPr id="8" name="TextBox 7"/>
+          <p:cNvPr id="7" name="TextBox 6"/>
           <p:cNvSpPr txBox="1"/>
           <p:nvPr/>
         </p:nvSpPr>
@@ -9555,7 +9087,7 @@
       </p:sp>
       <p:sp>
         <p:nvSpPr>
-          <p:cNvPr id="9" name="TextBox 8"/>
+          <p:cNvPr id="8" name="TextBox 7"/>
           <p:cNvSpPr txBox="1"/>
           <p:nvPr/>
         </p:nvSpPr>
@@ -9597,7 +9129,7 @@
       </p:sp>
       <p:graphicFrame>
         <p:nvGraphicFramePr>
-          <p:cNvPr id="10" name="Table 9"/>
+          <p:cNvPr id="9" name="Table 8"/>
           <p:cNvGraphicFramePr>
             <a:graphicFrameLocks noGrp="1"/>
           </p:cNvGraphicFramePr>
@@ -9746,7 +9278,7 @@
                         <a:rPr>
                           <a:latin typeface="Inter"/>
                         </a:rPr>
-                        <a:t>● available</a:t>
+                        <a:t>● Available</a:t>
                       </a:r>
                     </a:p>
                   </a:txBody>
@@ -9829,7 +9361,7 @@
                         <a:rPr>
                           <a:latin typeface="Inter"/>
                         </a:rPr>
-                        <a:t>● available</a:t>
+                        <a:t>● Available</a:t>
                       </a:r>
                     </a:p>
                   </a:txBody>
@@ -9912,7 +9444,7 @@
                         <a:rPr>
                           <a:latin typeface="Inter"/>
                         </a:rPr>
-                        <a:t>● partial</a:t>
+                        <a:t>● Partly available</a:t>
                       </a:r>
                     </a:p>
                   </a:txBody>
@@ -9995,7 +9527,7 @@
                         <a:rPr>
                           <a:latin typeface="Inter"/>
                         </a:rPr>
-                        <a:t>● partial</a:t>
+                        <a:t>● Partly available</a:t>
                       </a:r>
                     </a:p>
                   </a:txBody>
@@ -10078,7 +9610,7 @@
                         <a:rPr>
                           <a:latin typeface="Inter"/>
                         </a:rPr>
-                        <a:t>● partial</a:t>
+                        <a:t>● Partly available</a:t>
                       </a:r>
                     </a:p>
                   </a:txBody>
@@ -10161,7 +9693,7 @@
                         <a:rPr>
                           <a:latin typeface="Inter"/>
                         </a:rPr>
-                        <a:t>● unavailable</a:t>
+                        <a:t>● Not available</a:t>
                       </a:r>
                     </a:p>
                   </a:txBody>
@@ -10188,7 +9720,7 @@
                         <a:rPr>
                           <a:latin typeface="Inter"/>
                         </a:rPr>
-                        <a:t>event_publication_not_ready [S10]</a:t>
+                        <a:t>Event records not yet published [S10]</a:t>
                       </a:r>
                     </a:p>
                   </a:txBody>
@@ -10244,7 +9776,7 @@
                         <a:rPr>
                           <a:latin typeface="Inter"/>
                         </a:rPr>
-                        <a:t>● available</a:t>
+                        <a:t>● Available</a:t>
                       </a:r>
                     </a:p>
                   </a:txBody>
@@ -10288,7 +9820,7 @@
       </p:graphicFrame>
       <p:sp>
         <p:nvSpPr>
-          <p:cNvPr id="11" name="TextBox 10"/>
+          <p:cNvPr id="10" name="TextBox 9"/>
           <p:cNvSpPr txBox="1"/>
           <p:nvPr/>
         </p:nvSpPr>
@@ -10330,7 +9862,7 @@
       </p:sp>
       <p:sp>
         <p:nvSpPr>
-          <p:cNvPr id="12" name="Rectangle 11"/>
+          <p:cNvPr id="11" name="Rectangle 10"/>
           <p:cNvSpPr/>
           <p:nvPr/>
         </p:nvSpPr>
@@ -10379,7 +9911,7 @@
       </p:sp>
       <p:sp>
         <p:nvSpPr>
-          <p:cNvPr id="13" name="TextBox 12"/>
+          <p:cNvPr id="12" name="TextBox 11"/>
           <p:cNvSpPr txBox="1"/>
           <p:nvPr/>
         </p:nvSpPr>
@@ -10421,7 +9953,7 @@
       </p:sp>
       <p:graphicFrame>
         <p:nvGraphicFramePr>
-          <p:cNvPr id="14" name="Table 13"/>
+          <p:cNvPr id="13" name="Table 12"/>
           <p:cNvGraphicFramePr>
             <a:graphicFrameLocks noGrp="1"/>
           </p:cNvGraphicFramePr>
@@ -10780,7 +10312,7 @@
       </p:graphicFrame>
       <p:sp>
         <p:nvSpPr>
-          <p:cNvPr id="15" name="TextBox 14"/>
+          <p:cNvPr id="14" name="TextBox 13"/>
           <p:cNvSpPr txBox="1"/>
           <p:nvPr/>
         </p:nvSpPr>
@@ -10822,7 +10354,7 @@
       </p:sp>
       <p:sp>
         <p:nvSpPr>
-          <p:cNvPr id="16" name="TextBox 15"/>
+          <p:cNvPr id="15" name="TextBox 14"/>
           <p:cNvSpPr txBox="1"/>
           <p:nvPr/>
         </p:nvSpPr>
@@ -10864,7 +10396,7 @@
       </p:sp>
       <p:sp>
         <p:nvSpPr>
-          <p:cNvPr id="17" name="Rectangle 16"/>
+          <p:cNvPr id="16" name="Rectangle 15"/>
           <p:cNvSpPr/>
           <p:nvPr/>
         </p:nvSpPr>
@@ -10913,7 +10445,7 @@
       </p:sp>
       <p:sp>
         <p:nvSpPr>
-          <p:cNvPr id="18" name="TextBox 17"/>
+          <p:cNvPr id="17" name="TextBox 16"/>
           <p:cNvSpPr txBox="1"/>
           <p:nvPr/>
         </p:nvSpPr>
@@ -10955,7 +10487,7 @@
       </p:sp>
       <p:sp>
         <p:nvSpPr>
-          <p:cNvPr id="19" name="TextBox 18"/>
+          <p:cNvPr id="18" name="TextBox 17"/>
           <p:cNvSpPr txBox="1"/>
           <p:nvPr/>
         </p:nvSpPr>
@@ -10997,7 +10529,7 @@
       </p:sp>
       <p:sp>
         <p:nvSpPr>
-          <p:cNvPr id="20" name="TextBox 19"/>
+          <p:cNvPr id="19" name="TextBox 18"/>
           <p:cNvSpPr txBox="1"/>
           <p:nvPr/>
         </p:nvSpPr>
@@ -11112,48 +10644,6 @@
         </p:nvSpPr>
         <p:spPr>
           <a:xfrm>
-            <a:off x="5897880" y="310896"/>
-            <a:ext cx="4800600" cy="256032"/>
-          </a:xfrm>
-          <a:prstGeom prst="rect">
-            <a:avLst/>
-          </a:prstGeom>
-          <a:noFill/>
-        </p:spPr>
-        <p:txBody>
-          <a:bodyPr wrap="none" lIns="9144" rIns="9144" tIns="9144" bIns="9144" anchor="t">
-            <a:spAutoFit/>
-          </a:bodyPr>
-          <a:lstStyle/>
-          <a:p>
-            <a:pPr algn="r">
-              <a:spcAft>
-                <a:spcPts val="0"/>
-              </a:spcAft>
-              <a:defRPr sz="680" b="1">
-                <a:solidFill>
-                  <a:srgbClr val="4F6B00"/>
-                </a:solidFill>
-                <a:latin typeface="Inter"/>
-              </a:defRPr>
-            </a:pPr>
-            <a:r>
-              <a:rPr>
-                <a:latin typeface="Inter"/>
-              </a:rPr>
-              <a:t>Illustrative, Gradient Maintained — demo data, not the client's holdings or managers</a:t>
-            </a:r>
-          </a:p>
-        </p:txBody>
-      </p:sp>
-      <p:sp>
-        <p:nvSpPr>
-          <p:cNvPr id="4" name="TextBox 3"/>
-          <p:cNvSpPr txBox="1"/>
-          <p:nvPr/>
-        </p:nvSpPr>
-        <p:spPr>
-          <a:xfrm>
             <a:off x="640080" y="566928"/>
             <a:ext cx="10058400" cy="530352"/>
           </a:xfrm>
@@ -11190,7 +10680,7 @@
       </p:sp>
       <p:sp>
         <p:nvSpPr>
-          <p:cNvPr id="5" name="Rectangle 4"/>
+          <p:cNvPr id="4" name="Rectangle 3"/>
           <p:cNvSpPr/>
           <p:nvPr/>
         </p:nvSpPr>
@@ -11239,7 +10729,7 @@
       </p:sp>
       <p:sp>
         <p:nvSpPr>
-          <p:cNvPr id="6" name="Rectangle 5"/>
+          <p:cNvPr id="5" name="Rectangle 4"/>
           <p:cNvSpPr/>
           <p:nvPr/>
         </p:nvSpPr>
@@ -11288,7 +10778,7 @@
       </p:sp>
       <p:sp>
         <p:nvSpPr>
-          <p:cNvPr id="7" name="TextBox 6"/>
+          <p:cNvPr id="6" name="TextBox 5"/>
           <p:cNvSpPr txBox="1"/>
           <p:nvPr/>
         </p:nvSpPr>
@@ -11330,7 +10820,7 @@
       </p:sp>
       <p:sp>
         <p:nvSpPr>
-          <p:cNvPr id="8" name="TextBox 7"/>
+          <p:cNvPr id="7" name="TextBox 6"/>
           <p:cNvSpPr txBox="1"/>
           <p:nvPr/>
         </p:nvSpPr>
@@ -11372,7 +10862,7 @@
       </p:sp>
       <p:graphicFrame>
         <p:nvGraphicFramePr>
-          <p:cNvPr id="9" name="Table 8"/>
+          <p:cNvPr id="8" name="Table 7"/>
           <p:cNvGraphicFramePr>
             <a:graphicFrameLocks noGrp="1"/>
           </p:cNvGraphicFramePr>
@@ -11390,14 +10880,10 @@
               </a:tblPr>
               <a:tblGrid>
                 <a:gridCol w="2011680"/>
-                <a:gridCol w="1112139"/>
-                <a:gridCol w="1112139"/>
-                <a:gridCol w="1112139"/>
-                <a:gridCol w="1112139"/>
-                <a:gridCol w="1112139"/>
-                <a:gridCol w="1112139"/>
-                <a:gridCol w="1112139"/>
-                <a:gridCol w="1112139"/>
+                <a:gridCol w="2224278"/>
+                <a:gridCol w="2224278"/>
+                <a:gridCol w="2224278"/>
+                <a:gridCol w="2224278"/>
               </a:tblGrid>
               <a:tr h="368046">
                 <a:tc>
@@ -11471,7 +10957,7 @@
                         <a:rPr>
                           <a:latin typeface="Inter"/>
                         </a:rPr>
-                        <a:t>Basis</a:t>
+                        <a:t>Source</a:t>
                       </a:r>
                     </a:p>
                   </a:txBody>
@@ -11498,7 +10984,7 @@
                         <a:rPr>
                           <a:latin typeface="Inter"/>
                         </a:rPr>
-                        <a:t>Tool / view</a:t>
+                        <a:t>As of</a:t>
                       </a:r>
                     </a:p>
                   </a:txBody>
@@ -11525,115 +11011,7 @@
                         <a:rPr>
                           <a:latin typeface="Inter"/>
                         </a:rPr>
-                        <a:t>Key parameters</a:t>
-                      </a:r>
-                    </a:p>
-                  </a:txBody>
-                  <a:tcPr marL="54864" marR="54864" marT="27432" marB="27432" anchor="ctr">
-                    <a:solidFill>
-                      <a:srgbClr val="0D1117"/>
-                    </a:solidFill>
-                  </a:tcPr>
-                </a:tc>
-                <a:tc>
-                  <a:txBody>
-                    <a:bodyPr/>
-                    <a:lstStyle/>
-                    <a:p>
-                      <a:pPr>
-                        <a:defRPr sz="750" b="1">
-                          <a:solidFill>
-                            <a:srgbClr val="FFFFFF"/>
-                          </a:solidFill>
-                          <a:latin typeface="Inter"/>
-                        </a:defRPr>
-                      </a:pPr>
-                      <a:r>
-                        <a:rPr>
-                          <a:latin typeface="Inter"/>
-                        </a:rPr>
-                        <a:t>As of</a:t>
-                      </a:r>
-                    </a:p>
-                  </a:txBody>
-                  <a:tcPr marL="54864" marR="54864" marT="27432" marB="27432" anchor="ctr">
-                    <a:solidFill>
-                      <a:srgbClr val="0D1117"/>
-                    </a:solidFill>
-                  </a:tcPr>
-                </a:tc>
-                <a:tc>
-                  <a:txBody>
-                    <a:bodyPr/>
-                    <a:lstStyle/>
-                    <a:p>
-                      <a:pPr>
-                        <a:defRPr sz="750" b="1">
-                          <a:solidFill>
-                            <a:srgbClr val="FFFFFF"/>
-                          </a:solidFill>
-                          <a:latin typeface="Inter"/>
-                        </a:defRPr>
-                      </a:pPr>
-                      <a:r>
-                        <a:rPr>
-                          <a:latin typeface="Inter"/>
-                        </a:rPr>
-                        <a:t>Data scope</a:t>
-                      </a:r>
-                    </a:p>
-                  </a:txBody>
-                  <a:tcPr marL="54864" marR="54864" marT="27432" marB="27432" anchor="ctr">
-                    <a:solidFill>
-                      <a:srgbClr val="0D1117"/>
-                    </a:solidFill>
-                  </a:tcPr>
-                </a:tc>
-                <a:tc>
-                  <a:txBody>
-                    <a:bodyPr/>
-                    <a:lstStyle/>
-                    <a:p>
-                      <a:pPr>
-                        <a:defRPr sz="750" b="1">
-                          <a:solidFill>
-                            <a:srgbClr val="FFFFFF"/>
-                          </a:solidFill>
-                          <a:latin typeface="Inter"/>
-                        </a:defRPr>
-                      </a:pPr>
-                      <a:r>
-                        <a:rPr>
-                          <a:latin typeface="Inter"/>
-                        </a:rPr>
-                        <a:t>Validation</a:t>
-                      </a:r>
-                    </a:p>
-                  </a:txBody>
-                  <a:tcPr marL="54864" marR="54864" marT="27432" marB="27432" anchor="ctr">
-                    <a:solidFill>
-                      <a:srgbClr val="0D1117"/>
-                    </a:solidFill>
-                  </a:tcPr>
-                </a:tc>
-                <a:tc>
-                  <a:txBody>
-                    <a:bodyPr/>
-                    <a:lstStyle/>
-                    <a:p>
-                      <a:pPr>
-                        <a:defRPr sz="750" b="1">
-                          <a:solidFill>
-                            <a:srgbClr val="FFFFFF"/>
-                          </a:solidFill>
-                          <a:latin typeface="Inter"/>
-                        </a:defRPr>
-                      </a:pPr>
-                      <a:r>
-                        <a:rPr>
-                          <a:latin typeface="Inter"/>
-                        </a:rPr>
-                        <a:t>Digest</a:t>
+                        <a:t>Check</a:t>
                       </a:r>
                     </a:p>
                   </a:txBody>
@@ -11651,7 +11029,7 @@
                     <a:lstStyle/>
                     <a:p>
                       <a:pPr>
-                        <a:defRPr sz="650" b="1">
+                        <a:defRPr sz="720" b="1">
                           <a:solidFill>
                             <a:srgbClr val="0D1117"/>
                           </a:solidFill>
@@ -11678,7 +11056,7 @@
                     <a:lstStyle/>
                     <a:p>
                       <a:pPr>
-                        <a:defRPr sz="650" b="0">
+                        <a:defRPr sz="720" b="0">
                           <a:solidFill>
                             <a:srgbClr val="0D1117"/>
                           </a:solidFill>
@@ -11705,7 +11083,7 @@
                     <a:lstStyle/>
                     <a:p>
                       <a:pPr>
-                        <a:defRPr sz="650" b="0">
+                        <a:defRPr sz="720" b="0">
                           <a:solidFill>
                             <a:srgbClr val="0D1117"/>
                           </a:solidFill>
@@ -11716,7 +11094,7 @@
                         <a:rPr>
                           <a:latin typeface="Inter"/>
                         </a:rPr>
-                        <a:t>gradient_tool</a:t>
+                        <a:t>get_manager_odd_profile</a:t>
                       </a:r>
                     </a:p>
                   </a:txBody>
@@ -11732,7 +11110,7 @@
                     <a:lstStyle/>
                     <a:p>
                       <a:pPr>
-                        <a:defRPr sz="650" b="0">
+                        <a:defRPr sz="720" b="0">
                           <a:solidFill>
                             <a:srgbClr val="0D1117"/>
                           </a:solidFill>
@@ -11743,7 +11121,7 @@
                         <a:rPr>
                           <a:latin typeface="Inter"/>
                         </a:rPr>
-                        <a:t>get_manager_odd_profile</a:t>
+                        <a:t>2026-10-01</a:t>
                       </a:r>
                     </a:p>
                   </a:txBody>
@@ -11759,132 +11137,24 @@
                     <a:lstStyle/>
                     <a:p>
                       <a:pPr>
-                        <a:defRPr sz="650" b="0">
-                          <a:solidFill>
-                            <a:srgbClr val="0D1117"/>
-                          </a:solidFill>
-                          <a:latin typeface="Inter"/>
-                        </a:defRPr>
-                      </a:pPr>
-                      <a:r>
-                        <a:rPr>
-                          <a:latin typeface="Inter"/>
-                        </a:rPr>
-                        <a:t>illustrative sample</a:t>
-                      </a:r>
-                    </a:p>
-                  </a:txBody>
-                  <a:tcPr marL="54864" marR="54864" marT="27432" marB="27432" anchor="ctr">
-                    <a:solidFill>
-                      <a:srgbClr val="FFFFFF"/>
-                    </a:solidFill>
-                  </a:tcPr>
-                </a:tc>
-                <a:tc>
-                  <a:txBody>
-                    <a:bodyPr/>
-                    <a:lstStyle/>
-                    <a:p>
-                      <a:pPr>
-                        <a:defRPr sz="650" b="0">
-                          <a:solidFill>
-                            <a:srgbClr val="0D1117"/>
-                          </a:solidFill>
-                          <a:latin typeface="Inter"/>
-                        </a:defRPr>
-                      </a:pPr>
-                      <a:r>
-                        <a:rPr>
-                          <a:latin typeface="Inter"/>
-                        </a:rPr>
-                        <a:t>2026-10-01</a:t>
-                      </a:r>
-                    </a:p>
-                  </a:txBody>
-                  <a:tcPr marL="54864" marR="54864" marT="27432" marB="27432" anchor="ctr">
-                    <a:solidFill>
-                      <a:srgbClr val="FFFFFF"/>
-                    </a:solidFill>
-                  </a:tcPr>
-                </a:tc>
-                <a:tc>
-                  <a:txBody>
-                    <a:bodyPr/>
-                    <a:lstStyle/>
-                    <a:p>
-                      <a:pPr>
-                        <a:defRPr sz="650" b="0">
-                          <a:solidFill>
-                            <a:srgbClr val="0D1117"/>
-                          </a:solidFill>
-                          <a:latin typeface="Inter"/>
-                        </a:defRPr>
-                      </a:pPr>
-                      <a:r>
-                        <a:rPr>
-                          <a:latin typeface="Inter"/>
-                        </a:rPr>
-                        <a:t>Gradient-governed review evidence</a:t>
-                      </a:r>
-                    </a:p>
-                  </a:txBody>
-                  <a:tcPr marL="54864" marR="54864" marT="27432" marB="27432" anchor="ctr">
-                    <a:solidFill>
-                      <a:srgbClr val="FFFFFF"/>
-                    </a:solidFill>
-                  </a:tcPr>
-                </a:tc>
-                <a:tc>
-                  <a:txBody>
-                    <a:bodyPr/>
-                    <a:lstStyle/>
-                    <a:p>
-                      <a:pPr>
-                        <a:defRPr sz="650" b="0">
-                          <a:solidFill>
-                            <a:srgbClr val="0D1117"/>
-                          </a:solidFill>
-                          <a:latin typeface="Inter"/>
-                        </a:defRPr>
-                      </a:pPr>
-                      <a:r>
-                        <a:rPr>
-                          <a:latin typeface="Inter"/>
-                        </a:rPr>
-                        <a:t>{'chip': 'not_run', 'status': 'not_run'}</a:t>
-                      </a:r>
-                    </a:p>
-                  </a:txBody>
-                  <a:tcPr marL="54864" marR="54864" marT="27432" marB="27432" anchor="ctr">
-                    <a:solidFill>
-                      <a:srgbClr val="FFFFFF"/>
-                    </a:solidFill>
-                  </a:tcPr>
-                </a:tc>
-                <a:tc>
-                  <a:txBody>
-                    <a:bodyPr/>
-                    <a:lstStyle/>
-                    <a:p>
-                      <a:pPr>
-                        <a:defRPr sz="650" b="0">
-                          <a:solidFill>
-                            <a:srgbClr val="0D1117"/>
-                          </a:solidFill>
-                          <a:latin typeface="Inter"/>
-                        </a:defRPr>
-                      </a:pPr>
-                      <a:r>
-                        <a:rPr>
-                          <a:latin typeface="Inter"/>
-                        </a:rPr>
-                        <a:t>sha256:9364230b9895a9186656f1afaa4fdd9ff25a070143a72a1b504df9822dbd0c2c</a:t>
-                      </a:r>
-                    </a:p>
-                  </a:txBody>
-                  <a:tcPr marL="54864" marR="54864" marT="27432" marB="27432" anchor="ctr">
-                    <a:solidFill>
-                      <a:srgbClr val="FFFFFF"/>
+                        <a:defRPr sz="720" b="1">
+                          <a:solidFill>
+                            <a:srgbClr val="9AA5B1"/>
+                          </a:solidFill>
+                          <a:latin typeface="Inter"/>
+                        </a:defRPr>
+                      </a:pPr>
+                      <a:r>
+                        <a:rPr>
+                          <a:latin typeface="Inter"/>
+                        </a:rPr>
+                        <a:t>● Not checked</a:t>
+                      </a:r>
+                    </a:p>
+                  </a:txBody>
+                  <a:tcPr marL="54864" marR="54864" marT="27432" marB="27432" anchor="ctr">
+                    <a:solidFill>
+                      <a:srgbClr val="F5F7F9"/>
                     </a:solidFill>
                   </a:tcPr>
                 </a:tc>
@@ -11896,7 +11166,7 @@
                     <a:lstStyle/>
                     <a:p>
                       <a:pPr>
-                        <a:defRPr sz="650" b="1">
+                        <a:defRPr sz="720" b="1">
                           <a:solidFill>
                             <a:srgbClr val="0D1117"/>
                           </a:solidFill>
@@ -11923,7 +11193,7 @@
                     <a:lstStyle/>
                     <a:p>
                       <a:pPr>
-                        <a:defRPr sz="650" b="0">
+                        <a:defRPr sz="720" b="0">
                           <a:solidFill>
                             <a:srgbClr val="0D1117"/>
                           </a:solidFill>
@@ -11950,7 +11220,7 @@
                     <a:lstStyle/>
                     <a:p>
                       <a:pPr>
-                        <a:defRPr sz="650" b="0">
+                        <a:defRPr sz="720" b="0">
                           <a:solidFill>
                             <a:srgbClr val="0D1117"/>
                           </a:solidFill>
@@ -11961,7 +11231,7 @@
                         <a:rPr>
                           <a:latin typeface="Inter"/>
                         </a:rPr>
-                        <a:t>gradient_tool</a:t>
+                        <a:t>get_manager_odd_profile</a:t>
                       </a:r>
                     </a:p>
                   </a:txBody>
@@ -11977,7 +11247,7 @@
                     <a:lstStyle/>
                     <a:p>
                       <a:pPr>
-                        <a:defRPr sz="650" b="0">
+                        <a:defRPr sz="720" b="0">
                           <a:solidFill>
                             <a:srgbClr val="0D1117"/>
                           </a:solidFill>
@@ -11988,7 +11258,7 @@
                         <a:rPr>
                           <a:latin typeface="Inter"/>
                         </a:rPr>
-                        <a:t>get_manager_odd_profile</a:t>
+                        <a:t>2026-10-01</a:t>
                       </a:r>
                     </a:p>
                   </a:txBody>
@@ -12004,126 +11274,18 @@
                     <a:lstStyle/>
                     <a:p>
                       <a:pPr>
-                        <a:defRPr sz="650" b="0">
-                          <a:solidFill>
-                            <a:srgbClr val="0D1117"/>
-                          </a:solidFill>
-                          <a:latin typeface="Inter"/>
-                        </a:defRPr>
-                      </a:pPr>
-                      <a:r>
-                        <a:rPr>
-                          <a:latin typeface="Inter"/>
-                        </a:rPr>
-                        <a:t>illustrative sample</a:t>
-                      </a:r>
-                    </a:p>
-                  </a:txBody>
-                  <a:tcPr marL="54864" marR="54864" marT="27432" marB="27432" anchor="ctr">
-                    <a:solidFill>
-                      <a:srgbClr val="F5F7F9"/>
-                    </a:solidFill>
-                  </a:tcPr>
-                </a:tc>
-                <a:tc>
-                  <a:txBody>
-                    <a:bodyPr/>
-                    <a:lstStyle/>
-                    <a:p>
-                      <a:pPr>
-                        <a:defRPr sz="650" b="0">
-                          <a:solidFill>
-                            <a:srgbClr val="0D1117"/>
-                          </a:solidFill>
-                          <a:latin typeface="Inter"/>
-                        </a:defRPr>
-                      </a:pPr>
-                      <a:r>
-                        <a:rPr>
-                          <a:latin typeface="Inter"/>
-                        </a:rPr>
-                        <a:t>2026-10-01</a:t>
-                      </a:r>
-                    </a:p>
-                  </a:txBody>
-                  <a:tcPr marL="54864" marR="54864" marT="27432" marB="27432" anchor="ctr">
-                    <a:solidFill>
-                      <a:srgbClr val="F5F7F9"/>
-                    </a:solidFill>
-                  </a:tcPr>
-                </a:tc>
-                <a:tc>
-                  <a:txBody>
-                    <a:bodyPr/>
-                    <a:lstStyle/>
-                    <a:p>
-                      <a:pPr>
-                        <a:defRPr sz="650" b="0">
-                          <a:solidFill>
-                            <a:srgbClr val="0D1117"/>
-                          </a:solidFill>
-                          <a:latin typeface="Inter"/>
-                        </a:defRPr>
-                      </a:pPr>
-                      <a:r>
-                        <a:rPr>
-                          <a:latin typeface="Inter"/>
-                        </a:rPr>
-                        <a:t>Gradient-governed review evidence</a:t>
-                      </a:r>
-                    </a:p>
-                  </a:txBody>
-                  <a:tcPr marL="54864" marR="54864" marT="27432" marB="27432" anchor="ctr">
-                    <a:solidFill>
-                      <a:srgbClr val="F5F7F9"/>
-                    </a:solidFill>
-                  </a:tcPr>
-                </a:tc>
-                <a:tc>
-                  <a:txBody>
-                    <a:bodyPr/>
-                    <a:lstStyle/>
-                    <a:p>
-                      <a:pPr>
-                        <a:defRPr sz="650" b="0">
-                          <a:solidFill>
-                            <a:srgbClr val="0D1117"/>
-                          </a:solidFill>
-                          <a:latin typeface="Inter"/>
-                        </a:defRPr>
-                      </a:pPr>
-                      <a:r>
-                        <a:rPr>
-                          <a:latin typeface="Inter"/>
-                        </a:rPr>
-                        <a:t>{'chip': 'advisory', 'status': 'advisory'}</a:t>
-                      </a:r>
-                    </a:p>
-                  </a:txBody>
-                  <a:tcPr marL="54864" marR="54864" marT="27432" marB="27432" anchor="ctr">
-                    <a:solidFill>
-                      <a:srgbClr val="F5F7F9"/>
-                    </a:solidFill>
-                  </a:tcPr>
-                </a:tc>
-                <a:tc>
-                  <a:txBody>
-                    <a:bodyPr/>
-                    <a:lstStyle/>
-                    <a:p>
-                      <a:pPr>
-                        <a:defRPr sz="650" b="0">
-                          <a:solidFill>
-                            <a:srgbClr val="0D1117"/>
-                          </a:solidFill>
-                          <a:latin typeface="Inter"/>
-                        </a:defRPr>
-                      </a:pPr>
-                      <a:r>
-                        <a:rPr>
-                          <a:latin typeface="Inter"/>
-                        </a:rPr>
-                        <a:t>sha256:0ba26a4bbb2e102faee753294979c1138f605a155f985ac94efe3e887fdc52f7</a:t>
+                        <a:defRPr sz="720" b="1">
+                          <a:solidFill>
+                            <a:srgbClr val="F2A93B"/>
+                          </a:solidFill>
+                          <a:latin typeface="Inter"/>
+                        </a:defRPr>
+                      </a:pPr>
+                      <a:r>
+                        <a:rPr>
+                          <a:latin typeface="Inter"/>
+                        </a:rPr>
+                        <a:t>● Advisory</a:t>
                       </a:r>
                     </a:p>
                   </a:txBody>
@@ -12141,7 +11303,7 @@
                     <a:lstStyle/>
                     <a:p>
                       <a:pPr>
-                        <a:defRPr sz="650" b="1">
+                        <a:defRPr sz="720" b="1">
                           <a:solidFill>
                             <a:srgbClr val="0D1117"/>
                           </a:solidFill>
@@ -12168,7 +11330,7 @@
                     <a:lstStyle/>
                     <a:p>
                       <a:pPr>
-                        <a:defRPr sz="650" b="0">
+                        <a:defRPr sz="720" b="0">
                           <a:solidFill>
                             <a:srgbClr val="0D1117"/>
                           </a:solidFill>
@@ -12195,7 +11357,7 @@
                     <a:lstStyle/>
                     <a:p>
                       <a:pPr>
-                        <a:defRPr sz="650" b="0">
+                        <a:defRPr sz="720" b="0">
                           <a:solidFill>
                             <a:srgbClr val="0D1117"/>
                           </a:solidFill>
@@ -12206,7 +11368,7 @@
                         <a:rPr>
                           <a:latin typeface="Inter"/>
                         </a:rPr>
-                        <a:t>gradient_tool</a:t>
+                        <a:t>get_manager_odd_profile</a:t>
                       </a:r>
                     </a:p>
                   </a:txBody>
@@ -12222,7 +11384,7 @@
                     <a:lstStyle/>
                     <a:p>
                       <a:pPr>
-                        <a:defRPr sz="650" b="0">
+                        <a:defRPr sz="720" b="0">
                           <a:solidFill>
                             <a:srgbClr val="0D1117"/>
                           </a:solidFill>
@@ -12233,7 +11395,7 @@
                         <a:rPr>
                           <a:latin typeface="Inter"/>
                         </a:rPr>
-                        <a:t>get_manager_odd_profile</a:t>
+                        <a:t>2026-10-01</a:t>
                       </a:r>
                     </a:p>
                   </a:txBody>
@@ -12249,132 +11411,24 @@
                     <a:lstStyle/>
                     <a:p>
                       <a:pPr>
-                        <a:defRPr sz="650" b="0">
-                          <a:solidFill>
-                            <a:srgbClr val="0D1117"/>
-                          </a:solidFill>
-                          <a:latin typeface="Inter"/>
-                        </a:defRPr>
-                      </a:pPr>
-                      <a:r>
-                        <a:rPr>
-                          <a:latin typeface="Inter"/>
-                        </a:rPr>
-                        <a:t>illustrative sample</a:t>
-                      </a:r>
-                    </a:p>
-                  </a:txBody>
-                  <a:tcPr marL="54864" marR="54864" marT="27432" marB="27432" anchor="ctr">
-                    <a:solidFill>
-                      <a:srgbClr val="FFFFFF"/>
-                    </a:solidFill>
-                  </a:tcPr>
-                </a:tc>
-                <a:tc>
-                  <a:txBody>
-                    <a:bodyPr/>
-                    <a:lstStyle/>
-                    <a:p>
-                      <a:pPr>
-                        <a:defRPr sz="650" b="0">
-                          <a:solidFill>
-                            <a:srgbClr val="0D1117"/>
-                          </a:solidFill>
-                          <a:latin typeface="Inter"/>
-                        </a:defRPr>
-                      </a:pPr>
-                      <a:r>
-                        <a:rPr>
-                          <a:latin typeface="Inter"/>
-                        </a:rPr>
-                        <a:t>2026-10-01</a:t>
-                      </a:r>
-                    </a:p>
-                  </a:txBody>
-                  <a:tcPr marL="54864" marR="54864" marT="27432" marB="27432" anchor="ctr">
-                    <a:solidFill>
-                      <a:srgbClr val="FFFFFF"/>
-                    </a:solidFill>
-                  </a:tcPr>
-                </a:tc>
-                <a:tc>
-                  <a:txBody>
-                    <a:bodyPr/>
-                    <a:lstStyle/>
-                    <a:p>
-                      <a:pPr>
-                        <a:defRPr sz="650" b="0">
-                          <a:solidFill>
-                            <a:srgbClr val="0D1117"/>
-                          </a:solidFill>
-                          <a:latin typeface="Inter"/>
-                        </a:defRPr>
-                      </a:pPr>
-                      <a:r>
-                        <a:rPr>
-                          <a:latin typeface="Inter"/>
-                        </a:rPr>
-                        <a:t>Gradient-governed review evidence</a:t>
-                      </a:r>
-                    </a:p>
-                  </a:txBody>
-                  <a:tcPr marL="54864" marR="54864" marT="27432" marB="27432" anchor="ctr">
-                    <a:solidFill>
-                      <a:srgbClr val="FFFFFF"/>
-                    </a:solidFill>
-                  </a:tcPr>
-                </a:tc>
-                <a:tc>
-                  <a:txBody>
-                    <a:bodyPr/>
-                    <a:lstStyle/>
-                    <a:p>
-                      <a:pPr>
-                        <a:defRPr sz="650" b="0">
-                          <a:solidFill>
-                            <a:srgbClr val="0D1117"/>
-                          </a:solidFill>
-                          <a:latin typeface="Inter"/>
-                        </a:defRPr>
-                      </a:pPr>
-                      <a:r>
-                        <a:rPr>
-                          <a:latin typeface="Inter"/>
-                        </a:rPr>
-                        <a:t>{'chip': 'not_run', 'status': 'not_run'}</a:t>
-                      </a:r>
-                    </a:p>
-                  </a:txBody>
-                  <a:tcPr marL="54864" marR="54864" marT="27432" marB="27432" anchor="ctr">
-                    <a:solidFill>
-                      <a:srgbClr val="FFFFFF"/>
-                    </a:solidFill>
-                  </a:tcPr>
-                </a:tc>
-                <a:tc>
-                  <a:txBody>
-                    <a:bodyPr/>
-                    <a:lstStyle/>
-                    <a:p>
-                      <a:pPr>
-                        <a:defRPr sz="650" b="0">
-                          <a:solidFill>
-                            <a:srgbClr val="0D1117"/>
-                          </a:solidFill>
-                          <a:latin typeface="Inter"/>
-                        </a:defRPr>
-                      </a:pPr>
-                      <a:r>
-                        <a:rPr>
-                          <a:latin typeface="Inter"/>
-                        </a:rPr>
-                        <a:t>sha256:079104f42a886920dde0e602181eea3c7622408e953d392d251e822c3d4c40fc</a:t>
-                      </a:r>
-                    </a:p>
-                  </a:txBody>
-                  <a:tcPr marL="54864" marR="54864" marT="27432" marB="27432" anchor="ctr">
-                    <a:solidFill>
-                      <a:srgbClr val="FFFFFF"/>
+                        <a:defRPr sz="720" b="1">
+                          <a:solidFill>
+                            <a:srgbClr val="9AA5B1"/>
+                          </a:solidFill>
+                          <a:latin typeface="Inter"/>
+                        </a:defRPr>
+                      </a:pPr>
+                      <a:r>
+                        <a:rPr>
+                          <a:latin typeface="Inter"/>
+                        </a:rPr>
+                        <a:t>● Not checked</a:t>
+                      </a:r>
+                    </a:p>
+                  </a:txBody>
+                  <a:tcPr marL="54864" marR="54864" marT="27432" marB="27432" anchor="ctr">
+                    <a:solidFill>
+                      <a:srgbClr val="F5F7F9"/>
                     </a:solidFill>
                   </a:tcPr>
                 </a:tc>
@@ -12386,7 +11440,7 @@
                     <a:lstStyle/>
                     <a:p>
                       <a:pPr>
-                        <a:defRPr sz="650" b="1">
+                        <a:defRPr sz="720" b="1">
                           <a:solidFill>
                             <a:srgbClr val="0D1117"/>
                           </a:solidFill>
@@ -12413,7 +11467,7 @@
                     <a:lstStyle/>
                     <a:p>
                       <a:pPr>
-                        <a:defRPr sz="650" b="0">
+                        <a:defRPr sz="720" b="0">
                           <a:solidFill>
                             <a:srgbClr val="0D1117"/>
                           </a:solidFill>
@@ -12440,7 +11494,7 @@
                     <a:lstStyle/>
                     <a:p>
                       <a:pPr>
-                        <a:defRPr sz="650" b="0">
+                        <a:defRPr sz="720" b="0">
                           <a:solidFill>
                             <a:srgbClr val="0D1117"/>
                           </a:solidFill>
@@ -12451,7 +11505,7 @@
                         <a:rPr>
                           <a:latin typeface="Inter"/>
                         </a:rPr>
-                        <a:t>gradient_tool</a:t>
+                        <a:t>get_firm_13f_portfolio_review</a:t>
                       </a:r>
                     </a:p>
                   </a:txBody>
@@ -12467,7 +11521,7 @@
                     <a:lstStyle/>
                     <a:p>
                       <a:pPr>
-                        <a:defRPr sz="650" b="0">
+                        <a:defRPr sz="720" b="0">
                           <a:solidFill>
                             <a:srgbClr val="0D1117"/>
                           </a:solidFill>
@@ -12478,7 +11532,7 @@
                         <a:rPr>
                           <a:latin typeface="Inter"/>
                         </a:rPr>
-                        <a:t>get_firm_13f_portfolio_review</a:t>
+                        <a:t>2026-08-14</a:t>
                       </a:r>
                     </a:p>
                   </a:txBody>
@@ -12494,126 +11548,18 @@
                     <a:lstStyle/>
                     <a:p>
                       <a:pPr>
-                        <a:defRPr sz="650" b="0">
-                          <a:solidFill>
-                            <a:srgbClr val="0D1117"/>
-                          </a:solidFill>
-                          <a:latin typeface="Inter"/>
-                        </a:defRPr>
-                      </a:pPr>
-                      <a:r>
-                        <a:rPr>
-                          <a:latin typeface="Inter"/>
-                        </a:rPr>
-                        <a:t>illustrative sample</a:t>
-                      </a:r>
-                    </a:p>
-                  </a:txBody>
-                  <a:tcPr marL="54864" marR="54864" marT="27432" marB="27432" anchor="ctr">
-                    <a:solidFill>
-                      <a:srgbClr val="F5F7F9"/>
-                    </a:solidFill>
-                  </a:tcPr>
-                </a:tc>
-                <a:tc>
-                  <a:txBody>
-                    <a:bodyPr/>
-                    <a:lstStyle/>
-                    <a:p>
-                      <a:pPr>
-                        <a:defRPr sz="650" b="0">
-                          <a:solidFill>
-                            <a:srgbClr val="0D1117"/>
-                          </a:solidFill>
-                          <a:latin typeface="Inter"/>
-                        </a:defRPr>
-                      </a:pPr>
-                      <a:r>
-                        <a:rPr>
-                          <a:latin typeface="Inter"/>
-                        </a:rPr>
-                        <a:t>2026-08-14</a:t>
-                      </a:r>
-                    </a:p>
-                  </a:txBody>
-                  <a:tcPr marL="54864" marR="54864" marT="27432" marB="27432" anchor="ctr">
-                    <a:solidFill>
-                      <a:srgbClr val="F5F7F9"/>
-                    </a:solidFill>
-                  </a:tcPr>
-                </a:tc>
-                <a:tc>
-                  <a:txBody>
-                    <a:bodyPr/>
-                    <a:lstStyle/>
-                    <a:p>
-                      <a:pPr>
-                        <a:defRPr sz="650" b="0">
-                          <a:solidFill>
-                            <a:srgbClr val="0D1117"/>
-                          </a:solidFill>
-                          <a:latin typeface="Inter"/>
-                        </a:defRPr>
-                      </a:pPr>
-                      <a:r>
-                        <a:rPr>
-                          <a:latin typeface="Inter"/>
-                        </a:rPr>
-                        <a:t>Gradient-governed review evidence</a:t>
-                      </a:r>
-                    </a:p>
-                  </a:txBody>
-                  <a:tcPr marL="54864" marR="54864" marT="27432" marB="27432" anchor="ctr">
-                    <a:solidFill>
-                      <a:srgbClr val="F5F7F9"/>
-                    </a:solidFill>
-                  </a:tcPr>
-                </a:tc>
-                <a:tc>
-                  <a:txBody>
-                    <a:bodyPr/>
-                    <a:lstStyle/>
-                    <a:p>
-                      <a:pPr>
-                        <a:defRPr sz="650" b="0">
-                          <a:solidFill>
-                            <a:srgbClr val="0D1117"/>
-                          </a:solidFill>
-                          <a:latin typeface="Inter"/>
-                        </a:defRPr>
-                      </a:pPr>
-                      <a:r>
-                        <a:rPr>
-                          <a:latin typeface="Inter"/>
-                        </a:rPr>
-                        <a:t>{'chip': 'passed', 'status': 'passed'}</a:t>
-                      </a:r>
-                    </a:p>
-                  </a:txBody>
-                  <a:tcPr marL="54864" marR="54864" marT="27432" marB="27432" anchor="ctr">
-                    <a:solidFill>
-                      <a:srgbClr val="F5F7F9"/>
-                    </a:solidFill>
-                  </a:tcPr>
-                </a:tc>
-                <a:tc>
-                  <a:txBody>
-                    <a:bodyPr/>
-                    <a:lstStyle/>
-                    <a:p>
-                      <a:pPr>
-                        <a:defRPr sz="650" b="0">
-                          <a:solidFill>
-                            <a:srgbClr val="0D1117"/>
-                          </a:solidFill>
-                          <a:latin typeface="Inter"/>
-                        </a:defRPr>
-                      </a:pPr>
-                      <a:r>
-                        <a:rPr>
-                          <a:latin typeface="Inter"/>
-                        </a:rPr>
-                        <a:t>sha256:02bde3555a826680ac703dc2f2b89fbb093036a42c537ffa067590dde6b99d98</a:t>
+                        <a:defRPr sz="720" b="1">
+                          <a:solidFill>
+                            <a:srgbClr val="C6F432"/>
+                          </a:solidFill>
+                          <a:latin typeface="Inter"/>
+                        </a:defRPr>
+                      </a:pPr>
+                      <a:r>
+                        <a:rPr>
+                          <a:latin typeface="Inter"/>
+                        </a:rPr>
+                        <a:t>● Passed</a:t>
                       </a:r>
                     </a:p>
                   </a:txBody>
@@ -12631,7 +11577,7 @@
                     <a:lstStyle/>
                     <a:p>
                       <a:pPr>
-                        <a:defRPr sz="650" b="1">
+                        <a:defRPr sz="720" b="1">
                           <a:solidFill>
                             <a:srgbClr val="0D1117"/>
                           </a:solidFill>
@@ -12658,7 +11604,7 @@
                     <a:lstStyle/>
                     <a:p>
                       <a:pPr>
-                        <a:defRPr sz="650" b="0">
+                        <a:defRPr sz="720" b="0">
                           <a:solidFill>
                             <a:srgbClr val="0D1117"/>
                           </a:solidFill>
@@ -12685,7 +11631,7 @@
                     <a:lstStyle/>
                     <a:p>
                       <a:pPr>
-                        <a:defRPr sz="650" b="0">
+                        <a:defRPr sz="720" b="0">
                           <a:solidFill>
                             <a:srgbClr val="0D1117"/>
                           </a:solidFill>
@@ -12696,7 +11642,7 @@
                         <a:rPr>
                           <a:latin typeface="Inter"/>
                         </a:rPr>
-                        <a:t>gradient_tool</a:t>
+                        <a:t>get_firm_13f_portfolio_review</a:t>
                       </a:r>
                     </a:p>
                   </a:txBody>
@@ -12712,7 +11658,7 @@
                     <a:lstStyle/>
                     <a:p>
                       <a:pPr>
-                        <a:defRPr sz="650" b="0">
+                        <a:defRPr sz="720" b="0">
                           <a:solidFill>
                             <a:srgbClr val="0D1117"/>
                           </a:solidFill>
@@ -12723,7 +11669,7 @@
                         <a:rPr>
                           <a:latin typeface="Inter"/>
                         </a:rPr>
-                        <a:t>get_firm_13f_portfolio_review</a:t>
+                        <a:t>2026-08-13</a:t>
                       </a:r>
                     </a:p>
                   </a:txBody>
@@ -12739,132 +11685,24 @@
                     <a:lstStyle/>
                     <a:p>
                       <a:pPr>
-                        <a:defRPr sz="650" b="0">
-                          <a:solidFill>
-                            <a:srgbClr val="0D1117"/>
-                          </a:solidFill>
-                          <a:latin typeface="Inter"/>
-                        </a:defRPr>
-                      </a:pPr>
-                      <a:r>
-                        <a:rPr>
-                          <a:latin typeface="Inter"/>
-                        </a:rPr>
-                        <a:t>illustrative sample</a:t>
-                      </a:r>
-                    </a:p>
-                  </a:txBody>
-                  <a:tcPr marL="54864" marR="54864" marT="27432" marB="27432" anchor="ctr">
-                    <a:solidFill>
-                      <a:srgbClr val="FFFFFF"/>
-                    </a:solidFill>
-                  </a:tcPr>
-                </a:tc>
-                <a:tc>
-                  <a:txBody>
-                    <a:bodyPr/>
-                    <a:lstStyle/>
-                    <a:p>
-                      <a:pPr>
-                        <a:defRPr sz="650" b="0">
-                          <a:solidFill>
-                            <a:srgbClr val="0D1117"/>
-                          </a:solidFill>
-                          <a:latin typeface="Inter"/>
-                        </a:defRPr>
-                      </a:pPr>
-                      <a:r>
-                        <a:rPr>
-                          <a:latin typeface="Inter"/>
-                        </a:rPr>
-                        <a:t>2026-08-13</a:t>
-                      </a:r>
-                    </a:p>
-                  </a:txBody>
-                  <a:tcPr marL="54864" marR="54864" marT="27432" marB="27432" anchor="ctr">
-                    <a:solidFill>
-                      <a:srgbClr val="FFFFFF"/>
-                    </a:solidFill>
-                  </a:tcPr>
-                </a:tc>
-                <a:tc>
-                  <a:txBody>
-                    <a:bodyPr/>
-                    <a:lstStyle/>
-                    <a:p>
-                      <a:pPr>
-                        <a:defRPr sz="650" b="0">
-                          <a:solidFill>
-                            <a:srgbClr val="0D1117"/>
-                          </a:solidFill>
-                          <a:latin typeface="Inter"/>
-                        </a:defRPr>
-                      </a:pPr>
-                      <a:r>
-                        <a:rPr>
-                          <a:latin typeface="Inter"/>
-                        </a:rPr>
-                        <a:t>Gradient-governed review evidence</a:t>
-                      </a:r>
-                    </a:p>
-                  </a:txBody>
-                  <a:tcPr marL="54864" marR="54864" marT="27432" marB="27432" anchor="ctr">
-                    <a:solidFill>
-                      <a:srgbClr val="FFFFFF"/>
-                    </a:solidFill>
-                  </a:tcPr>
-                </a:tc>
-                <a:tc>
-                  <a:txBody>
-                    <a:bodyPr/>
-                    <a:lstStyle/>
-                    <a:p>
-                      <a:pPr>
-                        <a:defRPr sz="650" b="0">
-                          <a:solidFill>
-                            <a:srgbClr val="0D1117"/>
-                          </a:solidFill>
-                          <a:latin typeface="Inter"/>
-                        </a:defRPr>
-                      </a:pPr>
-                      <a:r>
-                        <a:rPr>
-                          <a:latin typeface="Inter"/>
-                        </a:rPr>
-                        <a:t>{'chip': 'passed', 'status': 'passed'}</a:t>
-                      </a:r>
-                    </a:p>
-                  </a:txBody>
-                  <a:tcPr marL="54864" marR="54864" marT="27432" marB="27432" anchor="ctr">
-                    <a:solidFill>
-                      <a:srgbClr val="FFFFFF"/>
-                    </a:solidFill>
-                  </a:tcPr>
-                </a:tc>
-                <a:tc>
-                  <a:txBody>
-                    <a:bodyPr/>
-                    <a:lstStyle/>
-                    <a:p>
-                      <a:pPr>
-                        <a:defRPr sz="650" b="0">
-                          <a:solidFill>
-                            <a:srgbClr val="0D1117"/>
-                          </a:solidFill>
-                          <a:latin typeface="Inter"/>
-                        </a:defRPr>
-                      </a:pPr>
-                      <a:r>
-                        <a:rPr>
-                          <a:latin typeface="Inter"/>
-                        </a:rPr>
-                        <a:t>sha256:ac6a4099593588f1ff12b41d56187683d45a4860c1d6b076ea601db88f9a9544</a:t>
-                      </a:r>
-                    </a:p>
-                  </a:txBody>
-                  <a:tcPr marL="54864" marR="54864" marT="27432" marB="27432" anchor="ctr">
-                    <a:solidFill>
-                      <a:srgbClr val="FFFFFF"/>
+                        <a:defRPr sz="720" b="1">
+                          <a:solidFill>
+                            <a:srgbClr val="C6F432"/>
+                          </a:solidFill>
+                          <a:latin typeface="Inter"/>
+                        </a:defRPr>
+                      </a:pPr>
+                      <a:r>
+                        <a:rPr>
+                          <a:latin typeface="Inter"/>
+                        </a:rPr>
+                        <a:t>● Passed</a:t>
+                      </a:r>
+                    </a:p>
+                  </a:txBody>
+                  <a:tcPr marL="54864" marR="54864" marT="27432" marB="27432" anchor="ctr">
+                    <a:solidFill>
+                      <a:srgbClr val="F5F7F9"/>
                     </a:solidFill>
                   </a:tcPr>
                 </a:tc>
@@ -12876,7 +11714,7 @@
                     <a:lstStyle/>
                     <a:p>
                       <a:pPr>
-                        <a:defRPr sz="650" b="1">
+                        <a:defRPr sz="720" b="1">
                           <a:solidFill>
                             <a:srgbClr val="0D1117"/>
                           </a:solidFill>
@@ -12903,7 +11741,7 @@
                     <a:lstStyle/>
                     <a:p>
                       <a:pPr>
-                        <a:defRPr sz="650" b="0">
+                        <a:defRPr sz="720" b="0">
                           <a:solidFill>
                             <a:srgbClr val="0D1117"/>
                           </a:solidFill>
@@ -12930,7 +11768,7 @@
                     <a:lstStyle/>
                     <a:p>
                       <a:pPr>
-                        <a:defRPr sz="650" b="0">
+                        <a:defRPr sz="720" b="0">
                           <a:solidFill>
                             <a:srgbClr val="0D1117"/>
                           </a:solidFill>
@@ -12941,7 +11779,7 @@
                         <a:rPr>
                           <a:latin typeface="Inter"/>
                         </a:rPr>
-                        <a:t>gradient_tool</a:t>
+                        <a:t>get_multi_manager_13f_overlap</a:t>
                       </a:r>
                     </a:p>
                   </a:txBody>
@@ -12957,7 +11795,7 @@
                     <a:lstStyle/>
                     <a:p>
                       <a:pPr>
-                        <a:defRPr sz="650" b="0">
+                        <a:defRPr sz="720" b="0">
                           <a:solidFill>
                             <a:srgbClr val="0D1117"/>
                           </a:solidFill>
@@ -12968,7 +11806,7 @@
                         <a:rPr>
                           <a:latin typeface="Inter"/>
                         </a:rPr>
-                        <a:t>get_multi_manager_13f_overlap</a:t>
+                        <a:t>2026-08-14</a:t>
                       </a:r>
                     </a:p>
                   </a:txBody>
@@ -12984,126 +11822,18 @@
                     <a:lstStyle/>
                     <a:p>
                       <a:pPr>
-                        <a:defRPr sz="650" b="0">
-                          <a:solidFill>
-                            <a:srgbClr val="0D1117"/>
-                          </a:solidFill>
-                          <a:latin typeface="Inter"/>
-                        </a:defRPr>
-                      </a:pPr>
-                      <a:r>
-                        <a:rPr>
-                          <a:latin typeface="Inter"/>
-                        </a:rPr>
-                        <a:t>illustrative sample</a:t>
-                      </a:r>
-                    </a:p>
-                  </a:txBody>
-                  <a:tcPr marL="54864" marR="54864" marT="27432" marB="27432" anchor="ctr">
-                    <a:solidFill>
-                      <a:srgbClr val="F5F7F9"/>
-                    </a:solidFill>
-                  </a:tcPr>
-                </a:tc>
-                <a:tc>
-                  <a:txBody>
-                    <a:bodyPr/>
-                    <a:lstStyle/>
-                    <a:p>
-                      <a:pPr>
-                        <a:defRPr sz="650" b="0">
-                          <a:solidFill>
-                            <a:srgbClr val="0D1117"/>
-                          </a:solidFill>
-                          <a:latin typeface="Inter"/>
-                        </a:defRPr>
-                      </a:pPr>
-                      <a:r>
-                        <a:rPr>
-                          <a:latin typeface="Inter"/>
-                        </a:rPr>
-                        <a:t>2026-08-14</a:t>
-                      </a:r>
-                    </a:p>
-                  </a:txBody>
-                  <a:tcPr marL="54864" marR="54864" marT="27432" marB="27432" anchor="ctr">
-                    <a:solidFill>
-                      <a:srgbClr val="F5F7F9"/>
-                    </a:solidFill>
-                  </a:tcPr>
-                </a:tc>
-                <a:tc>
-                  <a:txBody>
-                    <a:bodyPr/>
-                    <a:lstStyle/>
-                    <a:p>
-                      <a:pPr>
-                        <a:defRPr sz="650" b="0">
-                          <a:solidFill>
-                            <a:srgbClr val="0D1117"/>
-                          </a:solidFill>
-                          <a:latin typeface="Inter"/>
-                        </a:defRPr>
-                      </a:pPr>
-                      <a:r>
-                        <a:rPr>
-                          <a:latin typeface="Inter"/>
-                        </a:rPr>
-                        <a:t>Gradient-governed review evidence</a:t>
-                      </a:r>
-                    </a:p>
-                  </a:txBody>
-                  <a:tcPr marL="54864" marR="54864" marT="27432" marB="27432" anchor="ctr">
-                    <a:solidFill>
-                      <a:srgbClr val="F5F7F9"/>
-                    </a:solidFill>
-                  </a:tcPr>
-                </a:tc>
-                <a:tc>
-                  <a:txBody>
-                    <a:bodyPr/>
-                    <a:lstStyle/>
-                    <a:p>
-                      <a:pPr>
-                        <a:defRPr sz="650" b="0">
-                          <a:solidFill>
-                            <a:srgbClr val="0D1117"/>
-                          </a:solidFill>
-                          <a:latin typeface="Inter"/>
-                        </a:defRPr>
-                      </a:pPr>
-                      <a:r>
-                        <a:rPr>
-                          <a:latin typeface="Inter"/>
-                        </a:rPr>
-                        <a:t>{'chip': 'passed', 'status': 'passed'}</a:t>
-                      </a:r>
-                    </a:p>
-                  </a:txBody>
-                  <a:tcPr marL="54864" marR="54864" marT="27432" marB="27432" anchor="ctr">
-                    <a:solidFill>
-                      <a:srgbClr val="F5F7F9"/>
-                    </a:solidFill>
-                  </a:tcPr>
-                </a:tc>
-                <a:tc>
-                  <a:txBody>
-                    <a:bodyPr/>
-                    <a:lstStyle/>
-                    <a:p>
-                      <a:pPr>
-                        <a:defRPr sz="650" b="0">
-                          <a:solidFill>
-                            <a:srgbClr val="0D1117"/>
-                          </a:solidFill>
-                          <a:latin typeface="Inter"/>
-                        </a:defRPr>
-                      </a:pPr>
-                      <a:r>
-                        <a:rPr>
-                          <a:latin typeface="Inter"/>
-                        </a:rPr>
-                        <a:t>sha256:92cdf7540064d7e561fae2a2b9b1cb371e49a0421b9ca8ccaf8d5ef73a6ed907</a:t>
+                        <a:defRPr sz="720" b="1">
+                          <a:solidFill>
+                            <a:srgbClr val="C6F432"/>
+                          </a:solidFill>
+                          <a:latin typeface="Inter"/>
+                        </a:defRPr>
+                      </a:pPr>
+                      <a:r>
+                        <a:rPr>
+                          <a:latin typeface="Inter"/>
+                        </a:rPr>
+                        <a:t>● Passed</a:t>
                       </a:r>
                     </a:p>
                   </a:txBody>
@@ -13121,7 +11851,7 @@
                     <a:lstStyle/>
                     <a:p>
                       <a:pPr>
-                        <a:defRPr sz="650" b="1">
+                        <a:defRPr sz="720" b="1">
                           <a:solidFill>
                             <a:srgbClr val="0D1117"/>
                           </a:solidFill>
@@ -13148,7 +11878,7 @@
                     <a:lstStyle/>
                     <a:p>
                       <a:pPr>
-                        <a:defRPr sz="650" b="0">
+                        <a:defRPr sz="720" b="0">
                           <a:solidFill>
                             <a:srgbClr val="0D1117"/>
                           </a:solidFill>
@@ -13175,7 +11905,7 @@
                     <a:lstStyle/>
                     <a:p>
                       <a:pPr>
-                        <a:defRPr sz="650" b="0">
+                        <a:defRPr sz="720" b="0">
                           <a:solidFill>
                             <a:srgbClr val="0D1117"/>
                           </a:solidFill>
@@ -13186,7 +11916,7 @@
                         <a:rPr>
                           <a:latin typeface="Inter"/>
                         </a:rPr>
-                        <a:t>gradient_tool</a:t>
+                        <a:t>get_manager_odd_profile</a:t>
                       </a:r>
                     </a:p>
                   </a:txBody>
@@ -13202,7 +11932,7 @@
                     <a:lstStyle/>
                     <a:p>
                       <a:pPr>
-                        <a:defRPr sz="650" b="0">
+                        <a:defRPr sz="720" b="0">
                           <a:solidFill>
                             <a:srgbClr val="0D1117"/>
                           </a:solidFill>
@@ -13213,7 +11943,7 @@
                         <a:rPr>
                           <a:latin typeface="Inter"/>
                         </a:rPr>
-                        <a:t>get_manager_odd_profile</a:t>
+                        <a:t>2026-10-01</a:t>
                       </a:r>
                     </a:p>
                   </a:txBody>
@@ -13229,132 +11959,24 @@
                     <a:lstStyle/>
                     <a:p>
                       <a:pPr>
-                        <a:defRPr sz="650" b="0">
-                          <a:solidFill>
-                            <a:srgbClr val="0D1117"/>
-                          </a:solidFill>
-                          <a:latin typeface="Inter"/>
-                        </a:defRPr>
-                      </a:pPr>
-                      <a:r>
-                        <a:rPr>
-                          <a:latin typeface="Inter"/>
-                        </a:rPr>
-                        <a:t>illustrative sample</a:t>
-                      </a:r>
-                    </a:p>
-                  </a:txBody>
-                  <a:tcPr marL="54864" marR="54864" marT="27432" marB="27432" anchor="ctr">
-                    <a:solidFill>
-                      <a:srgbClr val="FFFFFF"/>
-                    </a:solidFill>
-                  </a:tcPr>
-                </a:tc>
-                <a:tc>
-                  <a:txBody>
-                    <a:bodyPr/>
-                    <a:lstStyle/>
-                    <a:p>
-                      <a:pPr>
-                        <a:defRPr sz="650" b="0">
-                          <a:solidFill>
-                            <a:srgbClr val="0D1117"/>
-                          </a:solidFill>
-                          <a:latin typeface="Inter"/>
-                        </a:defRPr>
-                      </a:pPr>
-                      <a:r>
-                        <a:rPr>
-                          <a:latin typeface="Inter"/>
-                        </a:rPr>
-                        <a:t>2026-10-01</a:t>
-                      </a:r>
-                    </a:p>
-                  </a:txBody>
-                  <a:tcPr marL="54864" marR="54864" marT="27432" marB="27432" anchor="ctr">
-                    <a:solidFill>
-                      <a:srgbClr val="FFFFFF"/>
-                    </a:solidFill>
-                  </a:tcPr>
-                </a:tc>
-                <a:tc>
-                  <a:txBody>
-                    <a:bodyPr/>
-                    <a:lstStyle/>
-                    <a:p>
-                      <a:pPr>
-                        <a:defRPr sz="650" b="0">
-                          <a:solidFill>
-                            <a:srgbClr val="0D1117"/>
-                          </a:solidFill>
-                          <a:latin typeface="Inter"/>
-                        </a:defRPr>
-                      </a:pPr>
-                      <a:r>
-                        <a:rPr>
-                          <a:latin typeface="Inter"/>
-                        </a:rPr>
-                        <a:t>Gradient-governed review evidence</a:t>
-                      </a:r>
-                    </a:p>
-                  </a:txBody>
-                  <a:tcPr marL="54864" marR="54864" marT="27432" marB="27432" anchor="ctr">
-                    <a:solidFill>
-                      <a:srgbClr val="FFFFFF"/>
-                    </a:solidFill>
-                  </a:tcPr>
-                </a:tc>
-                <a:tc>
-                  <a:txBody>
-                    <a:bodyPr/>
-                    <a:lstStyle/>
-                    <a:p>
-                      <a:pPr>
-                        <a:defRPr sz="650" b="0">
-                          <a:solidFill>
-                            <a:srgbClr val="0D1117"/>
-                          </a:solidFill>
-                          <a:latin typeface="Inter"/>
-                        </a:defRPr>
-                      </a:pPr>
-                      <a:r>
-                        <a:rPr>
-                          <a:latin typeface="Inter"/>
-                        </a:rPr>
-                        <a:t>{'chip': 'not_run', 'status': 'not_run'}</a:t>
-                      </a:r>
-                    </a:p>
-                  </a:txBody>
-                  <a:tcPr marL="54864" marR="54864" marT="27432" marB="27432" anchor="ctr">
-                    <a:solidFill>
-                      <a:srgbClr val="FFFFFF"/>
-                    </a:solidFill>
-                  </a:tcPr>
-                </a:tc>
-                <a:tc>
-                  <a:txBody>
-                    <a:bodyPr/>
-                    <a:lstStyle/>
-                    <a:p>
-                      <a:pPr>
-                        <a:defRPr sz="650" b="0">
-                          <a:solidFill>
-                            <a:srgbClr val="0D1117"/>
-                          </a:solidFill>
-                          <a:latin typeface="Inter"/>
-                        </a:defRPr>
-                      </a:pPr>
-                      <a:r>
-                        <a:rPr>
-                          <a:latin typeface="Inter"/>
-                        </a:rPr>
-                        <a:t>sha256:3cb10846a6ea6eae69552d0fdba086d996c6b674c6e6c2c707ffd556f51bf50d</a:t>
-                      </a:r>
-                    </a:p>
-                  </a:txBody>
-                  <a:tcPr marL="54864" marR="54864" marT="27432" marB="27432" anchor="ctr">
-                    <a:solidFill>
-                      <a:srgbClr val="FFFFFF"/>
+                        <a:defRPr sz="720" b="1">
+                          <a:solidFill>
+                            <a:srgbClr val="9AA5B1"/>
+                          </a:solidFill>
+                          <a:latin typeface="Inter"/>
+                        </a:defRPr>
+                      </a:pPr>
+                      <a:r>
+                        <a:rPr>
+                          <a:latin typeface="Inter"/>
+                        </a:rPr>
+                        <a:t>● Not checked</a:t>
+                      </a:r>
+                    </a:p>
+                  </a:txBody>
+                  <a:tcPr marL="54864" marR="54864" marT="27432" marB="27432" anchor="ctr">
+                    <a:solidFill>
+                      <a:srgbClr val="F5F7F9"/>
                     </a:solidFill>
                   </a:tcPr>
                 </a:tc>
@@ -13366,7 +11988,7 @@
                     <a:lstStyle/>
                     <a:p>
                       <a:pPr>
-                        <a:defRPr sz="650" b="1">
+                        <a:defRPr sz="720" b="1">
                           <a:solidFill>
                             <a:srgbClr val="0D1117"/>
                           </a:solidFill>
@@ -13393,7 +12015,7 @@
                     <a:lstStyle/>
                     <a:p>
                       <a:pPr>
-                        <a:defRPr sz="650" b="0">
+                        <a:defRPr sz="720" b="0">
                           <a:solidFill>
                             <a:srgbClr val="0D1117"/>
                           </a:solidFill>
@@ -13420,7 +12042,7 @@
                     <a:lstStyle/>
                     <a:p>
                       <a:pPr>
-                        <a:defRPr sz="650" b="0">
+                        <a:defRPr sz="720" b="0">
                           <a:solidFill>
                             <a:srgbClr val="0D1117"/>
                           </a:solidFill>
@@ -13431,7 +12053,7 @@
                         <a:rPr>
                           <a:latin typeface="Inter"/>
                         </a:rPr>
-                        <a:t>gradient_tool</a:t>
+                        <a:t>get_firm_13f_portfolio_review</a:t>
                       </a:r>
                     </a:p>
                   </a:txBody>
@@ -13447,7 +12069,7 @@
                     <a:lstStyle/>
                     <a:p>
                       <a:pPr>
-                        <a:defRPr sz="650" b="0">
+                        <a:defRPr sz="720" b="0">
                           <a:solidFill>
                             <a:srgbClr val="0D1117"/>
                           </a:solidFill>
@@ -13458,7 +12080,7 @@
                         <a:rPr>
                           <a:latin typeface="Inter"/>
                         </a:rPr>
-                        <a:t>get_firm_13f_portfolio_review</a:t>
+                        <a:t>2026-10-01</a:t>
                       </a:r>
                     </a:p>
                   </a:txBody>
@@ -13474,126 +12096,18 @@
                     <a:lstStyle/>
                     <a:p>
                       <a:pPr>
-                        <a:defRPr sz="650" b="0">
-                          <a:solidFill>
-                            <a:srgbClr val="0D1117"/>
-                          </a:solidFill>
-                          <a:latin typeface="Inter"/>
-                        </a:defRPr>
-                      </a:pPr>
-                      <a:r>
-                        <a:rPr>
-                          <a:latin typeface="Inter"/>
-                        </a:rPr>
-                        <a:t>illustrative sample</a:t>
-                      </a:r>
-                    </a:p>
-                  </a:txBody>
-                  <a:tcPr marL="54864" marR="54864" marT="27432" marB="27432" anchor="ctr">
-                    <a:solidFill>
-                      <a:srgbClr val="F5F7F9"/>
-                    </a:solidFill>
-                  </a:tcPr>
-                </a:tc>
-                <a:tc>
-                  <a:txBody>
-                    <a:bodyPr/>
-                    <a:lstStyle/>
-                    <a:p>
-                      <a:pPr>
-                        <a:defRPr sz="650" b="0">
-                          <a:solidFill>
-                            <a:srgbClr val="0D1117"/>
-                          </a:solidFill>
-                          <a:latin typeface="Inter"/>
-                        </a:defRPr>
-                      </a:pPr>
-                      <a:r>
-                        <a:rPr>
-                          <a:latin typeface="Inter"/>
-                        </a:rPr>
-                        <a:t>2026-10-01</a:t>
-                      </a:r>
-                    </a:p>
-                  </a:txBody>
-                  <a:tcPr marL="54864" marR="54864" marT="27432" marB="27432" anchor="ctr">
-                    <a:solidFill>
-                      <a:srgbClr val="F5F7F9"/>
-                    </a:solidFill>
-                  </a:tcPr>
-                </a:tc>
-                <a:tc>
-                  <a:txBody>
-                    <a:bodyPr/>
-                    <a:lstStyle/>
-                    <a:p>
-                      <a:pPr>
-                        <a:defRPr sz="650" b="0">
-                          <a:solidFill>
-                            <a:srgbClr val="0D1117"/>
-                          </a:solidFill>
-                          <a:latin typeface="Inter"/>
-                        </a:defRPr>
-                      </a:pPr>
-                      <a:r>
-                        <a:rPr>
-                          <a:latin typeface="Inter"/>
-                        </a:rPr>
-                        <a:t>Gradient-governed review evidence</a:t>
-                      </a:r>
-                    </a:p>
-                  </a:txBody>
-                  <a:tcPr marL="54864" marR="54864" marT="27432" marB="27432" anchor="ctr">
-                    <a:solidFill>
-                      <a:srgbClr val="F5F7F9"/>
-                    </a:solidFill>
-                  </a:tcPr>
-                </a:tc>
-                <a:tc>
-                  <a:txBody>
-                    <a:bodyPr/>
-                    <a:lstStyle/>
-                    <a:p>
-                      <a:pPr>
-                        <a:defRPr sz="650" b="0">
-                          <a:solidFill>
-                            <a:srgbClr val="0D1117"/>
-                          </a:solidFill>
-                          <a:latin typeface="Inter"/>
-                        </a:defRPr>
-                      </a:pPr>
-                      <a:r>
-                        <a:rPr>
-                          <a:latin typeface="Inter"/>
-                        </a:rPr>
-                        <a:t>{'chip': 'passed', 'status': 'passed'}</a:t>
-                      </a:r>
-                    </a:p>
-                  </a:txBody>
-                  <a:tcPr marL="54864" marR="54864" marT="27432" marB="27432" anchor="ctr">
-                    <a:solidFill>
-                      <a:srgbClr val="F5F7F9"/>
-                    </a:solidFill>
-                  </a:tcPr>
-                </a:tc>
-                <a:tc>
-                  <a:txBody>
-                    <a:bodyPr/>
-                    <a:lstStyle/>
-                    <a:p>
-                      <a:pPr>
-                        <a:defRPr sz="650" b="0">
-                          <a:solidFill>
-                            <a:srgbClr val="0D1117"/>
-                          </a:solidFill>
-                          <a:latin typeface="Inter"/>
-                        </a:defRPr>
-                      </a:pPr>
-                      <a:r>
-                        <a:rPr>
-                          <a:latin typeface="Inter"/>
-                        </a:rPr>
-                        <a:t>sha256:052330f5bbf0bf07ded0648cdacf9f452a9be7aef933b86130551d39c5cd9236</a:t>
+                        <a:defRPr sz="720" b="1">
+                          <a:solidFill>
+                            <a:srgbClr val="C6F432"/>
+                          </a:solidFill>
+                          <a:latin typeface="Inter"/>
+                        </a:defRPr>
+                      </a:pPr>
+                      <a:r>
+                        <a:rPr>
+                          <a:latin typeface="Inter"/>
+                        </a:rPr>
+                        <a:t>● Passed</a:t>
                       </a:r>
                     </a:p>
                   </a:txBody>
@@ -13611,7 +12125,7 @@
                     <a:lstStyle/>
                     <a:p>
                       <a:pPr>
-                        <a:defRPr sz="650" b="1">
+                        <a:defRPr sz="720" b="1">
                           <a:solidFill>
                             <a:srgbClr val="0D1117"/>
                           </a:solidFill>
@@ -13638,7 +12152,7 @@
                     <a:lstStyle/>
                     <a:p>
                       <a:pPr>
-                        <a:defRPr sz="650" b="0">
+                        <a:defRPr sz="720" b="0">
                           <a:solidFill>
                             <a:srgbClr val="0D1117"/>
                           </a:solidFill>
@@ -13665,7 +12179,7 @@
                     <a:lstStyle/>
                     <a:p>
                       <a:pPr>
-                        <a:defRPr sz="650" b="0">
+                        <a:defRPr sz="720" b="0">
                           <a:solidFill>
                             <a:srgbClr val="0D1117"/>
                           </a:solidFill>
@@ -13676,7 +12190,7 @@
                         <a:rPr>
                           <a:latin typeface="Inter"/>
                         </a:rPr>
-                        <a:t>gradient_tool</a:t>
+                        <a:t>get_manager_diligence_findings</a:t>
                       </a:r>
                     </a:p>
                   </a:txBody>
@@ -13692,7 +12206,7 @@
                     <a:lstStyle/>
                     <a:p>
                       <a:pPr>
-                        <a:defRPr sz="650" b="0">
+                        <a:defRPr sz="720" b="0">
                           <a:solidFill>
                             <a:srgbClr val="0D1117"/>
                           </a:solidFill>
@@ -13703,7 +12217,7 @@
                         <a:rPr>
                           <a:latin typeface="Inter"/>
                         </a:rPr>
-                        <a:t>get_manager_diligence_findings</a:t>
+                        <a:t>2026-10-04</a:t>
                       </a:r>
                     </a:p>
                   </a:txBody>
@@ -13719,132 +12233,24 @@
                     <a:lstStyle/>
                     <a:p>
                       <a:pPr>
-                        <a:defRPr sz="650" b="0">
-                          <a:solidFill>
-                            <a:srgbClr val="0D1117"/>
-                          </a:solidFill>
-                          <a:latin typeface="Inter"/>
-                        </a:defRPr>
-                      </a:pPr>
-                      <a:r>
-                        <a:rPr>
-                          <a:latin typeface="Inter"/>
-                        </a:rPr>
-                        <a:t>illustrative sample</a:t>
-                      </a:r>
-                    </a:p>
-                  </a:txBody>
-                  <a:tcPr marL="54864" marR="54864" marT="27432" marB="27432" anchor="ctr">
-                    <a:solidFill>
-                      <a:srgbClr val="FFFFFF"/>
-                    </a:solidFill>
-                  </a:tcPr>
-                </a:tc>
-                <a:tc>
-                  <a:txBody>
-                    <a:bodyPr/>
-                    <a:lstStyle/>
-                    <a:p>
-                      <a:pPr>
-                        <a:defRPr sz="650" b="0">
-                          <a:solidFill>
-                            <a:srgbClr val="0D1117"/>
-                          </a:solidFill>
-                          <a:latin typeface="Inter"/>
-                        </a:defRPr>
-                      </a:pPr>
-                      <a:r>
-                        <a:rPr>
-                          <a:latin typeface="Inter"/>
-                        </a:rPr>
-                        <a:t>2026-10-04</a:t>
-                      </a:r>
-                    </a:p>
-                  </a:txBody>
-                  <a:tcPr marL="54864" marR="54864" marT="27432" marB="27432" anchor="ctr">
-                    <a:solidFill>
-                      <a:srgbClr val="FFFFFF"/>
-                    </a:solidFill>
-                  </a:tcPr>
-                </a:tc>
-                <a:tc>
-                  <a:txBody>
-                    <a:bodyPr/>
-                    <a:lstStyle/>
-                    <a:p>
-                      <a:pPr>
-                        <a:defRPr sz="650" b="0">
-                          <a:solidFill>
-                            <a:srgbClr val="0D1117"/>
-                          </a:solidFill>
-                          <a:latin typeface="Inter"/>
-                        </a:defRPr>
-                      </a:pPr>
-                      <a:r>
-                        <a:rPr>
-                          <a:latin typeface="Inter"/>
-                        </a:rPr>
-                        <a:t>Gradient-governed review evidence</a:t>
-                      </a:r>
-                    </a:p>
-                  </a:txBody>
-                  <a:tcPr marL="54864" marR="54864" marT="27432" marB="27432" anchor="ctr">
-                    <a:solidFill>
-                      <a:srgbClr val="FFFFFF"/>
-                    </a:solidFill>
-                  </a:tcPr>
-                </a:tc>
-                <a:tc>
-                  <a:txBody>
-                    <a:bodyPr/>
-                    <a:lstStyle/>
-                    <a:p>
-                      <a:pPr>
-                        <a:defRPr sz="650" b="0">
-                          <a:solidFill>
-                            <a:srgbClr val="0D1117"/>
-                          </a:solidFill>
-                          <a:latin typeface="Inter"/>
-                        </a:defRPr>
-                      </a:pPr>
-                      <a:r>
-                        <a:rPr>
-                          <a:latin typeface="Inter"/>
-                        </a:rPr>
-                        <a:t>{'chip': 'advisory', 'status': 'advisory'}</a:t>
-                      </a:r>
-                    </a:p>
-                  </a:txBody>
-                  <a:tcPr marL="54864" marR="54864" marT="27432" marB="27432" anchor="ctr">
-                    <a:solidFill>
-                      <a:srgbClr val="FFFFFF"/>
-                    </a:solidFill>
-                  </a:tcPr>
-                </a:tc>
-                <a:tc>
-                  <a:txBody>
-                    <a:bodyPr/>
-                    <a:lstStyle/>
-                    <a:p>
-                      <a:pPr>
-                        <a:defRPr sz="650" b="0">
-                          <a:solidFill>
-                            <a:srgbClr val="0D1117"/>
-                          </a:solidFill>
-                          <a:latin typeface="Inter"/>
-                        </a:defRPr>
-                      </a:pPr>
-                      <a:r>
-                        <a:rPr>
-                          <a:latin typeface="Inter"/>
-                        </a:rPr>
-                        <a:t>sha256:c5b2df526a01725ac3e9171b38b2b72687d5f5faa1864768ec4c3bc85ceeb816</a:t>
-                      </a:r>
-                    </a:p>
-                  </a:txBody>
-                  <a:tcPr marL="54864" marR="54864" marT="27432" marB="27432" anchor="ctr">
-                    <a:solidFill>
-                      <a:srgbClr val="FFFFFF"/>
+                        <a:defRPr sz="720" b="1">
+                          <a:solidFill>
+                            <a:srgbClr val="F2A93B"/>
+                          </a:solidFill>
+                          <a:latin typeface="Inter"/>
+                        </a:defRPr>
+                      </a:pPr>
+                      <a:r>
+                        <a:rPr>
+                          <a:latin typeface="Inter"/>
+                        </a:rPr>
+                        <a:t>● Advisory</a:t>
+                      </a:r>
+                    </a:p>
+                  </a:txBody>
+                  <a:tcPr marL="54864" marR="54864" marT="27432" marB="27432" anchor="ctr">
+                    <a:solidFill>
+                      <a:srgbClr val="F5F7F9"/>
                     </a:solidFill>
                   </a:tcPr>
                 </a:tc>
@@ -13856,7 +12262,7 @@
                     <a:lstStyle/>
                     <a:p>
                       <a:pPr>
-                        <a:defRPr sz="650" b="1">
+                        <a:defRPr sz="720" b="1">
                           <a:solidFill>
                             <a:srgbClr val="0D1117"/>
                           </a:solidFill>
@@ -13883,7 +12289,7 @@
                     <a:lstStyle/>
                     <a:p>
                       <a:pPr>
-                        <a:defRPr sz="650" b="0">
+                        <a:defRPr sz="720" b="0">
                           <a:solidFill>
                             <a:srgbClr val="0D1117"/>
                           </a:solidFill>
@@ -13910,7 +12316,7 @@
                     <a:lstStyle/>
                     <a:p>
                       <a:pPr>
-                        <a:defRPr sz="650" b="0">
+                        <a:defRPr sz="720" b="0">
                           <a:solidFill>
                             <a:srgbClr val="0D1117"/>
                           </a:solidFill>
@@ -13921,7 +12327,7 @@
                         <a:rPr>
                           <a:latin typeface="Inter"/>
                         </a:rPr>
-                        <a:t>gradient_tool</a:t>
+                        <a:t>get_firm_fund_events</a:t>
                       </a:r>
                     </a:p>
                   </a:txBody>
@@ -13937,7 +12343,7 @@
                     <a:lstStyle/>
                     <a:p>
                       <a:pPr>
-                        <a:defRPr sz="650" b="0">
+                        <a:defRPr sz="720" b="0">
                           <a:solidFill>
                             <a:srgbClr val="0D1117"/>
                           </a:solidFill>
@@ -13948,7 +12354,7 @@
                         <a:rPr>
                           <a:latin typeface="Inter"/>
                         </a:rPr>
-                        <a:t>get_firm_fund_events</a:t>
+                        <a:t>2026-10-04</a:t>
                       </a:r>
                     </a:p>
                   </a:txBody>
@@ -13964,126 +12370,18 @@
                     <a:lstStyle/>
                     <a:p>
                       <a:pPr>
-                        <a:defRPr sz="650" b="0">
-                          <a:solidFill>
-                            <a:srgbClr val="0D1117"/>
-                          </a:solidFill>
-                          <a:latin typeface="Inter"/>
-                        </a:defRPr>
-                      </a:pPr>
-                      <a:r>
-                        <a:rPr>
-                          <a:latin typeface="Inter"/>
-                        </a:rPr>
-                        <a:t>illustrative sample</a:t>
-                      </a:r>
-                    </a:p>
-                  </a:txBody>
-                  <a:tcPr marL="54864" marR="54864" marT="27432" marB="27432" anchor="ctr">
-                    <a:solidFill>
-                      <a:srgbClr val="F5F7F9"/>
-                    </a:solidFill>
-                  </a:tcPr>
-                </a:tc>
-                <a:tc>
-                  <a:txBody>
-                    <a:bodyPr/>
-                    <a:lstStyle/>
-                    <a:p>
-                      <a:pPr>
-                        <a:defRPr sz="650" b="0">
-                          <a:solidFill>
-                            <a:srgbClr val="0D1117"/>
-                          </a:solidFill>
-                          <a:latin typeface="Inter"/>
-                        </a:defRPr>
-                      </a:pPr>
-                      <a:r>
-                        <a:rPr>
-                          <a:latin typeface="Inter"/>
-                        </a:rPr>
-                        <a:t>2026-10-04</a:t>
-                      </a:r>
-                    </a:p>
-                  </a:txBody>
-                  <a:tcPr marL="54864" marR="54864" marT="27432" marB="27432" anchor="ctr">
-                    <a:solidFill>
-                      <a:srgbClr val="F5F7F9"/>
-                    </a:solidFill>
-                  </a:tcPr>
-                </a:tc>
-                <a:tc>
-                  <a:txBody>
-                    <a:bodyPr/>
-                    <a:lstStyle/>
-                    <a:p>
-                      <a:pPr>
-                        <a:defRPr sz="650" b="0">
-                          <a:solidFill>
-                            <a:srgbClr val="0D1117"/>
-                          </a:solidFill>
-                          <a:latin typeface="Inter"/>
-                        </a:defRPr>
-                      </a:pPr>
-                      <a:r>
-                        <a:rPr>
-                          <a:latin typeface="Inter"/>
-                        </a:rPr>
-                        <a:t>Gradient-governed review evidence</a:t>
-                      </a:r>
-                    </a:p>
-                  </a:txBody>
-                  <a:tcPr marL="54864" marR="54864" marT="27432" marB="27432" anchor="ctr">
-                    <a:solidFill>
-                      <a:srgbClr val="F5F7F9"/>
-                    </a:solidFill>
-                  </a:tcPr>
-                </a:tc>
-                <a:tc>
-                  <a:txBody>
-                    <a:bodyPr/>
-                    <a:lstStyle/>
-                    <a:p>
-                      <a:pPr>
-                        <a:defRPr sz="650" b="0">
-                          <a:solidFill>
-                            <a:srgbClr val="0D1117"/>
-                          </a:solidFill>
-                          <a:latin typeface="Inter"/>
-                        </a:defRPr>
-                      </a:pPr>
-                      <a:r>
-                        <a:rPr>
-                          <a:latin typeface="Inter"/>
-                        </a:rPr>
-                        <a:t>{'chip': 'passed', 'status': 'passed'}</a:t>
-                      </a:r>
-                    </a:p>
-                  </a:txBody>
-                  <a:tcPr marL="54864" marR="54864" marT="27432" marB="27432" anchor="ctr">
-                    <a:solidFill>
-                      <a:srgbClr val="F5F7F9"/>
-                    </a:solidFill>
-                  </a:tcPr>
-                </a:tc>
-                <a:tc>
-                  <a:txBody>
-                    <a:bodyPr/>
-                    <a:lstStyle/>
-                    <a:p>
-                      <a:pPr>
-                        <a:defRPr sz="650" b="0">
-                          <a:solidFill>
-                            <a:srgbClr val="0D1117"/>
-                          </a:solidFill>
-                          <a:latin typeface="Inter"/>
-                        </a:defRPr>
-                      </a:pPr>
-                      <a:r>
-                        <a:rPr>
-                          <a:latin typeface="Inter"/>
-                        </a:rPr>
-                        <a:t>sha256:50e4d573d06639839dc345c94ef1e122c0380d0a1c5e1c5c7477c6e8715cb44f</a:t>
+                        <a:defRPr sz="720" b="1">
+                          <a:solidFill>
+                            <a:srgbClr val="C6F432"/>
+                          </a:solidFill>
+                          <a:latin typeface="Inter"/>
+                        </a:defRPr>
+                      </a:pPr>
+                      <a:r>
+                        <a:rPr>
+                          <a:latin typeface="Inter"/>
+                        </a:rPr>
+                        <a:t>● Passed</a:t>
                       </a:r>
                     </a:p>
                   </a:txBody>
@@ -14101,7 +12399,7 @@
                     <a:lstStyle/>
                     <a:p>
                       <a:pPr>
-                        <a:defRPr sz="650" b="1">
+                        <a:defRPr sz="720" b="1">
                           <a:solidFill>
                             <a:srgbClr val="0D1117"/>
                           </a:solidFill>
@@ -14128,7 +12426,7 @@
                     <a:lstStyle/>
                     <a:p>
                       <a:pPr>
-                        <a:defRPr sz="650" b="0">
+                        <a:defRPr sz="720" b="0">
                           <a:solidFill>
                             <a:srgbClr val="0D1117"/>
                           </a:solidFill>
@@ -14155,7 +12453,7 @@
                     <a:lstStyle/>
                     <a:p>
                       <a:pPr>
-                        <a:defRPr sz="650" b="0">
+                        <a:defRPr sz="720" b="0">
                           <a:solidFill>
                             <a:srgbClr val="0D1117"/>
                           </a:solidFill>
@@ -14166,7 +12464,7 @@
                         <a:rPr>
                           <a:latin typeface="Inter"/>
                         </a:rPr>
-                        <a:t>gradient_tool</a:t>
+                        <a:t>get_firm_13f_portfolio_review</a:t>
                       </a:r>
                     </a:p>
                   </a:txBody>
@@ -14182,7 +12480,7 @@
                     <a:lstStyle/>
                     <a:p>
                       <a:pPr>
-                        <a:defRPr sz="650" b="0">
+                        <a:defRPr sz="720" b="0">
                           <a:solidFill>
                             <a:srgbClr val="0D1117"/>
                           </a:solidFill>
@@ -14193,7 +12491,7 @@
                         <a:rPr>
                           <a:latin typeface="Inter"/>
                         </a:rPr>
-                        <a:t>get_firm_13f_portfolio_review</a:t>
+                        <a:t>2026-10-01</a:t>
                       </a:r>
                     </a:p>
                   </a:txBody>
@@ -14209,132 +12507,24 @@
                     <a:lstStyle/>
                     <a:p>
                       <a:pPr>
-                        <a:defRPr sz="650" b="0">
-                          <a:solidFill>
-                            <a:srgbClr val="0D1117"/>
-                          </a:solidFill>
-                          <a:latin typeface="Inter"/>
-                        </a:defRPr>
-                      </a:pPr>
-                      <a:r>
-                        <a:rPr>
-                          <a:latin typeface="Inter"/>
-                        </a:rPr>
-                        <a:t>illustrative sample</a:t>
-                      </a:r>
-                    </a:p>
-                  </a:txBody>
-                  <a:tcPr marL="54864" marR="54864" marT="27432" marB="27432" anchor="ctr">
-                    <a:solidFill>
-                      <a:srgbClr val="FFFFFF"/>
-                    </a:solidFill>
-                  </a:tcPr>
-                </a:tc>
-                <a:tc>
-                  <a:txBody>
-                    <a:bodyPr/>
-                    <a:lstStyle/>
-                    <a:p>
-                      <a:pPr>
-                        <a:defRPr sz="650" b="0">
-                          <a:solidFill>
-                            <a:srgbClr val="0D1117"/>
-                          </a:solidFill>
-                          <a:latin typeface="Inter"/>
-                        </a:defRPr>
-                      </a:pPr>
-                      <a:r>
-                        <a:rPr>
-                          <a:latin typeface="Inter"/>
-                        </a:rPr>
-                        <a:t>2026-10-01</a:t>
-                      </a:r>
-                    </a:p>
-                  </a:txBody>
-                  <a:tcPr marL="54864" marR="54864" marT="27432" marB="27432" anchor="ctr">
-                    <a:solidFill>
-                      <a:srgbClr val="FFFFFF"/>
-                    </a:solidFill>
-                  </a:tcPr>
-                </a:tc>
-                <a:tc>
-                  <a:txBody>
-                    <a:bodyPr/>
-                    <a:lstStyle/>
-                    <a:p>
-                      <a:pPr>
-                        <a:defRPr sz="650" b="0">
-                          <a:solidFill>
-                            <a:srgbClr val="0D1117"/>
-                          </a:solidFill>
-                          <a:latin typeface="Inter"/>
-                        </a:defRPr>
-                      </a:pPr>
-                      <a:r>
-                        <a:rPr>
-                          <a:latin typeface="Inter"/>
-                        </a:rPr>
-                        <a:t>Gradient-governed review evidence</a:t>
-                      </a:r>
-                    </a:p>
-                  </a:txBody>
-                  <a:tcPr marL="54864" marR="54864" marT="27432" marB="27432" anchor="ctr">
-                    <a:solidFill>
-                      <a:srgbClr val="FFFFFF"/>
-                    </a:solidFill>
-                  </a:tcPr>
-                </a:tc>
-                <a:tc>
-                  <a:txBody>
-                    <a:bodyPr/>
-                    <a:lstStyle/>
-                    <a:p>
-                      <a:pPr>
-                        <a:defRPr sz="650" b="0">
-                          <a:solidFill>
-                            <a:srgbClr val="0D1117"/>
-                          </a:solidFill>
-                          <a:latin typeface="Inter"/>
-                        </a:defRPr>
-                      </a:pPr>
-                      <a:r>
-                        <a:rPr>
-                          <a:latin typeface="Inter"/>
-                        </a:rPr>
-                        <a:t>{'chip': 'passed', 'status': 'passed'}</a:t>
-                      </a:r>
-                    </a:p>
-                  </a:txBody>
-                  <a:tcPr marL="54864" marR="54864" marT="27432" marB="27432" anchor="ctr">
-                    <a:solidFill>
-                      <a:srgbClr val="FFFFFF"/>
-                    </a:solidFill>
-                  </a:tcPr>
-                </a:tc>
-                <a:tc>
-                  <a:txBody>
-                    <a:bodyPr/>
-                    <a:lstStyle/>
-                    <a:p>
-                      <a:pPr>
-                        <a:defRPr sz="650" b="0">
-                          <a:solidFill>
-                            <a:srgbClr val="0D1117"/>
-                          </a:solidFill>
-                          <a:latin typeface="Inter"/>
-                        </a:defRPr>
-                      </a:pPr>
-                      <a:r>
-                        <a:rPr>
-                          <a:latin typeface="Inter"/>
-                        </a:rPr>
-                        <a:t>sha256:ac4c506efcb81b48fdc16e42bff6a13136fcc0a2b78fcad838a590e4fccee0ab</a:t>
-                      </a:r>
-                    </a:p>
-                  </a:txBody>
-                  <a:tcPr marL="54864" marR="54864" marT="27432" marB="27432" anchor="ctr">
-                    <a:solidFill>
-                      <a:srgbClr val="FFFFFF"/>
+                        <a:defRPr sz="720" b="1">
+                          <a:solidFill>
+                            <a:srgbClr val="C6F432"/>
+                          </a:solidFill>
+                          <a:latin typeface="Inter"/>
+                        </a:defRPr>
+                      </a:pPr>
+                      <a:r>
+                        <a:rPr>
+                          <a:latin typeface="Inter"/>
+                        </a:rPr>
+                        <a:t>● Passed</a:t>
+                      </a:r>
+                    </a:p>
+                  </a:txBody>
+                  <a:tcPr marL="54864" marR="54864" marT="27432" marB="27432" anchor="ctr">
+                    <a:solidFill>
+                      <a:srgbClr val="F5F7F9"/>
                     </a:solidFill>
                   </a:tcPr>
                 </a:tc>
@@ -14345,7 +12535,7 @@
       </p:graphicFrame>
       <p:sp>
         <p:nvSpPr>
-          <p:cNvPr id="10" name="TextBox 9"/>
+          <p:cNvPr id="9" name="TextBox 8"/>
           <p:cNvSpPr txBox="1"/>
           <p:nvPr/>
         </p:nvSpPr>
@@ -14387,7 +12577,7 @@
       </p:sp>
       <p:sp>
         <p:nvSpPr>
-          <p:cNvPr id="11" name="Rectangle 10"/>
+          <p:cNvPr id="10" name="Rectangle 9"/>
           <p:cNvSpPr/>
           <p:nvPr/>
         </p:nvSpPr>
@@ -14436,7 +12626,7 @@
       </p:sp>
       <p:sp>
         <p:nvSpPr>
-          <p:cNvPr id="12" name="TextBox 11"/>
+          <p:cNvPr id="11" name="TextBox 10"/>
           <p:cNvSpPr txBox="1"/>
           <p:nvPr/>
         </p:nvSpPr>
@@ -14478,7 +12668,7 @@
       </p:sp>
       <p:sp>
         <p:nvSpPr>
-          <p:cNvPr id="13" name="TextBox 12"/>
+          <p:cNvPr id="12" name="TextBox 11"/>
           <p:cNvSpPr txBox="1"/>
           <p:nvPr/>
         </p:nvSpPr>
@@ -14520,7 +12710,7 @@
       </p:sp>
       <p:sp>
         <p:nvSpPr>
-          <p:cNvPr id="14" name="TextBox 13"/>
+          <p:cNvPr id="13" name="TextBox 12"/>
           <p:cNvSpPr txBox="1"/>
           <p:nvPr/>
         </p:nvSpPr>
@@ -14635,48 +12825,6 @@
         </p:nvSpPr>
         <p:spPr>
           <a:xfrm>
-            <a:off x="5897880" y="310896"/>
-            <a:ext cx="4800600" cy="256032"/>
-          </a:xfrm>
-          <a:prstGeom prst="rect">
-            <a:avLst/>
-          </a:prstGeom>
-          <a:noFill/>
-        </p:spPr>
-        <p:txBody>
-          <a:bodyPr wrap="none" lIns="9144" rIns="9144" tIns="9144" bIns="9144" anchor="t">
-            <a:spAutoFit/>
-          </a:bodyPr>
-          <a:lstStyle/>
-          <a:p>
-            <a:pPr algn="r">
-              <a:spcAft>
-                <a:spcPts val="0"/>
-              </a:spcAft>
-              <a:defRPr sz="680" b="1">
-                <a:solidFill>
-                  <a:srgbClr val="4F6B00"/>
-                </a:solidFill>
-                <a:latin typeface="Inter"/>
-              </a:defRPr>
-            </a:pPr>
-            <a:r>
-              <a:rPr>
-                <a:latin typeface="Inter"/>
-              </a:rPr>
-              <a:t>Illustrative, Gradient Maintained — demo data, not the client's holdings or managers</a:t>
-            </a:r>
-          </a:p>
-        </p:txBody>
-      </p:sp>
-      <p:sp>
-        <p:nvSpPr>
-          <p:cNvPr id="4" name="TextBox 3"/>
-          <p:cNvSpPr txBox="1"/>
-          <p:nvPr/>
-        </p:nvSpPr>
-        <p:spPr>
-          <a:xfrm>
             <a:off x="640080" y="566928"/>
             <a:ext cx="10058400" cy="530352"/>
           </a:xfrm>
@@ -14713,7 +12861,7 @@
       </p:sp>
       <p:sp>
         <p:nvSpPr>
-          <p:cNvPr id="5" name="Rectangle 4"/>
+          <p:cNvPr id="4" name="Rectangle 3"/>
           <p:cNvSpPr/>
           <p:nvPr/>
         </p:nvSpPr>
@@ -14762,7 +12910,7 @@
       </p:sp>
       <p:sp>
         <p:nvSpPr>
-          <p:cNvPr id="6" name="Rectangle 5"/>
+          <p:cNvPr id="5" name="Rectangle 4"/>
           <p:cNvSpPr/>
           <p:nvPr/>
         </p:nvSpPr>
@@ -14811,7 +12959,7 @@
       </p:sp>
       <p:sp>
         <p:nvSpPr>
-          <p:cNvPr id="7" name="TextBox 6"/>
+          <p:cNvPr id="6" name="TextBox 5"/>
           <p:cNvSpPr txBox="1"/>
           <p:nvPr/>
         </p:nvSpPr>
@@ -14853,112 +13001,14 @@
       </p:sp>
       <p:sp>
         <p:nvSpPr>
-          <p:cNvPr id="8" name="Rectangle 7"/>
-          <p:cNvSpPr/>
+          <p:cNvPr id="7" name="TextBox 6"/>
+          <p:cNvSpPr txBox="1"/>
           <p:nvPr/>
         </p:nvSpPr>
         <p:spPr>
           <a:xfrm>
             <a:off x="640080" y="1325880"/>
-            <a:ext cx="10908792" cy="4892040"/>
-          </a:xfrm>
-          <a:prstGeom prst="rect">
-            <a:avLst/>
-          </a:prstGeom>
-          <a:solidFill>
-            <a:srgbClr val="F5F7F9"/>
-          </a:solidFill>
-          <a:ln>
-            <a:solidFill>
-              <a:srgbClr val="E3E7EC"/>
-            </a:solidFill>
-          </a:ln>
-        </p:spPr>
-        <p:style>
-          <a:lnRef idx="1">
-            <a:schemeClr val="accent1"/>
-          </a:lnRef>
-          <a:fillRef idx="3">
-            <a:schemeClr val="accent1"/>
-          </a:fillRef>
-          <a:effectRef idx="2">
-            <a:schemeClr val="accent1"/>
-          </a:effectRef>
-          <a:fontRef idx="minor">
-            <a:schemeClr val="lt1"/>
-          </a:fontRef>
-        </p:style>
-        <p:txBody>
-          <a:bodyPr rtlCol="0" anchor="ctr"/>
-          <a:lstStyle/>
-          <a:p>
-            <a:pPr algn="ctr">
-              <a:defRPr>
-                <a:latin typeface="Inter"/>
-              </a:defRPr>
-            </a:pPr>
-          </a:p>
-        </p:txBody>
-      </p:sp>
-      <p:sp>
-        <p:nvSpPr>
-          <p:cNvPr id="9" name="Rectangle 8"/>
-          <p:cNvSpPr/>
-          <p:nvPr/>
-        </p:nvSpPr>
-        <p:spPr>
-          <a:xfrm>
-            <a:off x="640080" y="1325880"/>
-            <a:ext cx="54864" cy="4892040"/>
-          </a:xfrm>
-          <a:prstGeom prst="rect">
-            <a:avLst/>
-          </a:prstGeom>
-          <a:solidFill>
-            <a:srgbClr val="F2A93B"/>
-          </a:solidFill>
-          <a:ln>
-            <a:solidFill>
-              <a:srgbClr val="F2A93B"/>
-            </a:solidFill>
-          </a:ln>
-        </p:spPr>
-        <p:style>
-          <a:lnRef idx="1">
-            <a:schemeClr val="accent1"/>
-          </a:lnRef>
-          <a:fillRef idx="3">
-            <a:schemeClr val="accent1"/>
-          </a:fillRef>
-          <a:effectRef idx="2">
-            <a:schemeClr val="accent1"/>
-          </a:effectRef>
-          <a:fontRef idx="minor">
-            <a:schemeClr val="lt1"/>
-          </a:fontRef>
-        </p:style>
-        <p:txBody>
-          <a:bodyPr rtlCol="0" anchor="ctr"/>
-          <a:lstStyle/>
-          <a:p>
-            <a:pPr algn="ctr">
-              <a:defRPr>
-                <a:latin typeface="Inter"/>
-              </a:defRPr>
-            </a:pPr>
-          </a:p>
-        </p:txBody>
-      </p:sp>
-      <p:sp>
-        <p:nvSpPr>
-          <p:cNvPr id="10" name="TextBox 9"/>
-          <p:cNvSpPr txBox="1"/>
-          <p:nvPr/>
-        </p:nvSpPr>
-        <p:spPr>
-          <a:xfrm>
-            <a:off x="804671" y="1435607"/>
-            <a:ext cx="10616184" cy="228600"/>
+            <a:ext cx="10908792" cy="201168"/>
           </a:xfrm>
           <a:prstGeom prst="rect">
             <a:avLst/>
@@ -14975,9 +13025,9 @@
               <a:spcAft>
                 <a:spcPts val="0"/>
               </a:spcAft>
-              <a:defRPr sz="1000" b="1">
+              <a:defRPr sz="720" b="1">
                 <a:solidFill>
-                  <a:srgbClr val="0D1117"/>
+                  <a:srgbClr val="4A5563"/>
                 </a:solidFill>
                 <a:latin typeface="Inter"/>
               </a:defRPr>
@@ -14986,21 +13036,719 @@
               <a:rPr>
                 <a:latin typeface="Inter"/>
               </a:rPr>
-              <a:t>Unsupported block</a:t>
+              <a:t>SOURCE AUDIT TRAIL</a:t>
             </a:r>
           </a:p>
         </p:txBody>
       </p:sp>
-      <p:sp>
-        <p:nvSpPr>
-          <p:cNvPr id="11" name="TextBox 10"/>
+      <p:graphicFrame>
+        <p:nvGraphicFramePr>
+          <p:cNvPr id="8" name="Table 7"/>
+          <p:cNvGraphicFramePr>
+            <a:graphicFrameLocks noGrp="1"/>
+          </p:cNvGraphicFramePr>
+          <p:nvPr/>
+        </p:nvGraphicFramePr>
+        <p:xfrm>
+          <a:off x="640080" y="1600200"/>
+          <a:ext cx="10908792" cy="4416552"/>
+        </p:xfrm>
+        <a:graphic>
+          <a:graphicData uri="http://schemas.openxmlformats.org/drawingml/2006/table">
+            <a:tbl>
+              <a:tblPr firstRow="1" bandRow="1">
+                <a:tableStyleId>{5C22544A-7EE6-4342-B048-85BDC9FD1C3A}</a:tableStyleId>
+              </a:tblPr>
+              <a:tblGrid>
+                <a:gridCol w="2011680"/>
+                <a:gridCol w="8897112"/>
+              </a:tblGrid>
+              <a:tr h="368046">
+                <a:tc>
+                  <a:txBody>
+                    <a:bodyPr/>
+                    <a:lstStyle/>
+                    <a:p>
+                      <a:pPr>
+                        <a:defRPr sz="750" b="1">
+                          <a:solidFill>
+                            <a:srgbClr val="FFFFFF"/>
+                          </a:solidFill>
+                          <a:latin typeface="Inter"/>
+                        </a:defRPr>
+                      </a:pPr>
+                      <a:r>
+                        <a:rPr>
+                          <a:latin typeface="Inter"/>
+                        </a:rPr>
+                        <a:t>Tag</a:t>
+                      </a:r>
+                    </a:p>
+                  </a:txBody>
+                  <a:tcPr marL="54864" marR="54864" marT="27432" marB="27432" anchor="ctr">
+                    <a:solidFill>
+                      <a:srgbClr val="0D1117"/>
+                    </a:solidFill>
+                  </a:tcPr>
+                </a:tc>
+                <a:tc>
+                  <a:txBody>
+                    <a:bodyPr/>
+                    <a:lstStyle/>
+                    <a:p>
+                      <a:pPr>
+                        <a:defRPr sz="750" b="1">
+                          <a:solidFill>
+                            <a:srgbClr val="FFFFFF"/>
+                          </a:solidFill>
+                          <a:latin typeface="Inter"/>
+                        </a:defRPr>
+                      </a:pPr>
+                      <a:r>
+                        <a:rPr>
+                          <a:latin typeface="Inter"/>
+                        </a:rPr>
+                        <a:t>Digest</a:t>
+                      </a:r>
+                    </a:p>
+                  </a:txBody>
+                  <a:tcPr marL="54864" marR="54864" marT="27432" marB="27432" anchor="ctr">
+                    <a:solidFill>
+                      <a:srgbClr val="0D1117"/>
+                    </a:solidFill>
+                  </a:tcPr>
+                </a:tc>
+              </a:tr>
+              <a:tr h="368046">
+                <a:tc>
+                  <a:txBody>
+                    <a:bodyPr/>
+                    <a:lstStyle/>
+                    <a:p>
+                      <a:pPr>
+                        <a:defRPr sz="800" b="1">
+                          <a:solidFill>
+                            <a:srgbClr val="0D1117"/>
+                          </a:solidFill>
+                          <a:latin typeface="Inter"/>
+                        </a:defRPr>
+                      </a:pPr>
+                      <a:r>
+                        <a:rPr>
+                          <a:latin typeface="Inter"/>
+                        </a:rPr>
+                        <a:t>S1</a:t>
+                      </a:r>
+                    </a:p>
+                  </a:txBody>
+                  <a:tcPr marL="54864" marR="54864" marT="27432" marB="27432" anchor="ctr">
+                    <a:solidFill>
+                      <a:srgbClr val="FFFFFF"/>
+                    </a:solidFill>
+                  </a:tcPr>
+                </a:tc>
+                <a:tc>
+                  <a:txBody>
+                    <a:bodyPr/>
+                    <a:lstStyle/>
+                    <a:p>
+                      <a:pPr>
+                        <a:defRPr sz="800" b="0">
+                          <a:solidFill>
+                            <a:srgbClr val="0D1117"/>
+                          </a:solidFill>
+                          <a:latin typeface="Inter"/>
+                        </a:defRPr>
+                      </a:pPr>
+                      <a:r>
+                        <a:rPr>
+                          <a:latin typeface="Inter"/>
+                        </a:rPr>
+                        <a:t>sha256:9364230b9895a9186656f1afaa4fdd9ff25a070143a72a1b504df9822dbd0c2c</a:t>
+                      </a:r>
+                    </a:p>
+                  </a:txBody>
+                  <a:tcPr marL="54864" marR="54864" marT="27432" marB="27432" anchor="ctr">
+                    <a:solidFill>
+                      <a:srgbClr val="FFFFFF"/>
+                    </a:solidFill>
+                  </a:tcPr>
+                </a:tc>
+              </a:tr>
+              <a:tr h="368046">
+                <a:tc>
+                  <a:txBody>
+                    <a:bodyPr/>
+                    <a:lstStyle/>
+                    <a:p>
+                      <a:pPr>
+                        <a:defRPr sz="800" b="1">
+                          <a:solidFill>
+                            <a:srgbClr val="0D1117"/>
+                          </a:solidFill>
+                          <a:latin typeface="Inter"/>
+                        </a:defRPr>
+                      </a:pPr>
+                      <a:r>
+                        <a:rPr>
+                          <a:latin typeface="Inter"/>
+                        </a:rPr>
+                        <a:t>S2</a:t>
+                      </a:r>
+                    </a:p>
+                  </a:txBody>
+                  <a:tcPr marL="54864" marR="54864" marT="27432" marB="27432" anchor="ctr">
+                    <a:solidFill>
+                      <a:srgbClr val="F5F7F9"/>
+                    </a:solidFill>
+                  </a:tcPr>
+                </a:tc>
+                <a:tc>
+                  <a:txBody>
+                    <a:bodyPr/>
+                    <a:lstStyle/>
+                    <a:p>
+                      <a:pPr>
+                        <a:defRPr sz="800" b="0">
+                          <a:solidFill>
+                            <a:srgbClr val="0D1117"/>
+                          </a:solidFill>
+                          <a:latin typeface="Inter"/>
+                        </a:defRPr>
+                      </a:pPr>
+                      <a:r>
+                        <a:rPr>
+                          <a:latin typeface="Inter"/>
+                        </a:rPr>
+                        <a:t>sha256:0ba26a4bbb2e102faee753294979c1138f605a155f985ac94efe3e887fdc52f7</a:t>
+                      </a:r>
+                    </a:p>
+                  </a:txBody>
+                  <a:tcPr marL="54864" marR="54864" marT="27432" marB="27432" anchor="ctr">
+                    <a:solidFill>
+                      <a:srgbClr val="F5F7F9"/>
+                    </a:solidFill>
+                  </a:tcPr>
+                </a:tc>
+              </a:tr>
+              <a:tr h="368046">
+                <a:tc>
+                  <a:txBody>
+                    <a:bodyPr/>
+                    <a:lstStyle/>
+                    <a:p>
+                      <a:pPr>
+                        <a:defRPr sz="800" b="1">
+                          <a:solidFill>
+                            <a:srgbClr val="0D1117"/>
+                          </a:solidFill>
+                          <a:latin typeface="Inter"/>
+                        </a:defRPr>
+                      </a:pPr>
+                      <a:r>
+                        <a:rPr>
+                          <a:latin typeface="Inter"/>
+                        </a:rPr>
+                        <a:t>S3</a:t>
+                      </a:r>
+                    </a:p>
+                  </a:txBody>
+                  <a:tcPr marL="54864" marR="54864" marT="27432" marB="27432" anchor="ctr">
+                    <a:solidFill>
+                      <a:srgbClr val="FFFFFF"/>
+                    </a:solidFill>
+                  </a:tcPr>
+                </a:tc>
+                <a:tc>
+                  <a:txBody>
+                    <a:bodyPr/>
+                    <a:lstStyle/>
+                    <a:p>
+                      <a:pPr>
+                        <a:defRPr sz="800" b="0">
+                          <a:solidFill>
+                            <a:srgbClr val="0D1117"/>
+                          </a:solidFill>
+                          <a:latin typeface="Inter"/>
+                        </a:defRPr>
+                      </a:pPr>
+                      <a:r>
+                        <a:rPr>
+                          <a:latin typeface="Inter"/>
+                        </a:rPr>
+                        <a:t>sha256:079104f42a886920dde0e602181eea3c7622408e953d392d251e822c3d4c40fc</a:t>
+                      </a:r>
+                    </a:p>
+                  </a:txBody>
+                  <a:tcPr marL="54864" marR="54864" marT="27432" marB="27432" anchor="ctr">
+                    <a:solidFill>
+                      <a:srgbClr val="FFFFFF"/>
+                    </a:solidFill>
+                  </a:tcPr>
+                </a:tc>
+              </a:tr>
+              <a:tr h="368046">
+                <a:tc>
+                  <a:txBody>
+                    <a:bodyPr/>
+                    <a:lstStyle/>
+                    <a:p>
+                      <a:pPr>
+                        <a:defRPr sz="800" b="1">
+                          <a:solidFill>
+                            <a:srgbClr val="0D1117"/>
+                          </a:solidFill>
+                          <a:latin typeface="Inter"/>
+                        </a:defRPr>
+                      </a:pPr>
+                      <a:r>
+                        <a:rPr>
+                          <a:latin typeface="Inter"/>
+                        </a:rPr>
+                        <a:t>S4</a:t>
+                      </a:r>
+                    </a:p>
+                  </a:txBody>
+                  <a:tcPr marL="54864" marR="54864" marT="27432" marB="27432" anchor="ctr">
+                    <a:solidFill>
+                      <a:srgbClr val="F5F7F9"/>
+                    </a:solidFill>
+                  </a:tcPr>
+                </a:tc>
+                <a:tc>
+                  <a:txBody>
+                    <a:bodyPr/>
+                    <a:lstStyle/>
+                    <a:p>
+                      <a:pPr>
+                        <a:defRPr sz="800" b="0">
+                          <a:solidFill>
+                            <a:srgbClr val="0D1117"/>
+                          </a:solidFill>
+                          <a:latin typeface="Inter"/>
+                        </a:defRPr>
+                      </a:pPr>
+                      <a:r>
+                        <a:rPr>
+                          <a:latin typeface="Inter"/>
+                        </a:rPr>
+                        <a:t>sha256:02bde3555a826680ac703dc2f2b89fbb093036a42c537ffa067590dde6b99d98</a:t>
+                      </a:r>
+                    </a:p>
+                  </a:txBody>
+                  <a:tcPr marL="54864" marR="54864" marT="27432" marB="27432" anchor="ctr">
+                    <a:solidFill>
+                      <a:srgbClr val="F5F7F9"/>
+                    </a:solidFill>
+                  </a:tcPr>
+                </a:tc>
+              </a:tr>
+              <a:tr h="368046">
+                <a:tc>
+                  <a:txBody>
+                    <a:bodyPr/>
+                    <a:lstStyle/>
+                    <a:p>
+                      <a:pPr>
+                        <a:defRPr sz="800" b="1">
+                          <a:solidFill>
+                            <a:srgbClr val="0D1117"/>
+                          </a:solidFill>
+                          <a:latin typeface="Inter"/>
+                        </a:defRPr>
+                      </a:pPr>
+                      <a:r>
+                        <a:rPr>
+                          <a:latin typeface="Inter"/>
+                        </a:rPr>
+                        <a:t>S5</a:t>
+                      </a:r>
+                    </a:p>
+                  </a:txBody>
+                  <a:tcPr marL="54864" marR="54864" marT="27432" marB="27432" anchor="ctr">
+                    <a:solidFill>
+                      <a:srgbClr val="FFFFFF"/>
+                    </a:solidFill>
+                  </a:tcPr>
+                </a:tc>
+                <a:tc>
+                  <a:txBody>
+                    <a:bodyPr/>
+                    <a:lstStyle/>
+                    <a:p>
+                      <a:pPr>
+                        <a:defRPr sz="800" b="0">
+                          <a:solidFill>
+                            <a:srgbClr val="0D1117"/>
+                          </a:solidFill>
+                          <a:latin typeface="Inter"/>
+                        </a:defRPr>
+                      </a:pPr>
+                      <a:r>
+                        <a:rPr>
+                          <a:latin typeface="Inter"/>
+                        </a:rPr>
+                        <a:t>sha256:ac6a4099593588f1ff12b41d56187683d45a4860c1d6b076ea601db88f9a9544</a:t>
+                      </a:r>
+                    </a:p>
+                  </a:txBody>
+                  <a:tcPr marL="54864" marR="54864" marT="27432" marB="27432" anchor="ctr">
+                    <a:solidFill>
+                      <a:srgbClr val="FFFFFF"/>
+                    </a:solidFill>
+                  </a:tcPr>
+                </a:tc>
+              </a:tr>
+              <a:tr h="368046">
+                <a:tc>
+                  <a:txBody>
+                    <a:bodyPr/>
+                    <a:lstStyle/>
+                    <a:p>
+                      <a:pPr>
+                        <a:defRPr sz="800" b="1">
+                          <a:solidFill>
+                            <a:srgbClr val="0D1117"/>
+                          </a:solidFill>
+                          <a:latin typeface="Inter"/>
+                        </a:defRPr>
+                      </a:pPr>
+                      <a:r>
+                        <a:rPr>
+                          <a:latin typeface="Inter"/>
+                        </a:rPr>
+                        <a:t>S6</a:t>
+                      </a:r>
+                    </a:p>
+                  </a:txBody>
+                  <a:tcPr marL="54864" marR="54864" marT="27432" marB="27432" anchor="ctr">
+                    <a:solidFill>
+                      <a:srgbClr val="F5F7F9"/>
+                    </a:solidFill>
+                  </a:tcPr>
+                </a:tc>
+                <a:tc>
+                  <a:txBody>
+                    <a:bodyPr/>
+                    <a:lstStyle/>
+                    <a:p>
+                      <a:pPr>
+                        <a:defRPr sz="800" b="0">
+                          <a:solidFill>
+                            <a:srgbClr val="0D1117"/>
+                          </a:solidFill>
+                          <a:latin typeface="Inter"/>
+                        </a:defRPr>
+                      </a:pPr>
+                      <a:r>
+                        <a:rPr>
+                          <a:latin typeface="Inter"/>
+                        </a:rPr>
+                        <a:t>sha256:92cdf7540064d7e561fae2a2b9b1cb371e49a0421b9ca8ccaf8d5ef73a6ed907</a:t>
+                      </a:r>
+                    </a:p>
+                  </a:txBody>
+                  <a:tcPr marL="54864" marR="54864" marT="27432" marB="27432" anchor="ctr">
+                    <a:solidFill>
+                      <a:srgbClr val="F5F7F9"/>
+                    </a:solidFill>
+                  </a:tcPr>
+                </a:tc>
+              </a:tr>
+              <a:tr h="368046">
+                <a:tc>
+                  <a:txBody>
+                    <a:bodyPr/>
+                    <a:lstStyle/>
+                    <a:p>
+                      <a:pPr>
+                        <a:defRPr sz="800" b="1">
+                          <a:solidFill>
+                            <a:srgbClr val="0D1117"/>
+                          </a:solidFill>
+                          <a:latin typeface="Inter"/>
+                        </a:defRPr>
+                      </a:pPr>
+                      <a:r>
+                        <a:rPr>
+                          <a:latin typeface="Inter"/>
+                        </a:rPr>
+                        <a:t>S7</a:t>
+                      </a:r>
+                    </a:p>
+                  </a:txBody>
+                  <a:tcPr marL="54864" marR="54864" marT="27432" marB="27432" anchor="ctr">
+                    <a:solidFill>
+                      <a:srgbClr val="FFFFFF"/>
+                    </a:solidFill>
+                  </a:tcPr>
+                </a:tc>
+                <a:tc>
+                  <a:txBody>
+                    <a:bodyPr/>
+                    <a:lstStyle/>
+                    <a:p>
+                      <a:pPr>
+                        <a:defRPr sz="800" b="0">
+                          <a:solidFill>
+                            <a:srgbClr val="0D1117"/>
+                          </a:solidFill>
+                          <a:latin typeface="Inter"/>
+                        </a:defRPr>
+                      </a:pPr>
+                      <a:r>
+                        <a:rPr>
+                          <a:latin typeface="Inter"/>
+                        </a:rPr>
+                        <a:t>sha256:3cb10846a6ea6eae69552d0fdba086d996c6b674c6e6c2c707ffd556f51bf50d</a:t>
+                      </a:r>
+                    </a:p>
+                  </a:txBody>
+                  <a:tcPr marL="54864" marR="54864" marT="27432" marB="27432" anchor="ctr">
+                    <a:solidFill>
+                      <a:srgbClr val="FFFFFF"/>
+                    </a:solidFill>
+                  </a:tcPr>
+                </a:tc>
+              </a:tr>
+              <a:tr h="368046">
+                <a:tc>
+                  <a:txBody>
+                    <a:bodyPr/>
+                    <a:lstStyle/>
+                    <a:p>
+                      <a:pPr>
+                        <a:defRPr sz="800" b="1">
+                          <a:solidFill>
+                            <a:srgbClr val="0D1117"/>
+                          </a:solidFill>
+                          <a:latin typeface="Inter"/>
+                        </a:defRPr>
+                      </a:pPr>
+                      <a:r>
+                        <a:rPr>
+                          <a:latin typeface="Inter"/>
+                        </a:rPr>
+                        <a:t>S8</a:t>
+                      </a:r>
+                    </a:p>
+                  </a:txBody>
+                  <a:tcPr marL="54864" marR="54864" marT="27432" marB="27432" anchor="ctr">
+                    <a:solidFill>
+                      <a:srgbClr val="F5F7F9"/>
+                    </a:solidFill>
+                  </a:tcPr>
+                </a:tc>
+                <a:tc>
+                  <a:txBody>
+                    <a:bodyPr/>
+                    <a:lstStyle/>
+                    <a:p>
+                      <a:pPr>
+                        <a:defRPr sz="800" b="0">
+                          <a:solidFill>
+                            <a:srgbClr val="0D1117"/>
+                          </a:solidFill>
+                          <a:latin typeface="Inter"/>
+                        </a:defRPr>
+                      </a:pPr>
+                      <a:r>
+                        <a:rPr>
+                          <a:latin typeface="Inter"/>
+                        </a:rPr>
+                        <a:t>sha256:052330f5bbf0bf07ded0648cdacf9f452a9be7aef933b86130551d39c5cd9236</a:t>
+                      </a:r>
+                    </a:p>
+                  </a:txBody>
+                  <a:tcPr marL="54864" marR="54864" marT="27432" marB="27432" anchor="ctr">
+                    <a:solidFill>
+                      <a:srgbClr val="F5F7F9"/>
+                    </a:solidFill>
+                  </a:tcPr>
+                </a:tc>
+              </a:tr>
+              <a:tr h="368046">
+                <a:tc>
+                  <a:txBody>
+                    <a:bodyPr/>
+                    <a:lstStyle/>
+                    <a:p>
+                      <a:pPr>
+                        <a:defRPr sz="800" b="1">
+                          <a:solidFill>
+                            <a:srgbClr val="0D1117"/>
+                          </a:solidFill>
+                          <a:latin typeface="Inter"/>
+                        </a:defRPr>
+                      </a:pPr>
+                      <a:r>
+                        <a:rPr>
+                          <a:latin typeface="Inter"/>
+                        </a:rPr>
+                        <a:t>S9</a:t>
+                      </a:r>
+                    </a:p>
+                  </a:txBody>
+                  <a:tcPr marL="54864" marR="54864" marT="27432" marB="27432" anchor="ctr">
+                    <a:solidFill>
+                      <a:srgbClr val="FFFFFF"/>
+                    </a:solidFill>
+                  </a:tcPr>
+                </a:tc>
+                <a:tc>
+                  <a:txBody>
+                    <a:bodyPr/>
+                    <a:lstStyle/>
+                    <a:p>
+                      <a:pPr>
+                        <a:defRPr sz="800" b="0">
+                          <a:solidFill>
+                            <a:srgbClr val="0D1117"/>
+                          </a:solidFill>
+                          <a:latin typeface="Inter"/>
+                        </a:defRPr>
+                      </a:pPr>
+                      <a:r>
+                        <a:rPr>
+                          <a:latin typeface="Inter"/>
+                        </a:rPr>
+                        <a:t>sha256:c5b2df526a01725ac3e9171b38b2b72687d5f5faa1864768ec4c3bc85ceeb816</a:t>
+                      </a:r>
+                    </a:p>
+                  </a:txBody>
+                  <a:tcPr marL="54864" marR="54864" marT="27432" marB="27432" anchor="ctr">
+                    <a:solidFill>
+                      <a:srgbClr val="FFFFFF"/>
+                    </a:solidFill>
+                  </a:tcPr>
+                </a:tc>
+              </a:tr>
+              <a:tr h="368046">
+                <a:tc>
+                  <a:txBody>
+                    <a:bodyPr/>
+                    <a:lstStyle/>
+                    <a:p>
+                      <a:pPr>
+                        <a:defRPr sz="800" b="1">
+                          <a:solidFill>
+                            <a:srgbClr val="0D1117"/>
+                          </a:solidFill>
+                          <a:latin typeface="Inter"/>
+                        </a:defRPr>
+                      </a:pPr>
+                      <a:r>
+                        <a:rPr>
+                          <a:latin typeface="Inter"/>
+                        </a:rPr>
+                        <a:t>S10</a:t>
+                      </a:r>
+                    </a:p>
+                  </a:txBody>
+                  <a:tcPr marL="54864" marR="54864" marT="27432" marB="27432" anchor="ctr">
+                    <a:solidFill>
+                      <a:srgbClr val="F5F7F9"/>
+                    </a:solidFill>
+                  </a:tcPr>
+                </a:tc>
+                <a:tc>
+                  <a:txBody>
+                    <a:bodyPr/>
+                    <a:lstStyle/>
+                    <a:p>
+                      <a:pPr>
+                        <a:defRPr sz="800" b="0">
+                          <a:solidFill>
+                            <a:srgbClr val="0D1117"/>
+                          </a:solidFill>
+                          <a:latin typeface="Inter"/>
+                        </a:defRPr>
+                      </a:pPr>
+                      <a:r>
+                        <a:rPr>
+                          <a:latin typeface="Inter"/>
+                        </a:rPr>
+                        <a:t>sha256:50e4d573d06639839dc345c94ef1e122c0380d0a1c5e1c5c7477c6e8715cb44f</a:t>
+                      </a:r>
+                    </a:p>
+                  </a:txBody>
+                  <a:tcPr marL="54864" marR="54864" marT="27432" marB="27432" anchor="ctr">
+                    <a:solidFill>
+                      <a:srgbClr val="F5F7F9"/>
+                    </a:solidFill>
+                  </a:tcPr>
+                </a:tc>
+              </a:tr>
+              <a:tr h="368046">
+                <a:tc>
+                  <a:txBody>
+                    <a:bodyPr/>
+                    <a:lstStyle/>
+                    <a:p>
+                      <a:pPr>
+                        <a:defRPr sz="800" b="1">
+                          <a:solidFill>
+                            <a:srgbClr val="0D1117"/>
+                          </a:solidFill>
+                          <a:latin typeface="Inter"/>
+                        </a:defRPr>
+                      </a:pPr>
+                      <a:r>
+                        <a:rPr>
+                          <a:latin typeface="Inter"/>
+                        </a:rPr>
+                        <a:t>S11</a:t>
+                      </a:r>
+                    </a:p>
+                  </a:txBody>
+                  <a:tcPr marL="54864" marR="54864" marT="27432" marB="27432" anchor="ctr">
+                    <a:solidFill>
+                      <a:srgbClr val="FFFFFF"/>
+                    </a:solidFill>
+                  </a:tcPr>
+                </a:tc>
+                <a:tc>
+                  <a:txBody>
+                    <a:bodyPr/>
+                    <a:lstStyle/>
+                    <a:p>
+                      <a:pPr>
+                        <a:defRPr sz="800" b="0">
+                          <a:solidFill>
+                            <a:srgbClr val="0D1117"/>
+                          </a:solidFill>
+                          <a:latin typeface="Inter"/>
+                        </a:defRPr>
+                      </a:pPr>
+                      <a:r>
+                        <a:rPr>
+                          <a:latin typeface="Inter"/>
+                        </a:rPr>
+                        <a:t>sha256:ac4c506efcb81b48fdc16e42bff6a13136fcc0a2b78fcad838a590e4fccee0ab</a:t>
+                      </a:r>
+                    </a:p>
+                  </a:txBody>
+                  <a:tcPr marL="54864" marR="54864" marT="27432" marB="27432" anchor="ctr">
+                    <a:solidFill>
+                      <a:srgbClr val="FFFFFF"/>
+                    </a:solidFill>
+                  </a:tcPr>
+                </a:tc>
+              </a:tr>
+            </a:tbl>
+          </a:graphicData>
+        </a:graphic>
+      </p:graphicFrame>
+      <p:sp>
+        <p:nvSpPr>
+          <p:cNvPr id="9" name="TextBox 8"/>
           <p:cNvSpPr txBox="1"/>
           <p:nvPr/>
         </p:nvSpPr>
         <p:spPr>
           <a:xfrm>
-            <a:off x="804671" y="1719072"/>
-            <a:ext cx="10616184" cy="4407408"/>
+            <a:off x="640080" y="6035040"/>
+            <a:ext cx="10908792" cy="164592"/>
           </a:xfrm>
           <a:prstGeom prst="rect">
             <a:avLst/>
@@ -15017,9 +13765,9 @@
               <a:spcAft>
                 <a:spcPts val="0"/>
               </a:spcAft>
-              <a:defRPr sz="950" b="0">
+              <a:defRPr sz="680" b="0">
                 <a:solidFill>
-                  <a:srgbClr val="4A5563"/>
+                  <a:srgbClr val="8A94A1"/>
                 </a:solidFill>
                 <a:latin typeface="Inter"/>
               </a:defRPr>
@@ -15028,14 +13776,14 @@
               <a:rPr>
                 <a:latin typeface="Inter"/>
               </a:rPr>
-              <a:t>Block type 'two_col' is not available in PowerPoint.</a:t>
+              <a:t>Data scope for every source: Illustrative sample data. Each digest is the SHA-256 fingerprint of the exact data the report used.</a:t>
             </a:r>
           </a:p>
         </p:txBody>
       </p:sp>
       <p:sp>
         <p:nvSpPr>
-          <p:cNvPr id="12" name="Rectangle 11"/>
+          <p:cNvPr id="10" name="Rectangle 9"/>
           <p:cNvSpPr/>
           <p:nvPr/>
         </p:nvSpPr>
@@ -15084,7 +13832,7 @@
       </p:sp>
       <p:sp>
         <p:nvSpPr>
-          <p:cNvPr id="13" name="TextBox 12"/>
+          <p:cNvPr id="11" name="TextBox 10"/>
           <p:cNvSpPr txBox="1"/>
           <p:nvPr/>
         </p:nvSpPr>
@@ -15119,14 +13867,14 @@
               <a:rPr>
                 <a:latin typeface="Inter"/>
               </a:rPr>
-              <a:t>Sources: S1 · S2 · S3 · S8 · S11</a:t>
+              <a:t>Sources: S1 · S2 · S3 · S4 · S5 · S6 · S7 · S8 · S9 · S10 · S11</a:t>
             </a:r>
           </a:p>
         </p:txBody>
       </p:sp>
       <p:sp>
         <p:nvSpPr>
-          <p:cNvPr id="14" name="TextBox 13"/>
+          <p:cNvPr id="12" name="TextBox 11"/>
           <p:cNvSpPr txBox="1"/>
           <p:nvPr/>
         </p:nvSpPr>
@@ -15168,7 +13916,7 @@
       </p:sp>
       <p:sp>
         <p:nvSpPr>
-          <p:cNvPr id="15" name="TextBox 14"/>
+          <p:cNvPr id="13" name="TextBox 12"/>
           <p:cNvSpPr txBox="1"/>
           <p:nvPr/>
         </p:nvSpPr>
@@ -15283,48 +14031,6 @@
         </p:nvSpPr>
         <p:spPr>
           <a:xfrm>
-            <a:off x="5897880" y="310896"/>
-            <a:ext cx="4800600" cy="256032"/>
-          </a:xfrm>
-          <a:prstGeom prst="rect">
-            <a:avLst/>
-          </a:prstGeom>
-          <a:noFill/>
-        </p:spPr>
-        <p:txBody>
-          <a:bodyPr wrap="none" lIns="9144" rIns="9144" tIns="9144" bIns="9144" anchor="t">
-            <a:spAutoFit/>
-          </a:bodyPr>
-          <a:lstStyle/>
-          <a:p>
-            <a:pPr algn="r">
-              <a:spcAft>
-                <a:spcPts val="0"/>
-              </a:spcAft>
-              <a:defRPr sz="680" b="1">
-                <a:solidFill>
-                  <a:srgbClr val="4F6B00"/>
-                </a:solidFill>
-                <a:latin typeface="Inter"/>
-              </a:defRPr>
-            </a:pPr>
-            <a:r>
-              <a:rPr>
-                <a:latin typeface="Inter"/>
-              </a:rPr>
-              <a:t>Illustrative, Gradient Maintained — demo data, not the client's holdings or managers</a:t>
-            </a:r>
-          </a:p>
-        </p:txBody>
-      </p:sp>
-      <p:sp>
-        <p:nvSpPr>
-          <p:cNvPr id="4" name="TextBox 3"/>
-          <p:cNvSpPr txBox="1"/>
-          <p:nvPr/>
-        </p:nvSpPr>
-        <p:spPr>
-          <a:xfrm>
             <a:off x="640080" y="566928"/>
             <a:ext cx="10058400" cy="530352"/>
           </a:xfrm>
@@ -15361,7 +14067,7 @@
       </p:sp>
       <p:sp>
         <p:nvSpPr>
-          <p:cNvPr id="5" name="Rectangle 4"/>
+          <p:cNvPr id="4" name="Rectangle 3"/>
           <p:cNvSpPr/>
           <p:nvPr/>
         </p:nvSpPr>
@@ -15410,7 +14116,7 @@
       </p:sp>
       <p:sp>
         <p:nvSpPr>
-          <p:cNvPr id="6" name="Rectangle 5"/>
+          <p:cNvPr id="5" name="Rectangle 4"/>
           <p:cNvSpPr/>
           <p:nvPr/>
         </p:nvSpPr>
@@ -15459,7 +14165,7 @@
       </p:sp>
       <p:sp>
         <p:nvSpPr>
-          <p:cNvPr id="7" name="TextBox 6"/>
+          <p:cNvPr id="6" name="TextBox 5"/>
           <p:cNvSpPr txBox="1"/>
           <p:nvPr/>
         </p:nvSpPr>
@@ -15501,7 +14207,7 @@
       </p:sp>
       <p:sp>
         <p:nvSpPr>
-          <p:cNvPr id="8" name="Rectangle 7"/>
+          <p:cNvPr id="7" name="Rectangle 6"/>
           <p:cNvSpPr/>
           <p:nvPr/>
         </p:nvSpPr>
@@ -15550,7 +14256,7 @@
       </p:sp>
       <p:sp>
         <p:nvSpPr>
-          <p:cNvPr id="9" name="Rectangle 8"/>
+          <p:cNvPr id="8" name="Rectangle 7"/>
           <p:cNvSpPr/>
           <p:nvPr/>
         </p:nvSpPr>
@@ -15558,6 +14264,423 @@
           <a:xfrm>
             <a:off x="640080" y="1325880"/>
             <a:ext cx="54864" cy="4892040"/>
+          </a:xfrm>
+          <a:prstGeom prst="rect">
+            <a:avLst/>
+          </a:prstGeom>
+          <a:solidFill>
+            <a:srgbClr val="F2A93B"/>
+          </a:solidFill>
+          <a:ln>
+            <a:solidFill>
+              <a:srgbClr val="F2A93B"/>
+            </a:solidFill>
+          </a:ln>
+        </p:spPr>
+        <p:style>
+          <a:lnRef idx="1">
+            <a:schemeClr val="accent1"/>
+          </a:lnRef>
+          <a:fillRef idx="3">
+            <a:schemeClr val="accent1"/>
+          </a:fillRef>
+          <a:effectRef idx="2">
+            <a:schemeClr val="accent1"/>
+          </a:effectRef>
+          <a:fontRef idx="minor">
+            <a:schemeClr val="lt1"/>
+          </a:fontRef>
+        </p:style>
+        <p:txBody>
+          <a:bodyPr rtlCol="0" anchor="ctr"/>
+          <a:lstStyle/>
+          <a:p>
+            <a:pPr algn="ctr">
+              <a:defRPr>
+                <a:latin typeface="Inter"/>
+              </a:defRPr>
+            </a:pPr>
+          </a:p>
+        </p:txBody>
+      </p:sp>
+      <p:sp>
+        <p:nvSpPr>
+          <p:cNvPr id="9" name="TextBox 8"/>
+          <p:cNvSpPr txBox="1"/>
+          <p:nvPr/>
+        </p:nvSpPr>
+        <p:spPr>
+          <a:xfrm>
+            <a:off x="804671" y="1435607"/>
+            <a:ext cx="10616184" cy="228600"/>
+          </a:xfrm>
+          <a:prstGeom prst="rect">
+            <a:avLst/>
+          </a:prstGeom>
+          <a:noFill/>
+        </p:spPr>
+        <p:txBody>
+          <a:bodyPr wrap="none" lIns="9144" rIns="9144" tIns="9144" bIns="9144" anchor="t">
+            <a:spAutoFit/>
+          </a:bodyPr>
+          <a:lstStyle/>
+          <a:p>
+            <a:pPr algn="l">
+              <a:spcAft>
+                <a:spcPts val="0"/>
+              </a:spcAft>
+              <a:defRPr sz="1000" b="1">
+                <a:solidFill>
+                  <a:srgbClr val="0D1117"/>
+                </a:solidFill>
+                <a:latin typeface="Inter"/>
+              </a:defRPr>
+            </a:pPr>
+            <a:r>
+              <a:rPr>
+                <a:latin typeface="Inter"/>
+              </a:rPr>
+              <a:t>Unsupported block</a:t>
+            </a:r>
+          </a:p>
+        </p:txBody>
+      </p:sp>
+      <p:sp>
+        <p:nvSpPr>
+          <p:cNvPr id="10" name="TextBox 9"/>
+          <p:cNvSpPr txBox="1"/>
+          <p:nvPr/>
+        </p:nvSpPr>
+        <p:spPr>
+          <a:xfrm>
+            <a:off x="804671" y="1719072"/>
+            <a:ext cx="10616184" cy="4407408"/>
+          </a:xfrm>
+          <a:prstGeom prst="rect">
+            <a:avLst/>
+          </a:prstGeom>
+          <a:noFill/>
+        </p:spPr>
+        <p:txBody>
+          <a:bodyPr wrap="none" lIns="9144" rIns="9144" tIns="9144" bIns="9144" anchor="t">
+            <a:spAutoFit/>
+          </a:bodyPr>
+          <a:lstStyle/>
+          <a:p>
+            <a:pPr algn="l">
+              <a:spcAft>
+                <a:spcPts val="0"/>
+              </a:spcAft>
+              <a:defRPr sz="950" b="0">
+                <a:solidFill>
+                  <a:srgbClr val="4A5563"/>
+                </a:solidFill>
+                <a:latin typeface="Inter"/>
+              </a:defRPr>
+            </a:pPr>
+            <a:r>
+              <a:rPr>
+                <a:latin typeface="Inter"/>
+              </a:rPr>
+              <a:t>Block type 'two_col' is not available in PowerPoint.</a:t>
+            </a:r>
+          </a:p>
+        </p:txBody>
+      </p:sp>
+      <p:sp>
+        <p:nvSpPr>
+          <p:cNvPr id="11" name="Rectangle 10"/>
+          <p:cNvSpPr/>
+          <p:nvPr/>
+        </p:nvSpPr>
+        <p:spPr>
+          <a:xfrm>
+            <a:off x="640080" y="6446520"/>
+            <a:ext cx="10908792" cy="9144"/>
+          </a:xfrm>
+          <a:prstGeom prst="rect">
+            <a:avLst/>
+          </a:prstGeom>
+          <a:solidFill>
+            <a:srgbClr val="E3E7EC"/>
+          </a:solidFill>
+          <a:ln>
+            <a:solidFill>
+              <a:srgbClr val="E3E7EC"/>
+            </a:solidFill>
+          </a:ln>
+        </p:spPr>
+        <p:style>
+          <a:lnRef idx="1">
+            <a:schemeClr val="accent1"/>
+          </a:lnRef>
+          <a:fillRef idx="3">
+            <a:schemeClr val="accent1"/>
+          </a:fillRef>
+          <a:effectRef idx="2">
+            <a:schemeClr val="accent1"/>
+          </a:effectRef>
+          <a:fontRef idx="minor">
+            <a:schemeClr val="lt1"/>
+          </a:fontRef>
+        </p:style>
+        <p:txBody>
+          <a:bodyPr rtlCol="0" anchor="ctr"/>
+          <a:lstStyle/>
+          <a:p>
+            <a:pPr algn="ctr">
+              <a:defRPr>
+                <a:latin typeface="Inter"/>
+              </a:defRPr>
+            </a:pPr>
+          </a:p>
+        </p:txBody>
+      </p:sp>
+      <p:sp>
+        <p:nvSpPr>
+          <p:cNvPr id="12" name="TextBox 11"/>
+          <p:cNvSpPr txBox="1"/>
+          <p:nvPr/>
+        </p:nvSpPr>
+        <p:spPr>
+          <a:xfrm>
+            <a:off x="640080" y="6501384"/>
+            <a:ext cx="4297680" cy="146304"/>
+          </a:xfrm>
+          <a:prstGeom prst="rect">
+            <a:avLst/>
+          </a:prstGeom>
+          <a:noFill/>
+        </p:spPr>
+        <p:txBody>
+          <a:bodyPr wrap="none" lIns="9144" rIns="9144" tIns="9144" bIns="9144" anchor="t">
+            <a:spAutoFit/>
+          </a:bodyPr>
+          <a:lstStyle/>
+          <a:p>
+            <a:pPr algn="l">
+              <a:spcAft>
+                <a:spcPts val="0"/>
+              </a:spcAft>
+              <a:defRPr sz="650" b="0">
+                <a:solidFill>
+                  <a:srgbClr val="8A94A1"/>
+                </a:solidFill>
+                <a:latin typeface="Inter"/>
+              </a:defRPr>
+            </a:pPr>
+            <a:r>
+              <a:rPr>
+                <a:latin typeface="Inter"/>
+              </a:rPr>
+              <a:t>Sources: S1 · S2 · S3 · S8 · S11</a:t>
+            </a:r>
+          </a:p>
+        </p:txBody>
+      </p:sp>
+      <p:sp>
+        <p:nvSpPr>
+          <p:cNvPr id="13" name="TextBox 12"/>
+          <p:cNvSpPr txBox="1"/>
+          <p:nvPr/>
+        </p:nvSpPr>
+        <p:spPr>
+          <a:xfrm>
+            <a:off x="4480560" y="6501384"/>
+            <a:ext cx="5303520" cy="146304"/>
+          </a:xfrm>
+          <a:prstGeom prst="rect">
+            <a:avLst/>
+          </a:prstGeom>
+          <a:noFill/>
+        </p:spPr>
+        <p:txBody>
+          <a:bodyPr wrap="none" lIns="9144" rIns="9144" tIns="9144" bIns="9144" anchor="t">
+            <a:spAutoFit/>
+          </a:bodyPr>
+          <a:lstStyle/>
+          <a:p>
+            <a:pPr algn="ctr">
+              <a:spcAft>
+                <a:spcPts val="0"/>
+              </a:spcAft>
+              <a:defRPr sz="650" b="0">
+                <a:solidFill>
+                  <a:srgbClr val="8A94A1"/>
+                </a:solidFill>
+                <a:latin typeface="Inter"/>
+              </a:defRPr>
+            </a:pPr>
+            <a:r>
+              <a:rPr>
+                <a:latin typeface="Inter"/>
+              </a:rPr>
+              <a:t>Confidential — manager diligence review · Data as of 2026-10-01 (Form ADV); 2026-06-30 (Form 13F)</a:t>
+            </a:r>
+          </a:p>
+        </p:txBody>
+      </p:sp>
+      <p:sp>
+        <p:nvSpPr>
+          <p:cNvPr id="14" name="TextBox 13"/>
+          <p:cNvSpPr txBox="1"/>
+          <p:nvPr/>
+        </p:nvSpPr>
+        <p:spPr>
+          <a:xfrm>
+            <a:off x="10287000" y="6501384"/>
+            <a:ext cx="1261872" cy="146304"/>
+          </a:xfrm>
+          <a:prstGeom prst="rect">
+            <a:avLst/>
+          </a:prstGeom>
+          <a:noFill/>
+        </p:spPr>
+        <p:txBody>
+          <a:bodyPr wrap="none" lIns="9144" rIns="9144" tIns="9144" bIns="9144" anchor="t">
+            <a:spAutoFit/>
+          </a:bodyPr>
+          <a:lstStyle/>
+          <a:p>
+            <a:pPr algn="r">
+              <a:spcAft>
+                <a:spcPts val="0"/>
+              </a:spcAft>
+              <a:defRPr sz="650" b="0">
+                <a:solidFill>
+                  <a:srgbClr val="8A94A1"/>
+                </a:solidFill>
+                <a:latin typeface="Inter"/>
+              </a:defRPr>
+            </a:pPr>
+            <a:r>
+              <a:rPr>
+                <a:latin typeface="Inter"/>
+              </a:rPr>
+              <a:t>16</a:t>
+            </a:r>
+          </a:p>
+        </p:txBody>
+      </p:sp>
+    </p:spTree>
+  </p:cSld>
+  <p:clrMapOvr>
+    <a:masterClrMapping/>
+  </p:clrMapOvr>
+</p:sld>
+</file>
+
+<file path=ppt/slides/slide17.xml><?xml version="1.0" encoding="utf-8"?>
+<p:sld xmlns:a="http://schemas.openxmlformats.org/drawingml/2006/main" xmlns:p="http://schemas.openxmlformats.org/presentationml/2006/main" xmlns:r="http://schemas.openxmlformats.org/officeDocument/2006/relationships">
+  <p:cSld>
+    <p:spTree>
+      <p:nvGrpSpPr>
+        <p:cNvPr id="1" name=""/>
+        <p:cNvGrpSpPr/>
+        <p:nvPr/>
+      </p:nvGrpSpPr>
+      <p:grpSpPr/>
+      <p:sp>
+        <p:nvSpPr>
+          <p:cNvPr id="2" name="Rectangle 1"/>
+          <p:cNvSpPr/>
+          <p:nvPr/>
+        </p:nvSpPr>
+        <p:spPr>
+          <a:xfrm>
+            <a:off x="0" y="0"/>
+            <a:ext cx="12191695" cy="6858000"/>
+          </a:xfrm>
+          <a:prstGeom prst="rect">
+            <a:avLst/>
+          </a:prstGeom>
+          <a:solidFill>
+            <a:srgbClr val="FFFFFF"/>
+          </a:solidFill>
+          <a:ln>
+            <a:solidFill>
+              <a:srgbClr val="FFFFFF"/>
+            </a:solidFill>
+          </a:ln>
+        </p:spPr>
+        <p:style>
+          <a:lnRef idx="1">
+            <a:schemeClr val="accent1"/>
+          </a:lnRef>
+          <a:fillRef idx="3">
+            <a:schemeClr val="accent1"/>
+          </a:fillRef>
+          <a:effectRef idx="2">
+            <a:schemeClr val="accent1"/>
+          </a:effectRef>
+          <a:fontRef idx="minor">
+            <a:schemeClr val="lt1"/>
+          </a:fontRef>
+        </p:style>
+        <p:txBody>
+          <a:bodyPr rtlCol="0" anchor="ctr"/>
+          <a:lstStyle/>
+          <a:p>
+            <a:pPr algn="ctr">
+              <a:defRPr>
+                <a:latin typeface="Inter"/>
+              </a:defRPr>
+            </a:pPr>
+          </a:p>
+        </p:txBody>
+      </p:sp>
+      <p:sp>
+        <p:nvSpPr>
+          <p:cNvPr id="3" name="TextBox 2"/>
+          <p:cNvSpPr txBox="1"/>
+          <p:nvPr/>
+        </p:nvSpPr>
+        <p:spPr>
+          <a:xfrm>
+            <a:off x="640080" y="566928"/>
+            <a:ext cx="10058400" cy="530352"/>
+          </a:xfrm>
+          <a:prstGeom prst="rect">
+            <a:avLst/>
+          </a:prstGeom>
+          <a:noFill/>
+        </p:spPr>
+        <p:txBody>
+          <a:bodyPr wrap="none" lIns="9144" rIns="9144" tIns="9144" bIns="9144" anchor="t">
+            <a:spAutoFit/>
+          </a:bodyPr>
+          <a:lstStyle/>
+          <a:p>
+            <a:pPr algn="l">
+              <a:spcAft>
+                <a:spcPts val="0"/>
+              </a:spcAft>
+              <a:defRPr sz="2300" b="1">
+                <a:solidFill>
+                  <a:srgbClr val="0D1117"/>
+                </a:solidFill>
+                <a:latin typeface="Inter"/>
+              </a:defRPr>
+            </a:pPr>
+            <a:r>
+              <a:rPr>
+                <a:latin typeface="Inter"/>
+              </a:rPr>
+              <a:t>Appendix — Sources and methods — continued</a:t>
+            </a:r>
+          </a:p>
+        </p:txBody>
+      </p:sp>
+      <p:sp>
+        <p:nvSpPr>
+          <p:cNvPr id="4" name="Rectangle 3"/>
+          <p:cNvSpPr/>
+          <p:nvPr/>
+        </p:nvSpPr>
+        <p:spPr>
+          <a:xfrm>
+            <a:off x="640080" y="1115568"/>
+            <a:ext cx="10908792" cy="18288"/>
           </a:xfrm>
           <a:prstGeom prst="rect">
             <a:avLst/>
@@ -15599,7 +14722,196 @@
       </p:sp>
       <p:sp>
         <p:nvSpPr>
-          <p:cNvPr id="10" name="TextBox 9"/>
+          <p:cNvPr id="5" name="Rectangle 4"/>
+          <p:cNvSpPr/>
+          <p:nvPr/>
+        </p:nvSpPr>
+        <p:spPr>
+          <a:xfrm>
+            <a:off x="11018520" y="502920"/>
+            <a:ext cx="530352" cy="393192"/>
+          </a:xfrm>
+          <a:prstGeom prst="rect">
+            <a:avLst/>
+          </a:prstGeom>
+          <a:solidFill>
+            <a:srgbClr val="9AA5B1"/>
+          </a:solidFill>
+          <a:ln>
+            <a:solidFill>
+              <a:srgbClr val="9AA5B1"/>
+            </a:solidFill>
+          </a:ln>
+        </p:spPr>
+        <p:style>
+          <a:lnRef idx="1">
+            <a:schemeClr val="accent1"/>
+          </a:lnRef>
+          <a:fillRef idx="3">
+            <a:schemeClr val="accent1"/>
+          </a:fillRef>
+          <a:effectRef idx="2">
+            <a:schemeClr val="accent1"/>
+          </a:effectRef>
+          <a:fontRef idx="minor">
+            <a:schemeClr val="lt1"/>
+          </a:fontRef>
+        </p:style>
+        <p:txBody>
+          <a:bodyPr rtlCol="0" anchor="ctr"/>
+          <a:lstStyle/>
+          <a:p>
+            <a:pPr algn="ctr">
+              <a:defRPr>
+                <a:latin typeface="Inter"/>
+              </a:defRPr>
+            </a:pPr>
+          </a:p>
+        </p:txBody>
+      </p:sp>
+      <p:sp>
+        <p:nvSpPr>
+          <p:cNvPr id="6" name="TextBox 5"/>
+          <p:cNvSpPr txBox="1"/>
+          <p:nvPr/>
+        </p:nvSpPr>
+        <p:spPr>
+          <a:xfrm>
+            <a:off x="11045952" y="557784"/>
+            <a:ext cx="475488" cy="182880"/>
+          </a:xfrm>
+          <a:prstGeom prst="rect">
+            <a:avLst/>
+          </a:prstGeom>
+          <a:noFill/>
+        </p:spPr>
+        <p:txBody>
+          <a:bodyPr wrap="none" lIns="9144" rIns="9144" tIns="9144" bIns="9144" anchor="t">
+            <a:spAutoFit/>
+          </a:bodyPr>
+          <a:lstStyle/>
+          <a:p>
+            <a:pPr algn="ctr">
+              <a:spcAft>
+                <a:spcPts val="0"/>
+              </a:spcAft>
+              <a:defRPr sz="1000" b="1">
+                <a:solidFill>
+                  <a:srgbClr val="0D1117"/>
+                </a:solidFill>
+                <a:latin typeface="Inter"/>
+              </a:defRPr>
+            </a:pPr>
+            <a:r>
+              <a:rPr>
+                <a:latin typeface="Inter"/>
+              </a:rPr>
+              <a:t>A</a:t>
+            </a:r>
+          </a:p>
+        </p:txBody>
+      </p:sp>
+      <p:sp>
+        <p:nvSpPr>
+          <p:cNvPr id="7" name="Rectangle 6"/>
+          <p:cNvSpPr/>
+          <p:nvPr/>
+        </p:nvSpPr>
+        <p:spPr>
+          <a:xfrm>
+            <a:off x="640080" y="1325880"/>
+            <a:ext cx="10908792" cy="4892040"/>
+          </a:xfrm>
+          <a:prstGeom prst="rect">
+            <a:avLst/>
+          </a:prstGeom>
+          <a:solidFill>
+            <a:srgbClr val="F5F7F9"/>
+          </a:solidFill>
+          <a:ln>
+            <a:solidFill>
+              <a:srgbClr val="E3E7EC"/>
+            </a:solidFill>
+          </a:ln>
+        </p:spPr>
+        <p:style>
+          <a:lnRef idx="1">
+            <a:schemeClr val="accent1"/>
+          </a:lnRef>
+          <a:fillRef idx="3">
+            <a:schemeClr val="accent1"/>
+          </a:fillRef>
+          <a:effectRef idx="2">
+            <a:schemeClr val="accent1"/>
+          </a:effectRef>
+          <a:fontRef idx="minor">
+            <a:schemeClr val="lt1"/>
+          </a:fontRef>
+        </p:style>
+        <p:txBody>
+          <a:bodyPr rtlCol="0" anchor="ctr"/>
+          <a:lstStyle/>
+          <a:p>
+            <a:pPr algn="ctr">
+              <a:defRPr>
+                <a:latin typeface="Inter"/>
+              </a:defRPr>
+            </a:pPr>
+          </a:p>
+        </p:txBody>
+      </p:sp>
+      <p:sp>
+        <p:nvSpPr>
+          <p:cNvPr id="8" name="Rectangle 7"/>
+          <p:cNvSpPr/>
+          <p:nvPr/>
+        </p:nvSpPr>
+        <p:spPr>
+          <a:xfrm>
+            <a:off x="640080" y="1325880"/>
+            <a:ext cx="54864" cy="4892040"/>
+          </a:xfrm>
+          <a:prstGeom prst="rect">
+            <a:avLst/>
+          </a:prstGeom>
+          <a:solidFill>
+            <a:srgbClr val="0D1117"/>
+          </a:solidFill>
+          <a:ln>
+            <a:solidFill>
+              <a:srgbClr val="0D1117"/>
+            </a:solidFill>
+          </a:ln>
+        </p:spPr>
+        <p:style>
+          <a:lnRef idx="1">
+            <a:schemeClr val="accent1"/>
+          </a:lnRef>
+          <a:fillRef idx="3">
+            <a:schemeClr val="accent1"/>
+          </a:fillRef>
+          <a:effectRef idx="2">
+            <a:schemeClr val="accent1"/>
+          </a:effectRef>
+          <a:fontRef idx="minor">
+            <a:schemeClr val="lt1"/>
+          </a:fontRef>
+        </p:style>
+        <p:txBody>
+          <a:bodyPr rtlCol="0" anchor="ctr"/>
+          <a:lstStyle/>
+          <a:p>
+            <a:pPr algn="ctr">
+              <a:defRPr>
+                <a:latin typeface="Inter"/>
+              </a:defRPr>
+            </a:pPr>
+          </a:p>
+        </p:txBody>
+      </p:sp>
+      <p:sp>
+        <p:nvSpPr>
+          <p:cNvPr id="9" name="TextBox 8"/>
           <p:cNvSpPr txBox="1"/>
           <p:nvPr/>
         </p:nvSpPr>
@@ -15641,7 +14953,7 @@
       </p:sp>
       <p:sp>
         <p:nvSpPr>
-          <p:cNvPr id="11" name="TextBox 10"/>
+          <p:cNvPr id="10" name="TextBox 9"/>
           <p:cNvSpPr txBox="1"/>
           <p:nvPr/>
         </p:nvSpPr>
@@ -15683,7 +14995,7 @@
       </p:sp>
       <p:sp>
         <p:nvSpPr>
-          <p:cNvPr id="12" name="Rectangle 11"/>
+          <p:cNvPr id="11" name="Rectangle 10"/>
           <p:cNvSpPr/>
           <p:nvPr/>
         </p:nvSpPr>
@@ -15732,7 +15044,7 @@
       </p:sp>
       <p:sp>
         <p:nvSpPr>
-          <p:cNvPr id="13" name="TextBox 12"/>
+          <p:cNvPr id="12" name="TextBox 11"/>
           <p:cNvSpPr txBox="1"/>
           <p:nvPr/>
         </p:nvSpPr>
@@ -15774,7 +15086,7 @@
       </p:sp>
       <p:sp>
         <p:nvSpPr>
-          <p:cNvPr id="14" name="TextBox 13"/>
+          <p:cNvPr id="13" name="TextBox 12"/>
           <p:cNvSpPr txBox="1"/>
           <p:nvPr/>
         </p:nvSpPr>
@@ -15816,7 +15128,7 @@
       </p:sp>
       <p:sp>
         <p:nvSpPr>
-          <p:cNvPr id="15" name="TextBox 14"/>
+          <p:cNvPr id="14" name="TextBox 13"/>
           <p:cNvSpPr txBox="1"/>
           <p:nvPr/>
         </p:nvSpPr>
@@ -15851,7 +15163,7 @@
               <a:rPr>
                 <a:latin typeface="Inter"/>
               </a:rPr>
-              <a:t>16</a:t>
+              <a:t>17</a:t>
             </a:r>
           </a:p>
         </p:txBody>
@@ -15932,7 +15244,7 @@
         <p:spPr>
           <a:xfrm>
             <a:off x="640080" y="329184"/>
-            <a:ext cx="5303520" cy="182880"/>
+            <a:ext cx="9875520" cy="182880"/>
           </a:xfrm>
           <a:prstGeom prst="rect">
             <a:avLst/>
@@ -15973,48 +15285,6 @@
         </p:nvSpPr>
         <p:spPr>
           <a:xfrm>
-            <a:off x="5897880" y="310896"/>
-            <a:ext cx="4800600" cy="256032"/>
-          </a:xfrm>
-          <a:prstGeom prst="rect">
-            <a:avLst/>
-          </a:prstGeom>
-          <a:noFill/>
-        </p:spPr>
-        <p:txBody>
-          <a:bodyPr wrap="none" lIns="9144" rIns="9144" tIns="9144" bIns="9144" anchor="t">
-            <a:spAutoFit/>
-          </a:bodyPr>
-          <a:lstStyle/>
-          <a:p>
-            <a:pPr algn="r">
-              <a:spcAft>
-                <a:spcPts val="0"/>
-              </a:spcAft>
-              <a:defRPr sz="680" b="1">
-                <a:solidFill>
-                  <a:srgbClr val="4F6B00"/>
-                </a:solidFill>
-                <a:latin typeface="Inter"/>
-              </a:defRPr>
-            </a:pPr>
-            <a:r>
-              <a:rPr>
-                <a:latin typeface="Inter"/>
-              </a:rPr>
-              <a:t>Illustrative, Gradient Maintained — demo data, not the client's holdings or managers</a:t>
-            </a:r>
-          </a:p>
-        </p:txBody>
-      </p:sp>
-      <p:sp>
-        <p:nvSpPr>
-          <p:cNvPr id="5" name="TextBox 4"/>
-          <p:cNvSpPr txBox="1"/>
-          <p:nvPr/>
-        </p:nvSpPr>
-        <p:spPr>
-          <a:xfrm>
             <a:off x="640080" y="566928"/>
             <a:ext cx="10058400" cy="530352"/>
           </a:xfrm>
@@ -16051,7 +15321,7 @@
       </p:sp>
       <p:sp>
         <p:nvSpPr>
-          <p:cNvPr id="6" name="Rectangle 5"/>
+          <p:cNvPr id="5" name="Rectangle 4"/>
           <p:cNvSpPr/>
           <p:nvPr/>
         </p:nvSpPr>
@@ -16100,7 +15370,7 @@
       </p:sp>
       <p:sp>
         <p:nvSpPr>
-          <p:cNvPr id="7" name="Rectangle 6"/>
+          <p:cNvPr id="6" name="Rectangle 5"/>
           <p:cNvSpPr/>
           <p:nvPr/>
         </p:nvSpPr>
@@ -16149,7 +15419,7 @@
       </p:sp>
       <p:sp>
         <p:nvSpPr>
-          <p:cNvPr id="8" name="TextBox 7"/>
+          <p:cNvPr id="7" name="TextBox 6"/>
           <p:cNvSpPr txBox="1"/>
           <p:nvPr/>
         </p:nvSpPr>
@@ -16191,14 +15461,105 @@
       </p:sp>
       <p:sp>
         <p:nvSpPr>
-          <p:cNvPr id="9" name="Rectangle 8"/>
+          <p:cNvPr id="8" name="Rectangle 7"/>
           <p:cNvSpPr/>
           <p:nvPr/>
         </p:nvSpPr>
         <p:spPr>
           <a:xfrm>
-            <a:off x="640080" y="1325880"/>
-            <a:ext cx="10908792" cy="2457792"/>
+            <a:off x="640080" y="1399032"/>
+            <a:ext cx="73152" cy="962366"/>
+          </a:xfrm>
+          <a:prstGeom prst="rect">
+            <a:avLst/>
+          </a:prstGeom>
+          <a:solidFill>
+            <a:srgbClr val="F2A93B"/>
+          </a:solidFill>
+          <a:ln>
+            <a:solidFill>
+              <a:srgbClr val="F2A93B"/>
+            </a:solidFill>
+          </a:ln>
+        </p:spPr>
+        <p:style>
+          <a:lnRef idx="1">
+            <a:schemeClr val="accent1"/>
+          </a:lnRef>
+          <a:fillRef idx="3">
+            <a:schemeClr val="accent1"/>
+          </a:fillRef>
+          <a:effectRef idx="2">
+            <a:schemeClr val="accent1"/>
+          </a:effectRef>
+          <a:fontRef idx="minor">
+            <a:schemeClr val="lt1"/>
+          </a:fontRef>
+        </p:style>
+        <p:txBody>
+          <a:bodyPr rtlCol="0" anchor="ctr"/>
+          <a:lstStyle/>
+          <a:p>
+            <a:pPr algn="ctr">
+              <a:defRPr>
+                <a:latin typeface="Inter"/>
+              </a:defRPr>
+            </a:pPr>
+          </a:p>
+        </p:txBody>
+      </p:sp>
+      <p:sp>
+        <p:nvSpPr>
+          <p:cNvPr id="9" name="TextBox 8"/>
+          <p:cNvSpPr txBox="1"/>
+          <p:nvPr/>
+        </p:nvSpPr>
+        <p:spPr>
+          <a:xfrm>
+            <a:off x="896112" y="1371600"/>
+            <a:ext cx="10588752" cy="643028"/>
+          </a:xfrm>
+          <a:prstGeom prst="rect">
+            <a:avLst/>
+          </a:prstGeom>
+          <a:noFill/>
+        </p:spPr>
+        <p:txBody>
+          <a:bodyPr wrap="none" lIns="9144" rIns="9144" tIns="9144" bIns="9144" anchor="t">
+            <a:spAutoFit/>
+          </a:bodyPr>
+          <a:lstStyle/>
+          <a:p>
+            <a:pPr algn="l">
+              <a:spcAft>
+                <a:spcPts val="0"/>
+              </a:spcAft>
+              <a:defRPr sz="1800" b="1">
+                <a:solidFill>
+                  <a:srgbClr val="0D1117"/>
+                </a:solidFill>
+                <a:latin typeface="Inter"/>
+              </a:defRPr>
+            </a:pPr>
+            <a:r>
+              <a:rPr>
+                <a:latin typeface="Inter"/>
+              </a:rPr>
+              <a:t>Two of three managers carry open flags</a:t>
+            </a:r>
+          </a:p>
+        </p:txBody>
+      </p:sp>
+      <p:sp>
+        <p:nvSpPr>
+          <p:cNvPr id="10" name="Rectangle 9"/>
+          <p:cNvSpPr/>
+          <p:nvPr/>
+        </p:nvSpPr>
+        <p:spPr>
+          <a:xfrm>
+            <a:off x="640080" y="2544278"/>
+            <a:ext cx="10908792" cy="1831615"/>
           </a:xfrm>
           <a:prstGeom prst="rect">
             <a:avLst/>
@@ -16240,14 +15601,14 @@
       </p:sp>
       <p:sp>
         <p:nvSpPr>
-          <p:cNvPr id="10" name="Rectangle 9"/>
+          <p:cNvPr id="11" name="Rectangle 10"/>
           <p:cNvSpPr/>
           <p:nvPr/>
         </p:nvSpPr>
         <p:spPr>
           <a:xfrm>
-            <a:off x="640080" y="1325880"/>
-            <a:ext cx="54864" cy="2457792"/>
+            <a:off x="640080" y="2544278"/>
+            <a:ext cx="54864" cy="1831615"/>
           </a:xfrm>
           <a:prstGeom prst="rect">
             <a:avLst/>
@@ -16289,13 +15650,13 @@
       </p:sp>
       <p:sp>
         <p:nvSpPr>
-          <p:cNvPr id="11" name="TextBox 10"/>
+          <p:cNvPr id="12" name="TextBox 11"/>
           <p:cNvSpPr txBox="1"/>
           <p:nvPr/>
         </p:nvSpPr>
         <p:spPr>
           <a:xfrm>
-            <a:off x="804671" y="1435607"/>
+            <a:off x="804671" y="2654006"/>
             <a:ext cx="10616184" cy="228600"/>
           </a:xfrm>
           <a:prstGeom prst="rect">
@@ -16331,14 +15692,14 @@
       </p:sp>
       <p:sp>
         <p:nvSpPr>
-          <p:cNvPr id="12" name="TextBox 11"/>
+          <p:cNvPr id="13" name="TextBox 12"/>
           <p:cNvSpPr txBox="1"/>
           <p:nvPr/>
         </p:nvSpPr>
         <p:spPr>
           <a:xfrm>
-            <a:off x="804671" y="1719072"/>
-            <a:ext cx="10616184" cy="1973160"/>
+            <a:off x="804671" y="2937470"/>
+            <a:ext cx="10616184" cy="1346983"/>
           </a:xfrm>
           <a:prstGeom prst="rect">
             <a:avLst/>
@@ -16373,14 +15734,14 @@
       </p:sp>
       <p:sp>
         <p:nvSpPr>
-          <p:cNvPr id="13" name="Rectangle 12"/>
+          <p:cNvPr id="14" name="Rectangle 13"/>
           <p:cNvSpPr/>
           <p:nvPr/>
         </p:nvSpPr>
         <p:spPr>
           <a:xfrm>
-            <a:off x="640080" y="3893400"/>
-            <a:ext cx="2644902" cy="2324519"/>
+            <a:off x="640080" y="4485622"/>
+            <a:ext cx="2644902" cy="1732297"/>
           </a:xfrm>
           <a:prstGeom prst="rect">
             <a:avLst/>
@@ -16422,13 +15783,13 @@
       </p:sp>
       <p:sp>
         <p:nvSpPr>
-          <p:cNvPr id="14" name="Rectangle 13"/>
+          <p:cNvPr id="15" name="Rectangle 14"/>
           <p:cNvSpPr/>
           <p:nvPr/>
         </p:nvSpPr>
         <p:spPr>
           <a:xfrm>
-            <a:off x="640080" y="3893400"/>
+            <a:off x="640080" y="4485622"/>
             <a:ext cx="2644902" cy="45720"/>
           </a:xfrm>
           <a:prstGeom prst="rect">
@@ -16471,13 +15832,13 @@
       </p:sp>
       <p:sp>
         <p:nvSpPr>
-          <p:cNvPr id="15" name="TextBox 14"/>
+          <p:cNvPr id="16" name="TextBox 15"/>
           <p:cNvSpPr txBox="1"/>
           <p:nvPr/>
         </p:nvSpPr>
         <p:spPr>
           <a:xfrm>
-            <a:off x="749808" y="4021416"/>
+            <a:off x="749808" y="4613638"/>
             <a:ext cx="2425446" cy="201168"/>
           </a:xfrm>
           <a:prstGeom prst="rect">
@@ -16513,13 +15874,13 @@
       </p:sp>
       <p:sp>
         <p:nvSpPr>
-          <p:cNvPr id="16" name="TextBox 15"/>
+          <p:cNvPr id="17" name="TextBox 16"/>
           <p:cNvSpPr txBox="1"/>
           <p:nvPr/>
         </p:nvSpPr>
         <p:spPr>
           <a:xfrm>
-            <a:off x="749808" y="4277448"/>
+            <a:off x="749808" y="4869670"/>
             <a:ext cx="2425446" cy="475488"/>
           </a:xfrm>
           <a:prstGeom prst="rect">
@@ -16555,7 +15916,7 @@
       </p:sp>
       <p:sp>
         <p:nvSpPr>
-          <p:cNvPr id="17" name="TextBox 16"/>
+          <p:cNvPr id="18" name="TextBox 17"/>
           <p:cNvSpPr txBox="1"/>
           <p:nvPr/>
         </p:nvSpPr>
@@ -16597,14 +15958,14 @@
       </p:sp>
       <p:sp>
         <p:nvSpPr>
-          <p:cNvPr id="18" name="Rectangle 17"/>
+          <p:cNvPr id="19" name="Rectangle 18"/>
           <p:cNvSpPr/>
           <p:nvPr/>
         </p:nvSpPr>
         <p:spPr>
           <a:xfrm>
-            <a:off x="3394710" y="3893400"/>
-            <a:ext cx="2644902" cy="2324519"/>
+            <a:off x="3394710" y="4485622"/>
+            <a:ext cx="2644902" cy="1732297"/>
           </a:xfrm>
           <a:prstGeom prst="rect">
             <a:avLst/>
@@ -16646,13 +16007,13 @@
       </p:sp>
       <p:sp>
         <p:nvSpPr>
-          <p:cNvPr id="19" name="Rectangle 18"/>
+          <p:cNvPr id="20" name="Rectangle 19"/>
           <p:cNvSpPr/>
           <p:nvPr/>
         </p:nvSpPr>
         <p:spPr>
           <a:xfrm>
-            <a:off x="3394710" y="3893400"/>
+            <a:off x="3394710" y="4485622"/>
             <a:ext cx="2644902" cy="45720"/>
           </a:xfrm>
           <a:prstGeom prst="rect">
@@ -16695,13 +16056,13 @@
       </p:sp>
       <p:sp>
         <p:nvSpPr>
-          <p:cNvPr id="20" name="TextBox 19"/>
+          <p:cNvPr id="21" name="TextBox 20"/>
           <p:cNvSpPr txBox="1"/>
           <p:nvPr/>
         </p:nvSpPr>
         <p:spPr>
           <a:xfrm>
-            <a:off x="3504438" y="4021416"/>
+            <a:off x="3504438" y="4613638"/>
             <a:ext cx="2425446" cy="201168"/>
           </a:xfrm>
           <a:prstGeom prst="rect">
@@ -16737,13 +16098,13 @@
       </p:sp>
       <p:sp>
         <p:nvSpPr>
-          <p:cNvPr id="21" name="TextBox 20"/>
+          <p:cNvPr id="22" name="TextBox 21"/>
           <p:cNvSpPr txBox="1"/>
           <p:nvPr/>
         </p:nvSpPr>
         <p:spPr>
           <a:xfrm>
-            <a:off x="3504438" y="4277448"/>
+            <a:off x="3504438" y="4869670"/>
             <a:ext cx="2425446" cy="475488"/>
           </a:xfrm>
           <a:prstGeom prst="rect">
@@ -16779,7 +16140,7 @@
       </p:sp>
       <p:sp>
         <p:nvSpPr>
-          <p:cNvPr id="22" name="TextBox 21"/>
+          <p:cNvPr id="23" name="TextBox 22"/>
           <p:cNvSpPr txBox="1"/>
           <p:nvPr/>
         </p:nvSpPr>
@@ -16821,14 +16182,14 @@
       </p:sp>
       <p:sp>
         <p:nvSpPr>
-          <p:cNvPr id="23" name="Rectangle 22"/>
+          <p:cNvPr id="24" name="Rectangle 23"/>
           <p:cNvSpPr/>
           <p:nvPr/>
         </p:nvSpPr>
         <p:spPr>
           <a:xfrm>
-            <a:off x="6149340" y="3893400"/>
-            <a:ext cx="2644902" cy="2324519"/>
+            <a:off x="6149340" y="4485622"/>
+            <a:ext cx="2644902" cy="1732297"/>
           </a:xfrm>
           <a:prstGeom prst="rect">
             <a:avLst/>
@@ -16870,13 +16231,13 @@
       </p:sp>
       <p:sp>
         <p:nvSpPr>
-          <p:cNvPr id="24" name="Rectangle 23"/>
+          <p:cNvPr id="25" name="Rectangle 24"/>
           <p:cNvSpPr/>
           <p:nvPr/>
         </p:nvSpPr>
         <p:spPr>
           <a:xfrm>
-            <a:off x="6149340" y="3893400"/>
+            <a:off x="6149340" y="4485622"/>
             <a:ext cx="2644902" cy="45720"/>
           </a:xfrm>
           <a:prstGeom prst="rect">
@@ -16919,13 +16280,13 @@
       </p:sp>
       <p:sp>
         <p:nvSpPr>
-          <p:cNvPr id="25" name="TextBox 24"/>
+          <p:cNvPr id="26" name="TextBox 25"/>
           <p:cNvSpPr txBox="1"/>
           <p:nvPr/>
         </p:nvSpPr>
         <p:spPr>
           <a:xfrm>
-            <a:off x="6259068" y="4021416"/>
+            <a:off x="6259068" y="4613638"/>
             <a:ext cx="2425446" cy="201168"/>
           </a:xfrm>
           <a:prstGeom prst="rect">
@@ -16961,13 +16322,13 @@
       </p:sp>
       <p:sp>
         <p:nvSpPr>
-          <p:cNvPr id="26" name="TextBox 25"/>
+          <p:cNvPr id="27" name="TextBox 26"/>
           <p:cNvSpPr txBox="1"/>
           <p:nvPr/>
         </p:nvSpPr>
         <p:spPr>
           <a:xfrm>
-            <a:off x="6259068" y="4277448"/>
+            <a:off x="6259068" y="4869670"/>
             <a:ext cx="2425446" cy="475488"/>
           </a:xfrm>
           <a:prstGeom prst="rect">
@@ -17003,7 +16364,7 @@
       </p:sp>
       <p:sp>
         <p:nvSpPr>
-          <p:cNvPr id="27" name="TextBox 26"/>
+          <p:cNvPr id="28" name="TextBox 27"/>
           <p:cNvSpPr txBox="1"/>
           <p:nvPr/>
         </p:nvSpPr>
@@ -17045,14 +16406,14 @@
       </p:sp>
       <p:sp>
         <p:nvSpPr>
-          <p:cNvPr id="28" name="Rectangle 27"/>
+          <p:cNvPr id="29" name="Rectangle 28"/>
           <p:cNvSpPr/>
           <p:nvPr/>
         </p:nvSpPr>
         <p:spPr>
           <a:xfrm>
-            <a:off x="8903970" y="3893400"/>
-            <a:ext cx="2644902" cy="2324519"/>
+            <a:off x="8903970" y="4485622"/>
+            <a:ext cx="2644902" cy="1732297"/>
           </a:xfrm>
           <a:prstGeom prst="rect">
             <a:avLst/>
@@ -17094,13 +16455,13 @@
       </p:sp>
       <p:sp>
         <p:nvSpPr>
-          <p:cNvPr id="29" name="Rectangle 28"/>
+          <p:cNvPr id="30" name="Rectangle 29"/>
           <p:cNvSpPr/>
           <p:nvPr/>
         </p:nvSpPr>
         <p:spPr>
           <a:xfrm>
-            <a:off x="8903970" y="3893400"/>
+            <a:off x="8903970" y="4485622"/>
             <a:ext cx="2644902" cy="45720"/>
           </a:xfrm>
           <a:prstGeom prst="rect">
@@ -17143,13 +16504,13 @@
       </p:sp>
       <p:sp>
         <p:nvSpPr>
-          <p:cNvPr id="30" name="TextBox 29"/>
+          <p:cNvPr id="31" name="TextBox 30"/>
           <p:cNvSpPr txBox="1"/>
           <p:nvPr/>
         </p:nvSpPr>
         <p:spPr>
           <a:xfrm>
-            <a:off x="9013698" y="4021416"/>
+            <a:off x="9013698" y="4613638"/>
             <a:ext cx="2425446" cy="201168"/>
           </a:xfrm>
           <a:prstGeom prst="rect">
@@ -17185,13 +16546,13 @@
       </p:sp>
       <p:sp>
         <p:nvSpPr>
-          <p:cNvPr id="31" name="TextBox 30"/>
+          <p:cNvPr id="32" name="TextBox 31"/>
           <p:cNvSpPr txBox="1"/>
           <p:nvPr/>
         </p:nvSpPr>
         <p:spPr>
           <a:xfrm>
-            <a:off x="9013698" y="4277448"/>
+            <a:off x="9013698" y="4869670"/>
             <a:ext cx="2425446" cy="475488"/>
           </a:xfrm>
           <a:prstGeom prst="rect">
@@ -17227,7 +16588,7 @@
       </p:sp>
       <p:sp>
         <p:nvSpPr>
-          <p:cNvPr id="32" name="TextBox 31"/>
+          <p:cNvPr id="33" name="TextBox 32"/>
           <p:cNvSpPr txBox="1"/>
           <p:nvPr/>
         </p:nvSpPr>
@@ -17269,7 +16630,7 @@
       </p:sp>
       <p:sp>
         <p:nvSpPr>
-          <p:cNvPr id="33" name="Rectangle 32"/>
+          <p:cNvPr id="34" name="Rectangle 33"/>
           <p:cNvSpPr/>
           <p:nvPr/>
         </p:nvSpPr>
@@ -17318,7 +16679,7 @@
       </p:sp>
       <p:sp>
         <p:nvSpPr>
-          <p:cNvPr id="34" name="TextBox 33"/>
+          <p:cNvPr id="35" name="TextBox 34"/>
           <p:cNvSpPr txBox="1"/>
           <p:nvPr/>
         </p:nvSpPr>
@@ -17360,7 +16721,7 @@
       </p:sp>
       <p:sp>
         <p:nvSpPr>
-          <p:cNvPr id="35" name="TextBox 34"/>
+          <p:cNvPr id="36" name="TextBox 35"/>
           <p:cNvSpPr txBox="1"/>
           <p:nvPr/>
         </p:nvSpPr>
@@ -17402,7 +16763,7 @@
       </p:sp>
       <p:sp>
         <p:nvSpPr>
-          <p:cNvPr id="36" name="TextBox 35"/>
+          <p:cNvPr id="37" name="TextBox 36"/>
           <p:cNvSpPr txBox="1"/>
           <p:nvPr/>
         </p:nvSpPr>
@@ -17518,7 +16879,7 @@
         <p:spPr>
           <a:xfrm>
             <a:off x="640080" y="329184"/>
-            <a:ext cx="5303520" cy="182880"/>
+            <a:ext cx="9875520" cy="182880"/>
           </a:xfrm>
           <a:prstGeom prst="rect">
             <a:avLst/>
@@ -17559,48 +16920,6 @@
         </p:nvSpPr>
         <p:spPr>
           <a:xfrm>
-            <a:off x="5897880" y="310896"/>
-            <a:ext cx="4800600" cy="256032"/>
-          </a:xfrm>
-          <a:prstGeom prst="rect">
-            <a:avLst/>
-          </a:prstGeom>
-          <a:noFill/>
-        </p:spPr>
-        <p:txBody>
-          <a:bodyPr wrap="none" lIns="9144" rIns="9144" tIns="9144" bIns="9144" anchor="t">
-            <a:spAutoFit/>
-          </a:bodyPr>
-          <a:lstStyle/>
-          <a:p>
-            <a:pPr algn="r">
-              <a:spcAft>
-                <a:spcPts val="0"/>
-              </a:spcAft>
-              <a:defRPr sz="680" b="1">
-                <a:solidFill>
-                  <a:srgbClr val="4F6B00"/>
-                </a:solidFill>
-                <a:latin typeface="Inter"/>
-              </a:defRPr>
-            </a:pPr>
-            <a:r>
-              <a:rPr>
-                <a:latin typeface="Inter"/>
-              </a:rPr>
-              <a:t>Illustrative, Gradient Maintained — demo data, not the client's holdings or managers</a:t>
-            </a:r>
-          </a:p>
-        </p:txBody>
-      </p:sp>
-      <p:sp>
-        <p:nvSpPr>
-          <p:cNvPr id="5" name="TextBox 4"/>
-          <p:cNvSpPr txBox="1"/>
-          <p:nvPr/>
-        </p:nvSpPr>
-        <p:spPr>
-          <a:xfrm>
             <a:off x="640080" y="566928"/>
             <a:ext cx="10058400" cy="530352"/>
           </a:xfrm>
@@ -17637,7 +16956,7 @@
       </p:sp>
       <p:sp>
         <p:nvSpPr>
-          <p:cNvPr id="6" name="Rectangle 5"/>
+          <p:cNvPr id="5" name="Rectangle 4"/>
           <p:cNvSpPr/>
           <p:nvPr/>
         </p:nvSpPr>
@@ -17686,7 +17005,7 @@
       </p:sp>
       <p:sp>
         <p:nvSpPr>
-          <p:cNvPr id="7" name="Rectangle 6"/>
+          <p:cNvPr id="6" name="Rectangle 5"/>
           <p:cNvSpPr/>
           <p:nvPr/>
         </p:nvSpPr>
@@ -17735,7 +17054,7 @@
       </p:sp>
       <p:sp>
         <p:nvSpPr>
-          <p:cNvPr id="8" name="TextBox 7"/>
+          <p:cNvPr id="7" name="TextBox 6"/>
           <p:cNvSpPr txBox="1"/>
           <p:nvPr/>
         </p:nvSpPr>
@@ -17777,7 +17096,7 @@
       </p:sp>
       <p:sp>
         <p:nvSpPr>
-          <p:cNvPr id="9" name="TextBox 8"/>
+          <p:cNvPr id="8" name="TextBox 7"/>
           <p:cNvSpPr txBox="1"/>
           <p:nvPr/>
         </p:nvSpPr>
@@ -17819,7 +17138,7 @@
       </p:sp>
       <p:graphicFrame>
         <p:nvGraphicFramePr>
-          <p:cNvPr id="10" name="Table 9"/>
+          <p:cNvPr id="9" name="Table 8"/>
           <p:cNvGraphicFramePr>
             <a:graphicFrameLocks noGrp="1"/>
           </p:cNvGraphicFramePr>
@@ -17827,7 +17146,7 @@
         </p:nvGraphicFramePr>
         <p:xfrm>
           <a:off x="640080" y="1600200"/>
-          <a:ext cx="10908792" cy="1034775"/>
+          <a:ext cx="10908792" cy="1100535"/>
         </p:xfrm>
         <a:graphic>
           <a:graphicData uri="http://schemas.openxmlformats.org/drawingml/2006/table">
@@ -17842,7 +17161,7 @@
                 <a:gridCol w="2224278"/>
                 <a:gridCol w="2224278"/>
               </a:tblGrid>
-              <a:tr h="258693">
+              <a:tr h="275133">
                 <a:tc>
                   <a:txBody>
                     <a:bodyPr/>
@@ -17979,7 +17298,7 @@
                   </a:tcPr>
                 </a:tc>
               </a:tr>
-              <a:tr h="258693">
+              <a:tr h="275133">
                 <a:tc>
                   <a:txBody>
                     <a:bodyPr/>
@@ -18116,7 +17435,7 @@
                   </a:tcPr>
                 </a:tc>
               </a:tr>
-              <a:tr h="258693">
+              <a:tr h="275133">
                 <a:tc>
                   <a:txBody>
                     <a:bodyPr/>
@@ -18253,7 +17572,7 @@
                   </a:tcPr>
                 </a:tc>
               </a:tr>
-              <a:tr h="258696">
+              <a:tr h="275136">
                 <a:tc>
                   <a:txBody>
                     <a:bodyPr/>
@@ -18396,13 +17715,13 @@
       </p:graphicFrame>
       <p:sp>
         <p:nvSpPr>
-          <p:cNvPr id="11" name="TextBox 10"/>
+          <p:cNvPr id="10" name="TextBox 9"/>
           <p:cNvSpPr txBox="1"/>
           <p:nvPr/>
         </p:nvSpPr>
         <p:spPr>
           <a:xfrm>
-            <a:off x="640080" y="2653263"/>
+            <a:off x="640080" y="2719023"/>
             <a:ext cx="10908792" cy="164592"/>
           </a:xfrm>
           <a:prstGeom prst="rect">
@@ -18438,14 +17757,14 @@
       </p:sp>
       <p:sp>
         <p:nvSpPr>
-          <p:cNvPr id="12" name="Rectangle 11"/>
+          <p:cNvPr id="11" name="Rectangle 10"/>
           <p:cNvSpPr/>
           <p:nvPr/>
         </p:nvSpPr>
         <p:spPr>
           <a:xfrm>
-            <a:off x="640080" y="2945871"/>
-            <a:ext cx="10908792" cy="1080992"/>
+            <a:off x="640080" y="3011631"/>
+            <a:ext cx="10908792" cy="1128061"/>
           </a:xfrm>
           <a:prstGeom prst="rect">
             <a:avLst/>
@@ -18487,14 +17806,14 @@
       </p:sp>
       <p:sp>
         <p:nvSpPr>
-          <p:cNvPr id="13" name="Rectangle 12"/>
+          <p:cNvPr id="12" name="Rectangle 11"/>
           <p:cNvSpPr/>
           <p:nvPr/>
         </p:nvSpPr>
         <p:spPr>
           <a:xfrm>
-            <a:off x="640080" y="2945871"/>
-            <a:ext cx="54864" cy="1080992"/>
+            <a:off x="640080" y="3011631"/>
+            <a:ext cx="54864" cy="1128061"/>
           </a:xfrm>
           <a:prstGeom prst="rect">
             <a:avLst/>
@@ -18536,13 +17855,13 @@
       </p:sp>
       <p:sp>
         <p:nvSpPr>
-          <p:cNvPr id="14" name="TextBox 13"/>
+          <p:cNvPr id="13" name="TextBox 12"/>
           <p:cNvSpPr txBox="1"/>
           <p:nvPr/>
         </p:nvSpPr>
         <p:spPr>
           <a:xfrm>
-            <a:off x="804671" y="3055599"/>
+            <a:off x="804671" y="3121359"/>
             <a:ext cx="10616184" cy="228600"/>
           </a:xfrm>
           <a:prstGeom prst="rect">
@@ -18571,21 +17890,21 @@
               <a:rPr>
                 <a:latin typeface="Inter"/>
               </a:rPr>
-              <a:t>Key judgment — headline signal</a:t>
+              <a:t>Key judgment — Open flags</a:t>
             </a:r>
           </a:p>
         </p:txBody>
       </p:sp>
       <p:sp>
         <p:nvSpPr>
-          <p:cNvPr id="15" name="TextBox 14"/>
+          <p:cNvPr id="14" name="TextBox 13"/>
           <p:cNvSpPr txBox="1"/>
           <p:nvPr/>
         </p:nvSpPr>
         <p:spPr>
           <a:xfrm>
-            <a:off x="804671" y="3339063"/>
-            <a:ext cx="10616184" cy="596360"/>
+            <a:off x="804671" y="3404823"/>
+            <a:ext cx="10616184" cy="643429"/>
           </a:xfrm>
           <a:prstGeom prst="rect">
             <a:avLst/>
@@ -18613,21 +17932,21 @@
               <a:rPr>
                 <a:latin typeface="Inter"/>
               </a:rPr>
-              <a:t>Observation: The sample report carries a 2 of 3 managers with flags signal [S1]. Why it matters: This signal focuses oversight on the report's most decision-relevant condition. Uncertainty: Evidence coverage may exclude newer or more detailed observations. What would change the view: A governed refresh showing a different signal or breached threshold.</a:t>
+              <a:t>Observation: Two of the three managers carry open flags; only Northfield is clean [S1]. Why it matters: Flags must be resolved or accepted before either flagged manager advances. Uncertainty: Flags reflect filings to 2026-10-01 and may lag recent changes. What would change the view: A filing or diligence response that closes the medium-severity flags.</a:t>
             </a:r>
           </a:p>
         </p:txBody>
       </p:sp>
       <p:sp>
         <p:nvSpPr>
-          <p:cNvPr id="16" name="Rectangle 15"/>
+          <p:cNvPr id="15" name="Rectangle 14"/>
           <p:cNvSpPr/>
           <p:nvPr/>
         </p:nvSpPr>
         <p:spPr>
           <a:xfrm>
-            <a:off x="640080" y="4136592"/>
-            <a:ext cx="10908792" cy="890606"/>
+            <a:off x="640080" y="4249421"/>
+            <a:ext cx="10908792" cy="929385"/>
           </a:xfrm>
           <a:prstGeom prst="rect">
             <a:avLst/>
@@ -18669,14 +17988,14 @@
       </p:sp>
       <p:sp>
         <p:nvSpPr>
-          <p:cNvPr id="17" name="Rectangle 16"/>
+          <p:cNvPr id="16" name="Rectangle 15"/>
           <p:cNvSpPr/>
           <p:nvPr/>
         </p:nvSpPr>
         <p:spPr>
           <a:xfrm>
-            <a:off x="640080" y="4136592"/>
-            <a:ext cx="54864" cy="890606"/>
+            <a:off x="640080" y="4249421"/>
+            <a:ext cx="54864" cy="929385"/>
           </a:xfrm>
           <a:prstGeom prst="rect">
             <a:avLst/>
@@ -18718,13 +18037,13 @@
       </p:sp>
       <p:sp>
         <p:nvSpPr>
-          <p:cNvPr id="18" name="TextBox 17"/>
+          <p:cNvPr id="17" name="TextBox 16"/>
           <p:cNvSpPr txBox="1"/>
           <p:nvPr/>
         </p:nvSpPr>
         <p:spPr>
           <a:xfrm>
-            <a:off x="804671" y="4246320"/>
+            <a:off x="804671" y="4359149"/>
             <a:ext cx="10616184" cy="228600"/>
           </a:xfrm>
           <a:prstGeom prst="rect">
@@ -18753,21 +18072,21 @@
               <a:rPr>
                 <a:latin typeface="Inter"/>
               </a:rPr>
-              <a:t>Key judgment — primary measure</a:t>
+              <a:t>Key judgment — Field size</a:t>
             </a:r>
           </a:p>
         </p:txBody>
       </p:sp>
       <p:sp>
         <p:nvSpPr>
-          <p:cNvPr id="19" name="TextBox 18"/>
+          <p:cNvPr id="18" name="TextBox 17"/>
           <p:cNvSpPr txBox="1"/>
           <p:nvPr/>
         </p:nvSpPr>
         <p:spPr>
           <a:xfrm>
-            <a:off x="804671" y="4529784"/>
-            <a:ext cx="10616184" cy="405974"/>
+            <a:off x="804671" y="4642613"/>
+            <a:ext cx="10616184" cy="444753"/>
           </a:xfrm>
           <a:prstGeom prst="rect">
             <a:avLst/>
@@ -18795,21 +18114,21 @@
               <a:rPr>
                 <a:latin typeface="Inter"/>
               </a:rPr>
-              <a:t>Observation: Managers compared is 3 in the review evidence [S2]. Why it matters: This measure establishes the baseline for comparing later governed results. Uncertainty: The source basis may omit newer observations outside the reviewed evidence. What would change the view: A refreshed source report showing a change above 1%.</a:t>
+              <a:t>Observation: Three managers are compared on the same mandate [S2]. Why it matters: A three-way field keeps a credible alternative if one candidate drops out. Uncertainty: Strategy fit beyond the filings is not assessed here. What would change the view: A fourth candidate or a mandate change.</a:t>
             </a:r>
           </a:p>
         </p:txBody>
       </p:sp>
       <p:sp>
         <p:nvSpPr>
-          <p:cNvPr id="20" name="Rectangle 19"/>
+          <p:cNvPr id="19" name="Rectangle 18"/>
           <p:cNvSpPr/>
           <p:nvPr/>
         </p:nvSpPr>
         <p:spPr>
           <a:xfrm>
-            <a:off x="640080" y="5136927"/>
-            <a:ext cx="10908792" cy="1080992"/>
+            <a:off x="640080" y="5288534"/>
+            <a:ext cx="10908792" cy="929385"/>
           </a:xfrm>
           <a:prstGeom prst="rect">
             <a:avLst/>
@@ -18851,14 +18170,14 @@
       </p:sp>
       <p:sp>
         <p:nvSpPr>
-          <p:cNvPr id="21" name="Rectangle 20"/>
+          <p:cNvPr id="20" name="Rectangle 19"/>
           <p:cNvSpPr/>
           <p:nvPr/>
         </p:nvSpPr>
         <p:spPr>
           <a:xfrm>
-            <a:off x="640080" y="5136927"/>
-            <a:ext cx="54864" cy="1080992"/>
+            <a:off x="640080" y="5288534"/>
+            <a:ext cx="54864" cy="929385"/>
           </a:xfrm>
           <a:prstGeom prst="rect">
             <a:avLst/>
@@ -18900,13 +18219,13 @@
       </p:sp>
       <p:sp>
         <p:nvSpPr>
-          <p:cNvPr id="22" name="TextBox 21"/>
+          <p:cNvPr id="21" name="TextBox 20"/>
           <p:cNvSpPr txBox="1"/>
           <p:nvPr/>
         </p:nvSpPr>
         <p:spPr>
           <a:xfrm>
-            <a:off x="804671" y="5246655"/>
+            <a:off x="804671" y="5398262"/>
             <a:ext cx="10616184" cy="228600"/>
           </a:xfrm>
           <a:prstGeom prst="rect">
@@ -18935,21 +18254,21 @@
               <a:rPr>
                 <a:latin typeface="Inter"/>
               </a:rPr>
-              <a:t>Key judgment — monitoring priority</a:t>
+              <a:t>Key judgment — Disclosures</a:t>
             </a:r>
           </a:p>
         </p:txBody>
       </p:sp>
       <p:sp>
         <p:nvSpPr>
-          <p:cNvPr id="23" name="TextBox 22"/>
+          <p:cNvPr id="22" name="TextBox 21"/>
           <p:cNvSpPr txBox="1"/>
           <p:nvPr/>
         </p:nvSpPr>
         <p:spPr>
           <a:xfrm>
-            <a:off x="804671" y="5530119"/>
-            <a:ext cx="10616184" cy="596360"/>
+            <a:off x="804671" y="5681726"/>
+            <a:ext cx="10616184" cy="444753"/>
           </a:xfrm>
           <a:prstGeom prst="rect">
             <a:avLst/>
@@ -18977,14 +18296,14 @@
               <a:rPr>
                 <a:latin typeface="Inter"/>
               </a:rPr>
-              <a:t>Observation: Item 11 disclosures is 0 in the review evidence [S3]. Why it matters: This result determines which item receives priority in the next monitoring cycle. Uncertainty: Supporting coverage may omit later filings or corroborating detail. What would change the view: A new filing or report that resolves the item or changes it by 1%.</a:t>
+              <a:t>Observation: None of the three managers reports an Item 11 disclosure [S3]. Why it matters: There is no disciplinary history to weigh between candidates. Uncertainty: Item 11 covers reportable events only. What would change the view: A new disclosure in an amended Form ADV.</a:t>
             </a:r>
           </a:p>
         </p:txBody>
       </p:sp>
       <p:sp>
         <p:nvSpPr>
-          <p:cNvPr id="24" name="Rectangle 23"/>
+          <p:cNvPr id="23" name="Rectangle 22"/>
           <p:cNvSpPr/>
           <p:nvPr/>
         </p:nvSpPr>
@@ -19033,7 +18352,7 @@
       </p:sp>
       <p:sp>
         <p:nvSpPr>
-          <p:cNvPr id="25" name="TextBox 24"/>
+          <p:cNvPr id="24" name="TextBox 23"/>
           <p:cNvSpPr txBox="1"/>
           <p:nvPr/>
         </p:nvSpPr>
@@ -19075,7 +18394,7 @@
       </p:sp>
       <p:sp>
         <p:nvSpPr>
-          <p:cNvPr id="26" name="TextBox 25"/>
+          <p:cNvPr id="25" name="TextBox 24"/>
           <p:cNvSpPr txBox="1"/>
           <p:nvPr/>
         </p:nvSpPr>
@@ -19117,7 +18436,7 @@
       </p:sp>
       <p:sp>
         <p:nvSpPr>
-          <p:cNvPr id="27" name="TextBox 26"/>
+          <p:cNvPr id="26" name="TextBox 25"/>
           <p:cNvSpPr txBox="1"/>
           <p:nvPr/>
         </p:nvSpPr>
@@ -19233,7 +18552,7 @@
         <p:spPr>
           <a:xfrm>
             <a:off x="640080" y="329184"/>
-            <a:ext cx="5303520" cy="182880"/>
+            <a:ext cx="9875520" cy="182880"/>
           </a:xfrm>
           <a:prstGeom prst="rect">
             <a:avLst/>
@@ -19274,48 +18593,6 @@
         </p:nvSpPr>
         <p:spPr>
           <a:xfrm>
-            <a:off x="5897880" y="310896"/>
-            <a:ext cx="4800600" cy="256032"/>
-          </a:xfrm>
-          <a:prstGeom prst="rect">
-            <a:avLst/>
-          </a:prstGeom>
-          <a:noFill/>
-        </p:spPr>
-        <p:txBody>
-          <a:bodyPr wrap="none" lIns="9144" rIns="9144" tIns="9144" bIns="9144" anchor="t">
-            <a:spAutoFit/>
-          </a:bodyPr>
-          <a:lstStyle/>
-          <a:p>
-            <a:pPr algn="r">
-              <a:spcAft>
-                <a:spcPts val="0"/>
-              </a:spcAft>
-              <a:defRPr sz="680" b="1">
-                <a:solidFill>
-                  <a:srgbClr val="4F6B00"/>
-                </a:solidFill>
-                <a:latin typeface="Inter"/>
-              </a:defRPr>
-            </a:pPr>
-            <a:r>
-              <a:rPr>
-                <a:latin typeface="Inter"/>
-              </a:rPr>
-              <a:t>Illustrative, Gradient Maintained — demo data, not the client's holdings or managers</a:t>
-            </a:r>
-          </a:p>
-        </p:txBody>
-      </p:sp>
-      <p:sp>
-        <p:nvSpPr>
-          <p:cNvPr id="5" name="TextBox 4"/>
-          <p:cNvSpPr txBox="1"/>
-          <p:nvPr/>
-        </p:nvSpPr>
-        <p:spPr>
-          <a:xfrm>
             <a:off x="640080" y="566928"/>
             <a:ext cx="10058400" cy="530352"/>
           </a:xfrm>
@@ -19352,7 +18629,7 @@
       </p:sp>
       <p:sp>
         <p:nvSpPr>
-          <p:cNvPr id="6" name="Rectangle 5"/>
+          <p:cNvPr id="5" name="Rectangle 4"/>
           <p:cNvSpPr/>
           <p:nvPr/>
         </p:nvSpPr>
@@ -19401,7 +18678,7 @@
       </p:sp>
       <p:sp>
         <p:nvSpPr>
-          <p:cNvPr id="7" name="Rectangle 6"/>
+          <p:cNvPr id="6" name="Rectangle 5"/>
           <p:cNvSpPr/>
           <p:nvPr/>
         </p:nvSpPr>
@@ -19450,7 +18727,7 @@
       </p:sp>
       <p:sp>
         <p:nvSpPr>
-          <p:cNvPr id="8" name="TextBox 7"/>
+          <p:cNvPr id="7" name="TextBox 6"/>
           <p:cNvSpPr txBox="1"/>
           <p:nvPr/>
         </p:nvSpPr>
@@ -19492,7 +18769,7 @@
       </p:sp>
       <p:sp>
         <p:nvSpPr>
-          <p:cNvPr id="9" name="TextBox 8"/>
+          <p:cNvPr id="8" name="TextBox 7"/>
           <p:cNvSpPr txBox="1"/>
           <p:nvPr/>
         </p:nvSpPr>
@@ -19534,7 +18811,7 @@
       </p:sp>
       <p:graphicFrame>
         <p:nvGraphicFramePr>
-          <p:cNvPr id="10" name="Chart 9"/>
+          <p:cNvPr id="9" name="Chart 8"/>
           <p:cNvGraphicFramePr>
             <a:graphicFrameLocks noGrp="1"/>
           </p:cNvGraphicFramePr>
@@ -19552,7 +18829,7 @@
       </p:graphicFrame>
       <p:sp>
         <p:nvSpPr>
-          <p:cNvPr id="11" name="Rectangle 10"/>
+          <p:cNvPr id="10" name="Rectangle 9"/>
           <p:cNvSpPr/>
           <p:nvPr/>
         </p:nvSpPr>
@@ -19601,7 +18878,7 @@
       </p:sp>
       <p:sp>
         <p:nvSpPr>
-          <p:cNvPr id="12" name="TextBox 11"/>
+          <p:cNvPr id="11" name="TextBox 10"/>
           <p:cNvSpPr txBox="1"/>
           <p:nvPr/>
         </p:nvSpPr>
@@ -19643,7 +18920,7 @@
       </p:sp>
       <p:graphicFrame>
         <p:nvGraphicFramePr>
-          <p:cNvPr id="13" name="Chart 12"/>
+          <p:cNvPr id="12" name="Chart 11"/>
           <p:cNvGraphicFramePr>
             <a:graphicFrameLocks noGrp="1"/>
           </p:cNvGraphicFramePr>
@@ -19661,7 +18938,7 @@
       </p:graphicFrame>
       <p:sp>
         <p:nvSpPr>
-          <p:cNvPr id="14" name="Rectangle 13"/>
+          <p:cNvPr id="13" name="Rectangle 12"/>
           <p:cNvSpPr/>
           <p:nvPr/>
         </p:nvSpPr>
@@ -19710,7 +18987,7 @@
       </p:sp>
       <p:sp>
         <p:nvSpPr>
-          <p:cNvPr id="15" name="TextBox 14"/>
+          <p:cNvPr id="14" name="TextBox 13"/>
           <p:cNvSpPr txBox="1"/>
           <p:nvPr/>
         </p:nvSpPr>
@@ -19752,7 +19029,7 @@
       </p:sp>
       <p:sp>
         <p:nvSpPr>
-          <p:cNvPr id="16" name="TextBox 15"/>
+          <p:cNvPr id="15" name="TextBox 14"/>
           <p:cNvSpPr txBox="1"/>
           <p:nvPr/>
         </p:nvSpPr>
@@ -19794,7 +19071,7 @@
       </p:sp>
       <p:sp>
         <p:nvSpPr>
-          <p:cNvPr id="17" name="TextBox 16"/>
+          <p:cNvPr id="16" name="TextBox 15"/>
           <p:cNvSpPr txBox="1"/>
           <p:nvPr/>
         </p:nvSpPr>
@@ -19910,7 +19187,7 @@
         <p:spPr>
           <a:xfrm>
             <a:off x="640080" y="329184"/>
-            <a:ext cx="5303520" cy="182880"/>
+            <a:ext cx="9875520" cy="182880"/>
           </a:xfrm>
           <a:prstGeom prst="rect">
             <a:avLst/>
@@ -19951,48 +19228,6 @@
         </p:nvSpPr>
         <p:spPr>
           <a:xfrm>
-            <a:off x="5897880" y="310896"/>
-            <a:ext cx="4800600" cy="256032"/>
-          </a:xfrm>
-          <a:prstGeom prst="rect">
-            <a:avLst/>
-          </a:prstGeom>
-          <a:noFill/>
-        </p:spPr>
-        <p:txBody>
-          <a:bodyPr wrap="none" lIns="9144" rIns="9144" tIns="9144" bIns="9144" anchor="t">
-            <a:spAutoFit/>
-          </a:bodyPr>
-          <a:lstStyle/>
-          <a:p>
-            <a:pPr algn="r">
-              <a:spcAft>
-                <a:spcPts val="0"/>
-              </a:spcAft>
-              <a:defRPr sz="680" b="1">
-                <a:solidFill>
-                  <a:srgbClr val="4F6B00"/>
-                </a:solidFill>
-                <a:latin typeface="Inter"/>
-              </a:defRPr>
-            </a:pPr>
-            <a:r>
-              <a:rPr>
-                <a:latin typeface="Inter"/>
-              </a:rPr>
-              <a:t>Illustrative, Gradient Maintained — demo data, not the client's holdings or managers</a:t>
-            </a:r>
-          </a:p>
-        </p:txBody>
-      </p:sp>
-      <p:sp>
-        <p:nvSpPr>
-          <p:cNvPr id="5" name="TextBox 4"/>
-          <p:cNvSpPr txBox="1"/>
-          <p:nvPr/>
-        </p:nvSpPr>
-        <p:spPr>
-          <a:xfrm>
             <a:off x="640080" y="566928"/>
             <a:ext cx="10058400" cy="530352"/>
           </a:xfrm>
@@ -20029,7 +19264,7 @@
       </p:sp>
       <p:sp>
         <p:nvSpPr>
-          <p:cNvPr id="6" name="Rectangle 5"/>
+          <p:cNvPr id="5" name="Rectangle 4"/>
           <p:cNvSpPr/>
           <p:nvPr/>
         </p:nvSpPr>
@@ -20078,7 +19313,7 @@
       </p:sp>
       <p:sp>
         <p:nvSpPr>
-          <p:cNvPr id="7" name="Rectangle 6"/>
+          <p:cNvPr id="6" name="Rectangle 5"/>
           <p:cNvSpPr/>
           <p:nvPr/>
         </p:nvSpPr>
@@ -20127,7 +19362,7 @@
       </p:sp>
       <p:sp>
         <p:nvSpPr>
-          <p:cNvPr id="8" name="TextBox 7"/>
+          <p:cNvPr id="7" name="TextBox 6"/>
           <p:cNvSpPr txBox="1"/>
           <p:nvPr/>
         </p:nvSpPr>
@@ -20169,7 +19404,7 @@
       </p:sp>
       <p:sp>
         <p:nvSpPr>
-          <p:cNvPr id="9" name="TextBox 8"/>
+          <p:cNvPr id="8" name="TextBox 7"/>
           <p:cNvSpPr txBox="1"/>
           <p:nvPr/>
         </p:nvSpPr>
@@ -20211,7 +19446,7 @@
       </p:sp>
       <p:graphicFrame>
         <p:nvGraphicFramePr>
-          <p:cNvPr id="10" name="Chart 9"/>
+          <p:cNvPr id="9" name="Chart 8"/>
           <p:cNvGraphicFramePr>
             <a:graphicFrameLocks noGrp="1"/>
           </p:cNvGraphicFramePr>
@@ -20229,7 +19464,7 @@
       </p:graphicFrame>
       <p:sp>
         <p:nvSpPr>
-          <p:cNvPr id="11" name="Rectangle 10"/>
+          <p:cNvPr id="10" name="Rectangle 9"/>
           <p:cNvSpPr/>
           <p:nvPr/>
         </p:nvSpPr>
@@ -20278,7 +19513,7 @@
       </p:sp>
       <p:sp>
         <p:nvSpPr>
-          <p:cNvPr id="12" name="TextBox 11"/>
+          <p:cNvPr id="11" name="TextBox 10"/>
           <p:cNvSpPr txBox="1"/>
           <p:nvPr/>
         </p:nvSpPr>
@@ -20320,7 +19555,7 @@
       </p:sp>
       <p:graphicFrame>
         <p:nvGraphicFramePr>
-          <p:cNvPr id="13" name="Chart 12"/>
+          <p:cNvPr id="12" name="Chart 11"/>
           <p:cNvGraphicFramePr>
             <a:graphicFrameLocks noGrp="1"/>
           </p:cNvGraphicFramePr>
@@ -20338,7 +19573,7 @@
       </p:graphicFrame>
       <p:sp>
         <p:nvSpPr>
-          <p:cNvPr id="14" name="Rectangle 13"/>
+          <p:cNvPr id="13" name="Rectangle 12"/>
           <p:cNvSpPr/>
           <p:nvPr/>
         </p:nvSpPr>
@@ -20387,7 +19622,7 @@
       </p:sp>
       <p:sp>
         <p:nvSpPr>
-          <p:cNvPr id="15" name="TextBox 14"/>
+          <p:cNvPr id="14" name="TextBox 13"/>
           <p:cNvSpPr txBox="1"/>
           <p:nvPr/>
         </p:nvSpPr>
@@ -20429,7 +19664,7 @@
       </p:sp>
       <p:sp>
         <p:nvSpPr>
-          <p:cNvPr id="16" name="TextBox 15"/>
+          <p:cNvPr id="15" name="TextBox 14"/>
           <p:cNvSpPr txBox="1"/>
           <p:nvPr/>
         </p:nvSpPr>
@@ -20471,7 +19706,7 @@
       </p:sp>
       <p:sp>
         <p:nvSpPr>
-          <p:cNvPr id="17" name="TextBox 16"/>
+          <p:cNvPr id="16" name="TextBox 15"/>
           <p:cNvSpPr txBox="1"/>
           <p:nvPr/>
         </p:nvSpPr>
@@ -20587,7 +19822,7 @@
         <p:spPr>
           <a:xfrm>
             <a:off x="640080" y="329184"/>
-            <a:ext cx="5303520" cy="182880"/>
+            <a:ext cx="9875520" cy="182880"/>
           </a:xfrm>
           <a:prstGeom prst="rect">
             <a:avLst/>
@@ -20628,48 +19863,6 @@
         </p:nvSpPr>
         <p:spPr>
           <a:xfrm>
-            <a:off x="5897880" y="310896"/>
-            <a:ext cx="4800600" cy="256032"/>
-          </a:xfrm>
-          <a:prstGeom prst="rect">
-            <a:avLst/>
-          </a:prstGeom>
-          <a:noFill/>
-        </p:spPr>
-        <p:txBody>
-          <a:bodyPr wrap="none" lIns="9144" rIns="9144" tIns="9144" bIns="9144" anchor="t">
-            <a:spAutoFit/>
-          </a:bodyPr>
-          <a:lstStyle/>
-          <a:p>
-            <a:pPr algn="r">
-              <a:spcAft>
-                <a:spcPts val="0"/>
-              </a:spcAft>
-              <a:defRPr sz="680" b="1">
-                <a:solidFill>
-                  <a:srgbClr val="4F6B00"/>
-                </a:solidFill>
-                <a:latin typeface="Inter"/>
-              </a:defRPr>
-            </a:pPr>
-            <a:r>
-              <a:rPr>
-                <a:latin typeface="Inter"/>
-              </a:rPr>
-              <a:t>Illustrative, Gradient Maintained — demo data, not the client's holdings or managers</a:t>
-            </a:r>
-          </a:p>
-        </p:txBody>
-      </p:sp>
-      <p:sp>
-        <p:nvSpPr>
-          <p:cNvPr id="5" name="TextBox 4"/>
-          <p:cNvSpPr txBox="1"/>
-          <p:nvPr/>
-        </p:nvSpPr>
-        <p:spPr>
-          <a:xfrm>
             <a:off x="640080" y="566928"/>
             <a:ext cx="10058400" cy="530352"/>
           </a:xfrm>
@@ -20706,7 +19899,7 @@
       </p:sp>
       <p:sp>
         <p:nvSpPr>
-          <p:cNvPr id="6" name="Rectangle 5"/>
+          <p:cNvPr id="5" name="Rectangle 4"/>
           <p:cNvSpPr/>
           <p:nvPr/>
         </p:nvSpPr>
@@ -20755,7 +19948,7 @@
       </p:sp>
       <p:sp>
         <p:nvSpPr>
-          <p:cNvPr id="7" name="Rectangle 6"/>
+          <p:cNvPr id="6" name="Rectangle 5"/>
           <p:cNvSpPr/>
           <p:nvPr/>
         </p:nvSpPr>
@@ -20804,7 +19997,7 @@
       </p:sp>
       <p:sp>
         <p:nvSpPr>
-          <p:cNvPr id="8" name="TextBox 7"/>
+          <p:cNvPr id="7" name="TextBox 6"/>
           <p:cNvSpPr txBox="1"/>
           <p:nvPr/>
         </p:nvSpPr>
@@ -20846,7 +20039,7 @@
       </p:sp>
       <p:graphicFrame>
         <p:nvGraphicFramePr>
-          <p:cNvPr id="9" name="Table 8"/>
+          <p:cNvPr id="8" name="Table 7"/>
           <p:cNvGraphicFramePr>
             <a:graphicFrameLocks noGrp="1"/>
           </p:cNvGraphicFramePr>
@@ -22304,7 +21497,7 @@
       </p:graphicFrame>
       <p:sp>
         <p:nvSpPr>
-          <p:cNvPr id="10" name="TextBox 9"/>
+          <p:cNvPr id="9" name="TextBox 8"/>
           <p:cNvSpPr txBox="1"/>
           <p:nvPr/>
         </p:nvSpPr>
@@ -22346,7 +21539,7 @@
       </p:sp>
       <p:sp>
         <p:nvSpPr>
-          <p:cNvPr id="11" name="Rectangle 10"/>
+          <p:cNvPr id="10" name="Rectangle 9"/>
           <p:cNvSpPr/>
           <p:nvPr/>
         </p:nvSpPr>
@@ -22395,7 +21588,7 @@
       </p:sp>
       <p:sp>
         <p:nvSpPr>
-          <p:cNvPr id="12" name="TextBox 11"/>
+          <p:cNvPr id="11" name="TextBox 10"/>
           <p:cNvSpPr txBox="1"/>
           <p:nvPr/>
         </p:nvSpPr>
@@ -22437,7 +21630,7 @@
       </p:sp>
       <p:sp>
         <p:nvSpPr>
-          <p:cNvPr id="13" name="TextBox 12"/>
+          <p:cNvPr id="12" name="TextBox 11"/>
           <p:cNvSpPr txBox="1"/>
           <p:nvPr/>
         </p:nvSpPr>
@@ -22479,7 +21672,7 @@
       </p:sp>
       <p:sp>
         <p:nvSpPr>
-          <p:cNvPr id="14" name="TextBox 13"/>
+          <p:cNvPr id="13" name="TextBox 12"/>
           <p:cNvSpPr txBox="1"/>
           <p:nvPr/>
         </p:nvSpPr>
@@ -22595,7 +21788,7 @@
         <p:spPr>
           <a:xfrm>
             <a:off x="640080" y="329184"/>
-            <a:ext cx="5303520" cy="182880"/>
+            <a:ext cx="9875520" cy="182880"/>
           </a:xfrm>
           <a:prstGeom prst="rect">
             <a:avLst/>
@@ -22636,48 +21829,6 @@
         </p:nvSpPr>
         <p:spPr>
           <a:xfrm>
-            <a:off x="5897880" y="310896"/>
-            <a:ext cx="4800600" cy="256032"/>
-          </a:xfrm>
-          <a:prstGeom prst="rect">
-            <a:avLst/>
-          </a:prstGeom>
-          <a:noFill/>
-        </p:spPr>
-        <p:txBody>
-          <a:bodyPr wrap="none" lIns="9144" rIns="9144" tIns="9144" bIns="9144" anchor="t">
-            <a:spAutoFit/>
-          </a:bodyPr>
-          <a:lstStyle/>
-          <a:p>
-            <a:pPr algn="r">
-              <a:spcAft>
-                <a:spcPts val="0"/>
-              </a:spcAft>
-              <a:defRPr sz="680" b="1">
-                <a:solidFill>
-                  <a:srgbClr val="4F6B00"/>
-                </a:solidFill>
-                <a:latin typeface="Inter"/>
-              </a:defRPr>
-            </a:pPr>
-            <a:r>
-              <a:rPr>
-                <a:latin typeface="Inter"/>
-              </a:rPr>
-              <a:t>Illustrative, Gradient Maintained — demo data, not the client's holdings or managers</a:t>
-            </a:r>
-          </a:p>
-        </p:txBody>
-      </p:sp>
-      <p:sp>
-        <p:nvSpPr>
-          <p:cNvPr id="5" name="TextBox 4"/>
-          <p:cNvSpPr txBox="1"/>
-          <p:nvPr/>
-        </p:nvSpPr>
-        <p:spPr>
-          <a:xfrm>
             <a:off x="640080" y="566928"/>
             <a:ext cx="10058400" cy="530352"/>
           </a:xfrm>
@@ -22714,7 +21865,7 @@
       </p:sp>
       <p:sp>
         <p:nvSpPr>
-          <p:cNvPr id="6" name="Rectangle 5"/>
+          <p:cNvPr id="5" name="Rectangle 4"/>
           <p:cNvSpPr/>
           <p:nvPr/>
         </p:nvSpPr>
@@ -22763,7 +21914,7 @@
       </p:sp>
       <p:sp>
         <p:nvSpPr>
-          <p:cNvPr id="7" name="Rectangle 6"/>
+          <p:cNvPr id="6" name="Rectangle 5"/>
           <p:cNvSpPr/>
           <p:nvPr/>
         </p:nvSpPr>
@@ -22812,7 +21963,7 @@
       </p:sp>
       <p:sp>
         <p:nvSpPr>
-          <p:cNvPr id="8" name="TextBox 7"/>
+          <p:cNvPr id="7" name="TextBox 6"/>
           <p:cNvSpPr txBox="1"/>
           <p:nvPr/>
         </p:nvSpPr>
@@ -22854,7 +22005,7 @@
       </p:sp>
       <p:sp>
         <p:nvSpPr>
-          <p:cNvPr id="9" name="TextBox 8"/>
+          <p:cNvPr id="8" name="TextBox 7"/>
           <p:cNvSpPr txBox="1"/>
           <p:nvPr/>
         </p:nvSpPr>
@@ -22896,7 +22047,7 @@
       </p:sp>
       <p:graphicFrame>
         <p:nvGraphicFramePr>
-          <p:cNvPr id="10" name="Table 9"/>
+          <p:cNvPr id="9" name="Table 8"/>
           <p:cNvGraphicFramePr>
             <a:graphicFrameLocks noGrp="1"/>
           </p:cNvGraphicFramePr>
@@ -23584,7 +22735,7 @@
       </p:graphicFrame>
       <p:sp>
         <p:nvSpPr>
-          <p:cNvPr id="11" name="TextBox 10"/>
+          <p:cNvPr id="10" name="TextBox 9"/>
           <p:cNvSpPr txBox="1"/>
           <p:nvPr/>
         </p:nvSpPr>
@@ -23626,7 +22777,7 @@
       </p:sp>
       <p:sp>
         <p:nvSpPr>
-          <p:cNvPr id="12" name="Rectangle 11"/>
+          <p:cNvPr id="11" name="Rectangle 10"/>
           <p:cNvSpPr/>
           <p:nvPr/>
         </p:nvSpPr>
@@ -23675,7 +22826,7 @@
       </p:sp>
       <p:sp>
         <p:nvSpPr>
-          <p:cNvPr id="13" name="Rectangle 12"/>
+          <p:cNvPr id="12" name="Rectangle 11"/>
           <p:cNvSpPr/>
           <p:nvPr/>
         </p:nvSpPr>
@@ -23724,7 +22875,7 @@
       </p:sp>
       <p:sp>
         <p:nvSpPr>
-          <p:cNvPr id="14" name="TextBox 13"/>
+          <p:cNvPr id="13" name="TextBox 12"/>
           <p:cNvSpPr txBox="1"/>
           <p:nvPr/>
         </p:nvSpPr>
@@ -23766,7 +22917,7 @@
       </p:sp>
       <p:sp>
         <p:nvSpPr>
-          <p:cNvPr id="15" name="TextBox 14"/>
+          <p:cNvPr id="14" name="TextBox 13"/>
           <p:cNvSpPr txBox="1"/>
           <p:nvPr/>
         </p:nvSpPr>
@@ -23808,7 +22959,7 @@
       </p:sp>
       <p:sp>
         <p:nvSpPr>
-          <p:cNvPr id="16" name="Rectangle 15"/>
+          <p:cNvPr id="15" name="Rectangle 14"/>
           <p:cNvSpPr/>
           <p:nvPr/>
         </p:nvSpPr>
@@ -23857,7 +23008,7 @@
       </p:sp>
       <p:sp>
         <p:nvSpPr>
-          <p:cNvPr id="17" name="Rectangle 16"/>
+          <p:cNvPr id="16" name="Rectangle 15"/>
           <p:cNvSpPr/>
           <p:nvPr/>
         </p:nvSpPr>
@@ -23906,7 +23057,7 @@
       </p:sp>
       <p:sp>
         <p:nvSpPr>
-          <p:cNvPr id="18" name="TextBox 17"/>
+          <p:cNvPr id="17" name="TextBox 16"/>
           <p:cNvSpPr txBox="1"/>
           <p:nvPr/>
         </p:nvSpPr>
@@ -23948,7 +23099,7 @@
       </p:sp>
       <p:sp>
         <p:nvSpPr>
-          <p:cNvPr id="19" name="TextBox 18"/>
+          <p:cNvPr id="18" name="TextBox 17"/>
           <p:cNvSpPr txBox="1"/>
           <p:nvPr/>
         </p:nvSpPr>
@@ -23990,7 +23141,7 @@
       </p:sp>
       <p:sp>
         <p:nvSpPr>
-          <p:cNvPr id="20" name="Rectangle 19"/>
+          <p:cNvPr id="19" name="Rectangle 18"/>
           <p:cNvSpPr/>
           <p:nvPr/>
         </p:nvSpPr>
@@ -24039,7 +23190,7 @@
       </p:sp>
       <p:sp>
         <p:nvSpPr>
-          <p:cNvPr id="21" name="TextBox 20"/>
+          <p:cNvPr id="20" name="TextBox 19"/>
           <p:cNvSpPr txBox="1"/>
           <p:nvPr/>
         </p:nvSpPr>
@@ -24081,7 +23232,7 @@
       </p:sp>
       <p:sp>
         <p:nvSpPr>
-          <p:cNvPr id="22" name="TextBox 21"/>
+          <p:cNvPr id="21" name="TextBox 20"/>
           <p:cNvSpPr txBox="1"/>
           <p:nvPr/>
         </p:nvSpPr>
@@ -24123,7 +23274,7 @@
       </p:sp>
       <p:sp>
         <p:nvSpPr>
-          <p:cNvPr id="23" name="TextBox 22"/>
+          <p:cNvPr id="22" name="TextBox 21"/>
           <p:cNvSpPr txBox="1"/>
           <p:nvPr/>
         </p:nvSpPr>
@@ -24239,7 +23390,7 @@
         <p:spPr>
           <a:xfrm>
             <a:off x="640080" y="329184"/>
-            <a:ext cx="5303520" cy="182880"/>
+            <a:ext cx="9875520" cy="182880"/>
           </a:xfrm>
           <a:prstGeom prst="rect">
             <a:avLst/>
@@ -24280,48 +23431,6 @@
         </p:nvSpPr>
         <p:spPr>
           <a:xfrm>
-            <a:off x="5897880" y="310896"/>
-            <a:ext cx="4800600" cy="256032"/>
-          </a:xfrm>
-          <a:prstGeom prst="rect">
-            <a:avLst/>
-          </a:prstGeom>
-          <a:noFill/>
-        </p:spPr>
-        <p:txBody>
-          <a:bodyPr wrap="none" lIns="9144" rIns="9144" tIns="9144" bIns="9144" anchor="t">
-            <a:spAutoFit/>
-          </a:bodyPr>
-          <a:lstStyle/>
-          <a:p>
-            <a:pPr algn="r">
-              <a:spcAft>
-                <a:spcPts val="0"/>
-              </a:spcAft>
-              <a:defRPr sz="680" b="1">
-                <a:solidFill>
-                  <a:srgbClr val="4F6B00"/>
-                </a:solidFill>
-                <a:latin typeface="Inter"/>
-              </a:defRPr>
-            </a:pPr>
-            <a:r>
-              <a:rPr>
-                <a:latin typeface="Inter"/>
-              </a:rPr>
-              <a:t>Illustrative, Gradient Maintained — demo data, not the client's holdings or managers</a:t>
-            </a:r>
-          </a:p>
-        </p:txBody>
-      </p:sp>
-      <p:sp>
-        <p:nvSpPr>
-          <p:cNvPr id="5" name="TextBox 4"/>
-          <p:cNvSpPr txBox="1"/>
-          <p:nvPr/>
-        </p:nvSpPr>
-        <p:spPr>
-          <a:xfrm>
             <a:off x="640080" y="566928"/>
             <a:ext cx="10058400" cy="530352"/>
           </a:xfrm>
@@ -24358,7 +23467,7 @@
       </p:sp>
       <p:sp>
         <p:nvSpPr>
-          <p:cNvPr id="6" name="Rectangle 5"/>
+          <p:cNvPr id="5" name="Rectangle 4"/>
           <p:cNvSpPr/>
           <p:nvPr/>
         </p:nvSpPr>
@@ -24407,7 +23516,7 @@
       </p:sp>
       <p:sp>
         <p:nvSpPr>
-          <p:cNvPr id="7" name="Rectangle 6"/>
+          <p:cNvPr id="6" name="Rectangle 5"/>
           <p:cNvSpPr/>
           <p:nvPr/>
         </p:nvSpPr>
@@ -24456,7 +23565,7 @@
       </p:sp>
       <p:sp>
         <p:nvSpPr>
-          <p:cNvPr id="8" name="TextBox 7"/>
+          <p:cNvPr id="7" name="TextBox 6"/>
           <p:cNvSpPr txBox="1"/>
           <p:nvPr/>
         </p:nvSpPr>
@@ -24498,7 +23607,7 @@
       </p:sp>
       <p:sp>
         <p:nvSpPr>
-          <p:cNvPr id="9" name="TextBox 8"/>
+          <p:cNvPr id="8" name="TextBox 7"/>
           <p:cNvSpPr txBox="1"/>
           <p:nvPr/>
         </p:nvSpPr>
@@ -24540,7 +23649,7 @@
       </p:sp>
       <p:graphicFrame>
         <p:nvGraphicFramePr>
-          <p:cNvPr id="10" name="Chart 9"/>
+          <p:cNvPr id="9" name="Chart 8"/>
           <p:cNvGraphicFramePr>
             <a:graphicFrameLocks noGrp="1"/>
           </p:cNvGraphicFramePr>
@@ -24558,7 +23667,7 @@
       </p:graphicFrame>
       <p:sp>
         <p:nvSpPr>
-          <p:cNvPr id="11" name="Rectangle 10"/>
+          <p:cNvPr id="10" name="Rectangle 9"/>
           <p:cNvSpPr/>
           <p:nvPr/>
         </p:nvSpPr>
@@ -24607,7 +23716,7 @@
       </p:sp>
       <p:sp>
         <p:nvSpPr>
-          <p:cNvPr id="12" name="TextBox 11"/>
+          <p:cNvPr id="11" name="TextBox 10"/>
           <p:cNvSpPr txBox="1"/>
           <p:nvPr/>
         </p:nvSpPr>
@@ -24649,7 +23758,7 @@
       </p:sp>
       <p:sp>
         <p:nvSpPr>
-          <p:cNvPr id="13" name="TextBox 12"/>
+          <p:cNvPr id="12" name="TextBox 11"/>
           <p:cNvSpPr txBox="1"/>
           <p:nvPr/>
         </p:nvSpPr>
@@ -24691,7 +23800,7 @@
       </p:sp>
       <p:sp>
         <p:nvSpPr>
-          <p:cNvPr id="14" name="TextBox 13"/>
+          <p:cNvPr id="13" name="TextBox 12"/>
           <p:cNvSpPr txBox="1"/>
           <p:nvPr/>
         </p:nvSpPr>
@@ -24807,7 +23916,7 @@
         <p:spPr>
           <a:xfrm>
             <a:off x="640080" y="329184"/>
-            <a:ext cx="5303520" cy="182880"/>
+            <a:ext cx="9875520" cy="182880"/>
           </a:xfrm>
           <a:prstGeom prst="rect">
             <a:avLst/>
@@ -24848,48 +23957,6 @@
         </p:nvSpPr>
         <p:spPr>
           <a:xfrm>
-            <a:off x="5897880" y="310896"/>
-            <a:ext cx="4800600" cy="256032"/>
-          </a:xfrm>
-          <a:prstGeom prst="rect">
-            <a:avLst/>
-          </a:prstGeom>
-          <a:noFill/>
-        </p:spPr>
-        <p:txBody>
-          <a:bodyPr wrap="none" lIns="9144" rIns="9144" tIns="9144" bIns="9144" anchor="t">
-            <a:spAutoFit/>
-          </a:bodyPr>
-          <a:lstStyle/>
-          <a:p>
-            <a:pPr algn="r">
-              <a:spcAft>
-                <a:spcPts val="0"/>
-              </a:spcAft>
-              <a:defRPr sz="680" b="1">
-                <a:solidFill>
-                  <a:srgbClr val="4F6B00"/>
-                </a:solidFill>
-                <a:latin typeface="Inter"/>
-              </a:defRPr>
-            </a:pPr>
-            <a:r>
-              <a:rPr>
-                <a:latin typeface="Inter"/>
-              </a:rPr>
-              <a:t>Illustrative, Gradient Maintained — demo data, not the client's holdings or managers</a:t>
-            </a:r>
-          </a:p>
-        </p:txBody>
-      </p:sp>
-      <p:sp>
-        <p:nvSpPr>
-          <p:cNvPr id="5" name="TextBox 4"/>
-          <p:cNvSpPr txBox="1"/>
-          <p:nvPr/>
-        </p:nvSpPr>
-        <p:spPr>
-          <a:xfrm>
             <a:off x="640080" y="566928"/>
             <a:ext cx="10058400" cy="530352"/>
           </a:xfrm>
@@ -24926,7 +23993,7 @@
       </p:sp>
       <p:sp>
         <p:nvSpPr>
-          <p:cNvPr id="6" name="Rectangle 5"/>
+          <p:cNvPr id="5" name="Rectangle 4"/>
           <p:cNvSpPr/>
           <p:nvPr/>
         </p:nvSpPr>
@@ -24975,7 +24042,7 @@
       </p:sp>
       <p:sp>
         <p:nvSpPr>
-          <p:cNvPr id="7" name="Rectangle 6"/>
+          <p:cNvPr id="6" name="Rectangle 5"/>
           <p:cNvSpPr/>
           <p:nvPr/>
         </p:nvSpPr>
@@ -25024,7 +24091,7 @@
       </p:sp>
       <p:sp>
         <p:nvSpPr>
-          <p:cNvPr id="8" name="TextBox 7"/>
+          <p:cNvPr id="7" name="TextBox 6"/>
           <p:cNvSpPr txBox="1"/>
           <p:nvPr/>
         </p:nvSpPr>
@@ -25066,7 +24133,7 @@
       </p:sp>
       <p:sp>
         <p:nvSpPr>
-          <p:cNvPr id="9" name="Rectangle 8"/>
+          <p:cNvPr id="8" name="Rectangle 7"/>
           <p:cNvSpPr/>
           <p:nvPr/>
         </p:nvSpPr>
@@ -25115,7 +24182,7 @@
       </p:sp>
       <p:sp>
         <p:nvSpPr>
-          <p:cNvPr id="10" name="Rectangle 9"/>
+          <p:cNvPr id="9" name="Rectangle 8"/>
           <p:cNvSpPr/>
           <p:nvPr/>
         </p:nvSpPr>
@@ -25164,7 +24231,7 @@
       </p:sp>
       <p:sp>
         <p:nvSpPr>
-          <p:cNvPr id="11" name="TextBox 10"/>
+          <p:cNvPr id="10" name="TextBox 9"/>
           <p:cNvSpPr txBox="1"/>
           <p:nvPr/>
         </p:nvSpPr>
@@ -25206,7 +24273,7 @@
       </p:sp>
       <p:sp>
         <p:nvSpPr>
-          <p:cNvPr id="12" name="TextBox 11"/>
+          <p:cNvPr id="11" name="TextBox 10"/>
           <p:cNvSpPr txBox="1"/>
           <p:nvPr/>
         </p:nvSpPr>
@@ -25248,7 +24315,7 @@
       </p:sp>
       <p:graphicFrame>
         <p:nvGraphicFramePr>
-          <p:cNvPr id="13" name="Table 12"/>
+          <p:cNvPr id="12" name="Table 11"/>
           <p:cNvGraphicFramePr>
             <a:graphicFrameLocks noGrp="1"/>
           </p:cNvGraphicFramePr>
@@ -25370,7 +24437,7 @@
                         <a:rPr>
                           <a:latin typeface="Inter"/>
                         </a:rPr>
-                        <a:t>● MEDIUM</a:t>
+                        <a:t>● Medium</a:t>
                       </a:r>
                     </a:p>
                   </a:txBody>
@@ -25453,7 +24520,7 @@
                         <a:rPr>
                           <a:latin typeface="Inter"/>
                         </a:rPr>
-                        <a:t>● LOW</a:t>
+                        <a:t>● Low</a:t>
                       </a:r>
                     </a:p>
                   </a:txBody>
@@ -25524,7 +24591,7 @@
       </p:graphicFrame>
       <p:graphicFrame>
         <p:nvGraphicFramePr>
-          <p:cNvPr id="14" name="Table 13"/>
+          <p:cNvPr id="13" name="Table 12"/>
           <p:cNvGraphicFramePr>
             <a:graphicFrameLocks noGrp="1"/>
           </p:cNvGraphicFramePr>
@@ -25646,7 +24713,7 @@
                         <a:rPr>
                           <a:latin typeface="Inter"/>
                         </a:rPr>
-                        <a:t>● MEDIUM</a:t>
+                        <a:t>● Medium</a:t>
                       </a:r>
                     </a:p>
                   </a:txBody>
@@ -25729,7 +24796,7 @@
                         <a:rPr>
                           <a:latin typeface="Inter"/>
                         </a:rPr>
-                        <a:t>● LOW</a:t>
+                        <a:t>● Low</a:t>
                       </a:r>
                     </a:p>
                   </a:txBody>
@@ -25800,7 +24867,7 @@
       </p:graphicFrame>
       <p:sp>
         <p:nvSpPr>
-          <p:cNvPr id="15" name="Rectangle 14"/>
+          <p:cNvPr id="14" name="Rectangle 13"/>
           <p:cNvSpPr/>
           <p:nvPr/>
         </p:nvSpPr>
@@ -25849,7 +24916,7 @@
       </p:sp>
       <p:sp>
         <p:nvSpPr>
-          <p:cNvPr id="16" name="Rectangle 15"/>
+          <p:cNvPr id="15" name="Rectangle 14"/>
           <p:cNvSpPr/>
           <p:nvPr/>
         </p:nvSpPr>
@@ -25898,7 +24965,7 @@
       </p:sp>
       <p:sp>
         <p:nvSpPr>
-          <p:cNvPr id="17" name="TextBox 16"/>
+          <p:cNvPr id="16" name="TextBox 15"/>
           <p:cNvSpPr txBox="1"/>
           <p:nvPr/>
         </p:nvSpPr>
@@ -25940,7 +25007,7 @@
       </p:sp>
       <p:sp>
         <p:nvSpPr>
-          <p:cNvPr id="18" name="TextBox 17"/>
+          <p:cNvPr id="17" name="TextBox 16"/>
           <p:cNvSpPr txBox="1"/>
           <p:nvPr/>
         </p:nvSpPr>
@@ -25982,7 +25049,7 @@
       </p:sp>
       <p:sp>
         <p:nvSpPr>
-          <p:cNvPr id="19" name="Rectangle 18"/>
+          <p:cNvPr id="18" name="Rectangle 17"/>
           <p:cNvSpPr/>
           <p:nvPr/>
         </p:nvSpPr>
@@ -26031,7 +25098,7 @@
       </p:sp>
       <p:sp>
         <p:nvSpPr>
-          <p:cNvPr id="20" name="TextBox 19"/>
+          <p:cNvPr id="19" name="TextBox 18"/>
           <p:cNvSpPr txBox="1"/>
           <p:nvPr/>
         </p:nvSpPr>
@@ -26073,7 +25140,7 @@
       </p:sp>
       <p:sp>
         <p:nvSpPr>
-          <p:cNvPr id="21" name="TextBox 20"/>
+          <p:cNvPr id="20" name="TextBox 19"/>
           <p:cNvSpPr txBox="1"/>
           <p:nvPr/>
         </p:nvSpPr>
@@ -26115,7 +25182,7 @@
       </p:sp>
       <p:sp>
         <p:nvSpPr>
-          <p:cNvPr id="22" name="TextBox 21"/>
+          <p:cNvPr id="21" name="TextBox 20"/>
           <p:cNvSpPr txBox="1"/>
           <p:nvPr/>
         </p:nvSpPr>
